--- a/3~4학년/2주차/수업자료.pptx
+++ b/3~4학년/2주차/수업자료.pptx
@@ -5,32 +5,44 @@
     <p:sldMasterId id="2147483659" r:id="rId1"/>
   </p:sldMasterIdLst>
   <p:notesMasterIdLst>
-    <p:notesMasterId r:id="rId12"/>
+    <p:notesMasterId r:id="rId24"/>
   </p:notesMasterIdLst>
   <p:sldIdLst>
     <p:sldId id="256" r:id="rId2"/>
     <p:sldId id="257" r:id="rId3"/>
-    <p:sldId id="270" r:id="rId4"/>
-    <p:sldId id="271" r:id="rId5"/>
-    <p:sldId id="272" r:id="rId6"/>
-    <p:sldId id="273" r:id="rId7"/>
-    <p:sldId id="274" r:id="rId8"/>
-    <p:sldId id="275" r:id="rId9"/>
-    <p:sldId id="276" r:id="rId10"/>
+    <p:sldId id="271" r:id="rId4"/>
+    <p:sldId id="272" r:id="rId5"/>
+    <p:sldId id="273" r:id="rId6"/>
+    <p:sldId id="274" r:id="rId7"/>
+    <p:sldId id="275" r:id="rId8"/>
+    <p:sldId id="276" r:id="rId9"/>
+    <p:sldId id="278" r:id="rId10"/>
     <p:sldId id="277" r:id="rId11"/>
+    <p:sldId id="279" r:id="rId12"/>
+    <p:sldId id="280" r:id="rId13"/>
+    <p:sldId id="281" r:id="rId14"/>
+    <p:sldId id="282" r:id="rId15"/>
+    <p:sldId id="284" r:id="rId16"/>
+    <p:sldId id="285" r:id="rId17"/>
+    <p:sldId id="270" r:id="rId18"/>
+    <p:sldId id="286" r:id="rId19"/>
+    <p:sldId id="287" r:id="rId20"/>
+    <p:sldId id="259" r:id="rId21"/>
+    <p:sldId id="264" r:id="rId22"/>
+    <p:sldId id="288" r:id="rId23"/>
   </p:sldIdLst>
   <p:sldSz cx="12192000" cy="6858000"/>
   <p:notesSz cx="6858000" cy="9144000"/>
   <p:embeddedFontLst>
     <p:embeddedFont>
       <p:font typeface="Afacad Flux" panose="020B0600000101010101" charset="0"/>
-      <p:regular r:id="rId13"/>
-      <p:bold r:id="rId14"/>
+      <p:regular r:id="rId25"/>
+      <p:bold r:id="rId26"/>
     </p:embeddedFont>
     <p:embeddedFont>
       <p:font typeface="Comfortaa" panose="020B0600000101010101" charset="0"/>
-      <p:regular r:id="rId15"/>
-      <p:bold r:id="rId16"/>
+      <p:regular r:id="rId27"/>
+      <p:bold r:id="rId28"/>
     </p:embeddedFont>
   </p:embeddedFontLst>
   <p:defaultTextStyle>
@@ -953,12 +965,18 @@
 </p:notes>
 </file>
 
-<file path=ppt/notesSlides/notesSlide2.xml><?xml version="1.0" encoding="utf-8"?>
+<file path=ppt/notesSlides/notesSlide11.xml><?xml version="1.0" encoding="utf-8"?>
 <p:notes xmlns:a="http://schemas.openxmlformats.org/drawingml/2006/main" xmlns:r="http://schemas.openxmlformats.org/officeDocument/2006/relationships" xmlns:p="http://schemas.openxmlformats.org/presentationml/2006/main" showMasterSp="0" showMasterPhAnim="0">
   <p:cSld>
     <p:spTree>
       <p:nvGrpSpPr>
-        <p:cNvPr id="1" name="Shape 87"/>
+        <p:cNvPr id="1" name="Shape 87">
+          <a:extLst>
+            <a:ext uri="{FF2B5EF4-FFF2-40B4-BE49-F238E27FC236}">
+              <a16:creationId xmlns:a16="http://schemas.microsoft.com/office/drawing/2014/main" id="{E11499FC-8753-5E2F-DC8E-07D8A37CB1B4}"/>
+            </a:ext>
+          </a:extLst>
+        </p:cNvPr>
         <p:cNvGrpSpPr/>
         <p:nvPr/>
       </p:nvGrpSpPr>
@@ -972,7 +990,13 @@
       </p:grpSpPr>
       <p:sp>
         <p:nvSpPr>
-          <p:cNvPr id="88" name="Google Shape;88;p2:notes"/>
+          <p:cNvPr id="88" name="Google Shape;88;p2:notes">
+            <a:extLst>
+              <a:ext uri="{FF2B5EF4-FFF2-40B4-BE49-F238E27FC236}">
+                <a16:creationId xmlns:a16="http://schemas.microsoft.com/office/drawing/2014/main" id="{1E8EBC53-8E7A-0A2B-7C81-64D78A2DD019}"/>
+              </a:ext>
+            </a:extLst>
+          </p:cNvPr>
           <p:cNvSpPr txBox="1">
             <a:spLocks noGrp="1"/>
           </p:cNvSpPr>
@@ -1010,7 +1034,13 @@
       </p:sp>
       <p:sp>
         <p:nvSpPr>
-          <p:cNvPr id="89" name="Google Shape;89;p2:notes"/>
+          <p:cNvPr id="89" name="Google Shape;89;p2:notes">
+            <a:extLst>
+              <a:ext uri="{FF2B5EF4-FFF2-40B4-BE49-F238E27FC236}">
+                <a16:creationId xmlns:a16="http://schemas.microsoft.com/office/drawing/2014/main" id="{1BA89141-2E96-50C2-76D0-01B80C32D349}"/>
+              </a:ext>
+            </a:extLst>
+          </p:cNvPr>
           <p:cNvSpPr>
             <a:spLocks noGrp="1" noRot="1" noChangeAspect="1"/>
           </p:cNvSpPr>
@@ -1050,6 +1080,11 @@
         </p:spPr>
       </p:sp>
     </p:spTree>
+    <p:extLst>
+      <p:ext uri="{BB962C8B-B14F-4D97-AF65-F5344CB8AC3E}">
+        <p14:creationId xmlns:p14="http://schemas.microsoft.com/office/powerpoint/2010/main" val="1038870888"/>
+      </p:ext>
+    </p:extLst>
   </p:cSld>
   <p:clrMapOvr>
     <a:masterClrMapping/>
@@ -1057,7 +1092,642 @@
 </p:notes>
 </file>
 
-<file path=ppt/notesSlides/notesSlide3.xml><?xml version="1.0" encoding="utf-8"?>
+<file path=ppt/notesSlides/notesSlide12.xml><?xml version="1.0" encoding="utf-8"?>
+<p:notes xmlns:a="http://schemas.openxmlformats.org/drawingml/2006/main" xmlns:r="http://schemas.openxmlformats.org/officeDocument/2006/relationships" xmlns:p="http://schemas.openxmlformats.org/presentationml/2006/main" showMasterSp="0" showMasterPhAnim="0">
+  <p:cSld>
+    <p:spTree>
+      <p:nvGrpSpPr>
+        <p:cNvPr id="1" name="Shape 184">
+          <a:extLst>
+            <a:ext uri="{FF2B5EF4-FFF2-40B4-BE49-F238E27FC236}">
+              <a16:creationId xmlns:a16="http://schemas.microsoft.com/office/drawing/2014/main" id="{60BF2122-37EF-6473-ECE3-E5047F3A4C78}"/>
+            </a:ext>
+          </a:extLst>
+        </p:cNvPr>
+        <p:cNvGrpSpPr/>
+        <p:nvPr/>
+      </p:nvGrpSpPr>
+      <p:grpSpPr>
+        <a:xfrm>
+          <a:off x="0" y="0"/>
+          <a:ext cx="0" cy="0"/>
+          <a:chOff x="0" y="0"/>
+          <a:chExt cx="0" cy="0"/>
+        </a:xfrm>
+      </p:grpSpPr>
+      <p:sp>
+        <p:nvSpPr>
+          <p:cNvPr id="185" name="Google Shape;185;p12:notes">
+            <a:extLst>
+              <a:ext uri="{FF2B5EF4-FFF2-40B4-BE49-F238E27FC236}">
+                <a16:creationId xmlns:a16="http://schemas.microsoft.com/office/drawing/2014/main" id="{D9730D15-6039-0C53-D4A2-A68CE26F6949}"/>
+              </a:ext>
+            </a:extLst>
+          </p:cNvPr>
+          <p:cNvSpPr txBox="1">
+            <a:spLocks noGrp="1"/>
+          </p:cNvSpPr>
+          <p:nvPr>
+            <p:ph type="body" idx="1"/>
+          </p:nvPr>
+        </p:nvSpPr>
+        <p:spPr>
+          <a:xfrm>
+            <a:off x="685800" y="4343400"/>
+            <a:ext cx="5486400" cy="4114800"/>
+          </a:xfrm>
+          <a:prstGeom prst="rect">
+            <a:avLst/>
+          </a:prstGeom>
+        </p:spPr>
+        <p:txBody>
+          <a:bodyPr spcFirstLastPara="1" wrap="square" lIns="91425" tIns="91425" rIns="91425" bIns="91425" anchor="t" anchorCtr="0">
+            <a:noAutofit/>
+          </a:bodyPr>
+          <a:lstStyle/>
+          <a:p>
+            <a:pPr marL="0" lvl="0" indent="0" algn="l" rtl="0">
+              <a:spcBef>
+                <a:spcPts val="0"/>
+              </a:spcBef>
+              <a:spcAft>
+                <a:spcPts val="0"/>
+              </a:spcAft>
+              <a:buNone/>
+            </a:pPr>
+            <a:endParaRPr/>
+          </a:p>
+        </p:txBody>
+      </p:sp>
+      <p:sp>
+        <p:nvSpPr>
+          <p:cNvPr id="186" name="Google Shape;186;p12:notes">
+            <a:extLst>
+              <a:ext uri="{FF2B5EF4-FFF2-40B4-BE49-F238E27FC236}">
+                <a16:creationId xmlns:a16="http://schemas.microsoft.com/office/drawing/2014/main" id="{03F3BAE5-64D7-71AF-9E41-7887F49D320D}"/>
+              </a:ext>
+            </a:extLst>
+          </p:cNvPr>
+          <p:cNvSpPr>
+            <a:spLocks noGrp="1" noRot="1" noChangeAspect="1"/>
+          </p:cNvSpPr>
+          <p:nvPr>
+            <p:ph type="sldImg" idx="2"/>
+          </p:nvPr>
+        </p:nvSpPr>
+        <p:spPr>
+          <a:xfrm>
+            <a:off x="381000" y="685800"/>
+            <a:ext cx="6096000" cy="3429000"/>
+          </a:xfrm>
+          <a:custGeom>
+            <a:avLst/>
+            <a:gdLst/>
+            <a:ahLst/>
+            <a:cxnLst/>
+            <a:rect l="l" t="t" r="r" b="b"/>
+            <a:pathLst>
+              <a:path w="120000" h="120000" extrusionOk="0">
+                <a:moveTo>
+                  <a:pt x="0" y="0"/>
+                </a:moveTo>
+                <a:lnTo>
+                  <a:pt x="120000" y="0"/>
+                </a:lnTo>
+                <a:lnTo>
+                  <a:pt x="120000" y="120000"/>
+                </a:lnTo>
+                <a:lnTo>
+                  <a:pt x="0" y="120000"/>
+                </a:lnTo>
+                <a:close/>
+              </a:path>
+            </a:pathLst>
+          </a:custGeom>
+        </p:spPr>
+      </p:sp>
+    </p:spTree>
+    <p:extLst>
+      <p:ext uri="{BB962C8B-B14F-4D97-AF65-F5344CB8AC3E}">
+        <p14:creationId xmlns:p14="http://schemas.microsoft.com/office/powerpoint/2010/main" val="1185944309"/>
+      </p:ext>
+    </p:extLst>
+  </p:cSld>
+  <p:clrMapOvr>
+    <a:masterClrMapping/>
+  </p:clrMapOvr>
+</p:notes>
+</file>
+
+<file path=ppt/notesSlides/notesSlide13.xml><?xml version="1.0" encoding="utf-8"?>
+<p:notes xmlns:a="http://schemas.openxmlformats.org/drawingml/2006/main" xmlns:r="http://schemas.openxmlformats.org/officeDocument/2006/relationships" xmlns:p="http://schemas.openxmlformats.org/presentationml/2006/main" showMasterSp="0" showMasterPhAnim="0">
+  <p:cSld>
+    <p:spTree>
+      <p:nvGrpSpPr>
+        <p:cNvPr id="1" name="Shape 87">
+          <a:extLst>
+            <a:ext uri="{FF2B5EF4-FFF2-40B4-BE49-F238E27FC236}">
+              <a16:creationId xmlns:a16="http://schemas.microsoft.com/office/drawing/2014/main" id="{136561D5-9F55-4DB6-F80A-1E28091DC1D1}"/>
+            </a:ext>
+          </a:extLst>
+        </p:cNvPr>
+        <p:cNvGrpSpPr/>
+        <p:nvPr/>
+      </p:nvGrpSpPr>
+      <p:grpSpPr>
+        <a:xfrm>
+          <a:off x="0" y="0"/>
+          <a:ext cx="0" cy="0"/>
+          <a:chOff x="0" y="0"/>
+          <a:chExt cx="0" cy="0"/>
+        </a:xfrm>
+      </p:grpSpPr>
+      <p:sp>
+        <p:nvSpPr>
+          <p:cNvPr id="88" name="Google Shape;88;p2:notes">
+            <a:extLst>
+              <a:ext uri="{FF2B5EF4-FFF2-40B4-BE49-F238E27FC236}">
+                <a16:creationId xmlns:a16="http://schemas.microsoft.com/office/drawing/2014/main" id="{338F384F-CC87-E170-6446-BAE3774B0E4E}"/>
+              </a:ext>
+            </a:extLst>
+          </p:cNvPr>
+          <p:cNvSpPr txBox="1">
+            <a:spLocks noGrp="1"/>
+          </p:cNvSpPr>
+          <p:nvPr>
+            <p:ph type="body" idx="1"/>
+          </p:nvPr>
+        </p:nvSpPr>
+        <p:spPr>
+          <a:xfrm>
+            <a:off x="685800" y="4343400"/>
+            <a:ext cx="5486400" cy="4114800"/>
+          </a:xfrm>
+          <a:prstGeom prst="rect">
+            <a:avLst/>
+          </a:prstGeom>
+        </p:spPr>
+        <p:txBody>
+          <a:bodyPr spcFirstLastPara="1" wrap="square" lIns="91425" tIns="91425" rIns="91425" bIns="91425" anchor="t" anchorCtr="0">
+            <a:noAutofit/>
+          </a:bodyPr>
+          <a:lstStyle/>
+          <a:p>
+            <a:pPr marL="0" lvl="0" indent="0" algn="l" rtl="0">
+              <a:spcBef>
+                <a:spcPts val="0"/>
+              </a:spcBef>
+              <a:spcAft>
+                <a:spcPts val="0"/>
+              </a:spcAft>
+              <a:buNone/>
+            </a:pPr>
+            <a:endParaRPr/>
+          </a:p>
+        </p:txBody>
+      </p:sp>
+      <p:sp>
+        <p:nvSpPr>
+          <p:cNvPr id="89" name="Google Shape;89;p2:notes">
+            <a:extLst>
+              <a:ext uri="{FF2B5EF4-FFF2-40B4-BE49-F238E27FC236}">
+                <a16:creationId xmlns:a16="http://schemas.microsoft.com/office/drawing/2014/main" id="{984F3219-DF6E-640A-ECF3-4D5D3B821CE7}"/>
+              </a:ext>
+            </a:extLst>
+          </p:cNvPr>
+          <p:cNvSpPr>
+            <a:spLocks noGrp="1" noRot="1" noChangeAspect="1"/>
+          </p:cNvSpPr>
+          <p:nvPr>
+            <p:ph type="sldImg" idx="2"/>
+          </p:nvPr>
+        </p:nvSpPr>
+        <p:spPr>
+          <a:xfrm>
+            <a:off x="381000" y="685800"/>
+            <a:ext cx="6096000" cy="3429000"/>
+          </a:xfrm>
+          <a:custGeom>
+            <a:avLst/>
+            <a:gdLst/>
+            <a:ahLst/>
+            <a:cxnLst/>
+            <a:rect l="l" t="t" r="r" b="b"/>
+            <a:pathLst>
+              <a:path w="120000" h="120000" extrusionOk="0">
+                <a:moveTo>
+                  <a:pt x="0" y="0"/>
+                </a:moveTo>
+                <a:lnTo>
+                  <a:pt x="120000" y="0"/>
+                </a:lnTo>
+                <a:lnTo>
+                  <a:pt x="120000" y="120000"/>
+                </a:lnTo>
+                <a:lnTo>
+                  <a:pt x="0" y="120000"/>
+                </a:lnTo>
+                <a:close/>
+              </a:path>
+            </a:pathLst>
+          </a:custGeom>
+        </p:spPr>
+      </p:sp>
+    </p:spTree>
+    <p:extLst>
+      <p:ext uri="{BB962C8B-B14F-4D97-AF65-F5344CB8AC3E}">
+        <p14:creationId xmlns:p14="http://schemas.microsoft.com/office/powerpoint/2010/main" val="1553994535"/>
+      </p:ext>
+    </p:extLst>
+  </p:cSld>
+  <p:clrMapOvr>
+    <a:masterClrMapping/>
+  </p:clrMapOvr>
+</p:notes>
+</file>
+
+<file path=ppt/notesSlides/notesSlide14.xml><?xml version="1.0" encoding="utf-8"?>
+<p:notes xmlns:a="http://schemas.openxmlformats.org/drawingml/2006/main" xmlns:r="http://schemas.openxmlformats.org/officeDocument/2006/relationships" xmlns:p="http://schemas.openxmlformats.org/presentationml/2006/main" showMasterSp="0" showMasterPhAnim="0">
+  <p:cSld>
+    <p:spTree>
+      <p:nvGrpSpPr>
+        <p:cNvPr id="1" name="Shape 118">
+          <a:extLst>
+            <a:ext uri="{FF2B5EF4-FFF2-40B4-BE49-F238E27FC236}">
+              <a16:creationId xmlns:a16="http://schemas.microsoft.com/office/drawing/2014/main" id="{6C078865-CD72-E72F-17C9-D3E40BE77EDD}"/>
+            </a:ext>
+          </a:extLst>
+        </p:cNvPr>
+        <p:cNvGrpSpPr/>
+        <p:nvPr/>
+      </p:nvGrpSpPr>
+      <p:grpSpPr>
+        <a:xfrm>
+          <a:off x="0" y="0"/>
+          <a:ext cx="0" cy="0"/>
+          <a:chOff x="0" y="0"/>
+          <a:chExt cx="0" cy="0"/>
+        </a:xfrm>
+      </p:grpSpPr>
+      <p:sp>
+        <p:nvSpPr>
+          <p:cNvPr id="119" name="Google Shape;119;p5:notes">
+            <a:extLst>
+              <a:ext uri="{FF2B5EF4-FFF2-40B4-BE49-F238E27FC236}">
+                <a16:creationId xmlns:a16="http://schemas.microsoft.com/office/drawing/2014/main" id="{D624FCA6-A6BF-BFBF-BC26-E331FFC4361F}"/>
+              </a:ext>
+            </a:extLst>
+          </p:cNvPr>
+          <p:cNvSpPr txBox="1">
+            <a:spLocks noGrp="1"/>
+          </p:cNvSpPr>
+          <p:nvPr>
+            <p:ph type="body" idx="1"/>
+          </p:nvPr>
+        </p:nvSpPr>
+        <p:spPr>
+          <a:xfrm>
+            <a:off x="685800" y="4343400"/>
+            <a:ext cx="5486400" cy="4114800"/>
+          </a:xfrm>
+          <a:prstGeom prst="rect">
+            <a:avLst/>
+          </a:prstGeom>
+        </p:spPr>
+        <p:txBody>
+          <a:bodyPr spcFirstLastPara="1" wrap="square" lIns="91425" tIns="91425" rIns="91425" bIns="91425" anchor="t" anchorCtr="0">
+            <a:noAutofit/>
+          </a:bodyPr>
+          <a:lstStyle/>
+          <a:p>
+            <a:pPr marL="0" lvl="0" indent="0" algn="l" rtl="0">
+              <a:spcBef>
+                <a:spcPts val="0"/>
+              </a:spcBef>
+              <a:spcAft>
+                <a:spcPts val="0"/>
+              </a:spcAft>
+              <a:buNone/>
+            </a:pPr>
+            <a:endParaRPr/>
+          </a:p>
+        </p:txBody>
+      </p:sp>
+      <p:sp>
+        <p:nvSpPr>
+          <p:cNvPr id="120" name="Google Shape;120;p5:notes">
+            <a:extLst>
+              <a:ext uri="{FF2B5EF4-FFF2-40B4-BE49-F238E27FC236}">
+                <a16:creationId xmlns:a16="http://schemas.microsoft.com/office/drawing/2014/main" id="{4BD3996C-1E4A-1B39-8F2F-B48DF10CA1E9}"/>
+              </a:ext>
+            </a:extLst>
+          </p:cNvPr>
+          <p:cNvSpPr>
+            <a:spLocks noGrp="1" noRot="1" noChangeAspect="1"/>
+          </p:cNvSpPr>
+          <p:nvPr>
+            <p:ph type="sldImg" idx="2"/>
+          </p:nvPr>
+        </p:nvSpPr>
+        <p:spPr>
+          <a:xfrm>
+            <a:off x="381000" y="685800"/>
+            <a:ext cx="6096000" cy="3429000"/>
+          </a:xfrm>
+          <a:custGeom>
+            <a:avLst/>
+            <a:gdLst/>
+            <a:ahLst/>
+            <a:cxnLst/>
+            <a:rect l="l" t="t" r="r" b="b"/>
+            <a:pathLst>
+              <a:path w="120000" h="120000" extrusionOk="0">
+                <a:moveTo>
+                  <a:pt x="0" y="0"/>
+                </a:moveTo>
+                <a:lnTo>
+                  <a:pt x="120000" y="0"/>
+                </a:lnTo>
+                <a:lnTo>
+                  <a:pt x="120000" y="120000"/>
+                </a:lnTo>
+                <a:lnTo>
+                  <a:pt x="0" y="120000"/>
+                </a:lnTo>
+                <a:close/>
+              </a:path>
+            </a:pathLst>
+          </a:custGeom>
+        </p:spPr>
+      </p:sp>
+    </p:spTree>
+    <p:extLst>
+      <p:ext uri="{BB962C8B-B14F-4D97-AF65-F5344CB8AC3E}">
+        <p14:creationId xmlns:p14="http://schemas.microsoft.com/office/powerpoint/2010/main" val="1026785647"/>
+      </p:ext>
+    </p:extLst>
+  </p:cSld>
+  <p:clrMapOvr>
+    <a:masterClrMapping/>
+  </p:clrMapOvr>
+</p:notes>
+</file>
+
+<file path=ppt/notesSlides/notesSlide15.xml><?xml version="1.0" encoding="utf-8"?>
+<p:notes xmlns:a="http://schemas.openxmlformats.org/drawingml/2006/main" xmlns:r="http://schemas.openxmlformats.org/officeDocument/2006/relationships" xmlns:p="http://schemas.openxmlformats.org/presentationml/2006/main" showMasterSp="0" showMasterPhAnim="0">
+  <p:cSld>
+    <p:spTree>
+      <p:nvGrpSpPr>
+        <p:cNvPr id="1" name="Shape 87">
+          <a:extLst>
+            <a:ext uri="{FF2B5EF4-FFF2-40B4-BE49-F238E27FC236}">
+              <a16:creationId xmlns:a16="http://schemas.microsoft.com/office/drawing/2014/main" id="{F37F75F1-0741-441B-6571-2558A057E0AA}"/>
+            </a:ext>
+          </a:extLst>
+        </p:cNvPr>
+        <p:cNvGrpSpPr/>
+        <p:nvPr/>
+      </p:nvGrpSpPr>
+      <p:grpSpPr>
+        <a:xfrm>
+          <a:off x="0" y="0"/>
+          <a:ext cx="0" cy="0"/>
+          <a:chOff x="0" y="0"/>
+          <a:chExt cx="0" cy="0"/>
+        </a:xfrm>
+      </p:grpSpPr>
+      <p:sp>
+        <p:nvSpPr>
+          <p:cNvPr id="88" name="Google Shape;88;p2:notes">
+            <a:extLst>
+              <a:ext uri="{FF2B5EF4-FFF2-40B4-BE49-F238E27FC236}">
+                <a16:creationId xmlns:a16="http://schemas.microsoft.com/office/drawing/2014/main" id="{D5BCF5F7-E85A-86B3-25E7-F4141656670E}"/>
+              </a:ext>
+            </a:extLst>
+          </p:cNvPr>
+          <p:cNvSpPr txBox="1">
+            <a:spLocks noGrp="1"/>
+          </p:cNvSpPr>
+          <p:nvPr>
+            <p:ph type="body" idx="1"/>
+          </p:nvPr>
+        </p:nvSpPr>
+        <p:spPr>
+          <a:xfrm>
+            <a:off x="685800" y="4343400"/>
+            <a:ext cx="5486400" cy="4114800"/>
+          </a:xfrm>
+          <a:prstGeom prst="rect">
+            <a:avLst/>
+          </a:prstGeom>
+        </p:spPr>
+        <p:txBody>
+          <a:bodyPr spcFirstLastPara="1" wrap="square" lIns="91425" tIns="91425" rIns="91425" bIns="91425" anchor="t" anchorCtr="0">
+            <a:noAutofit/>
+          </a:bodyPr>
+          <a:lstStyle/>
+          <a:p>
+            <a:pPr marL="0" lvl="0" indent="0" algn="l" rtl="0">
+              <a:spcBef>
+                <a:spcPts val="0"/>
+              </a:spcBef>
+              <a:spcAft>
+                <a:spcPts val="0"/>
+              </a:spcAft>
+              <a:buNone/>
+            </a:pPr>
+            <a:endParaRPr/>
+          </a:p>
+        </p:txBody>
+      </p:sp>
+      <p:sp>
+        <p:nvSpPr>
+          <p:cNvPr id="89" name="Google Shape;89;p2:notes">
+            <a:extLst>
+              <a:ext uri="{FF2B5EF4-FFF2-40B4-BE49-F238E27FC236}">
+                <a16:creationId xmlns:a16="http://schemas.microsoft.com/office/drawing/2014/main" id="{F49C8DB3-1F0A-7803-0546-A2E753E9AB68}"/>
+              </a:ext>
+            </a:extLst>
+          </p:cNvPr>
+          <p:cNvSpPr>
+            <a:spLocks noGrp="1" noRot="1" noChangeAspect="1"/>
+          </p:cNvSpPr>
+          <p:nvPr>
+            <p:ph type="sldImg" idx="2"/>
+          </p:nvPr>
+        </p:nvSpPr>
+        <p:spPr>
+          <a:xfrm>
+            <a:off x="381000" y="685800"/>
+            <a:ext cx="6096000" cy="3429000"/>
+          </a:xfrm>
+          <a:custGeom>
+            <a:avLst/>
+            <a:gdLst/>
+            <a:ahLst/>
+            <a:cxnLst/>
+            <a:rect l="l" t="t" r="r" b="b"/>
+            <a:pathLst>
+              <a:path w="120000" h="120000" extrusionOk="0">
+                <a:moveTo>
+                  <a:pt x="0" y="0"/>
+                </a:moveTo>
+                <a:lnTo>
+                  <a:pt x="120000" y="0"/>
+                </a:lnTo>
+                <a:lnTo>
+                  <a:pt x="120000" y="120000"/>
+                </a:lnTo>
+                <a:lnTo>
+                  <a:pt x="0" y="120000"/>
+                </a:lnTo>
+                <a:close/>
+              </a:path>
+            </a:pathLst>
+          </a:custGeom>
+        </p:spPr>
+      </p:sp>
+    </p:spTree>
+    <p:extLst>
+      <p:ext uri="{BB962C8B-B14F-4D97-AF65-F5344CB8AC3E}">
+        <p14:creationId xmlns:p14="http://schemas.microsoft.com/office/powerpoint/2010/main" val="4033461874"/>
+      </p:ext>
+    </p:extLst>
+  </p:cSld>
+  <p:clrMapOvr>
+    <a:masterClrMapping/>
+  </p:clrMapOvr>
+</p:notes>
+</file>
+
+<file path=ppt/notesSlides/notesSlide16.xml><?xml version="1.0" encoding="utf-8"?>
+<p:notes xmlns:a="http://schemas.openxmlformats.org/drawingml/2006/main" xmlns:r="http://schemas.openxmlformats.org/officeDocument/2006/relationships" xmlns:p="http://schemas.openxmlformats.org/presentationml/2006/main" showMasterSp="0" showMasterPhAnim="0">
+  <p:cSld>
+    <p:spTree>
+      <p:nvGrpSpPr>
+        <p:cNvPr id="1" name="Shape 87">
+          <a:extLst>
+            <a:ext uri="{FF2B5EF4-FFF2-40B4-BE49-F238E27FC236}">
+              <a16:creationId xmlns:a16="http://schemas.microsoft.com/office/drawing/2014/main" id="{3D8C7FEF-2490-B9A1-F7D8-CE21682AB0DF}"/>
+            </a:ext>
+          </a:extLst>
+        </p:cNvPr>
+        <p:cNvGrpSpPr/>
+        <p:nvPr/>
+      </p:nvGrpSpPr>
+      <p:grpSpPr>
+        <a:xfrm>
+          <a:off x="0" y="0"/>
+          <a:ext cx="0" cy="0"/>
+          <a:chOff x="0" y="0"/>
+          <a:chExt cx="0" cy="0"/>
+        </a:xfrm>
+      </p:grpSpPr>
+      <p:sp>
+        <p:nvSpPr>
+          <p:cNvPr id="88" name="Google Shape;88;p2:notes">
+            <a:extLst>
+              <a:ext uri="{FF2B5EF4-FFF2-40B4-BE49-F238E27FC236}">
+                <a16:creationId xmlns:a16="http://schemas.microsoft.com/office/drawing/2014/main" id="{8CAB920A-6F26-7166-9ECF-A797EF9966DA}"/>
+              </a:ext>
+            </a:extLst>
+          </p:cNvPr>
+          <p:cNvSpPr txBox="1">
+            <a:spLocks noGrp="1"/>
+          </p:cNvSpPr>
+          <p:nvPr>
+            <p:ph type="body" idx="1"/>
+          </p:nvPr>
+        </p:nvSpPr>
+        <p:spPr>
+          <a:xfrm>
+            <a:off x="685800" y="4343400"/>
+            <a:ext cx="5486400" cy="4114800"/>
+          </a:xfrm>
+          <a:prstGeom prst="rect">
+            <a:avLst/>
+          </a:prstGeom>
+        </p:spPr>
+        <p:txBody>
+          <a:bodyPr spcFirstLastPara="1" wrap="square" lIns="91425" tIns="91425" rIns="91425" bIns="91425" anchor="t" anchorCtr="0">
+            <a:noAutofit/>
+          </a:bodyPr>
+          <a:lstStyle/>
+          <a:p>
+            <a:pPr marL="0" lvl="0" indent="0" algn="l" rtl="0">
+              <a:spcBef>
+                <a:spcPts val="0"/>
+              </a:spcBef>
+              <a:spcAft>
+                <a:spcPts val="0"/>
+              </a:spcAft>
+              <a:buNone/>
+            </a:pPr>
+            <a:endParaRPr/>
+          </a:p>
+        </p:txBody>
+      </p:sp>
+      <p:sp>
+        <p:nvSpPr>
+          <p:cNvPr id="89" name="Google Shape;89;p2:notes">
+            <a:extLst>
+              <a:ext uri="{FF2B5EF4-FFF2-40B4-BE49-F238E27FC236}">
+                <a16:creationId xmlns:a16="http://schemas.microsoft.com/office/drawing/2014/main" id="{964BF798-B0B5-E6FE-E81F-2C17C5880456}"/>
+              </a:ext>
+            </a:extLst>
+          </p:cNvPr>
+          <p:cNvSpPr>
+            <a:spLocks noGrp="1" noRot="1" noChangeAspect="1"/>
+          </p:cNvSpPr>
+          <p:nvPr>
+            <p:ph type="sldImg" idx="2"/>
+          </p:nvPr>
+        </p:nvSpPr>
+        <p:spPr>
+          <a:xfrm>
+            <a:off x="381000" y="685800"/>
+            <a:ext cx="6096000" cy="3429000"/>
+          </a:xfrm>
+          <a:custGeom>
+            <a:avLst/>
+            <a:gdLst/>
+            <a:ahLst/>
+            <a:cxnLst/>
+            <a:rect l="l" t="t" r="r" b="b"/>
+            <a:pathLst>
+              <a:path w="120000" h="120000" extrusionOk="0">
+                <a:moveTo>
+                  <a:pt x="0" y="0"/>
+                </a:moveTo>
+                <a:lnTo>
+                  <a:pt x="120000" y="0"/>
+                </a:lnTo>
+                <a:lnTo>
+                  <a:pt x="120000" y="120000"/>
+                </a:lnTo>
+                <a:lnTo>
+                  <a:pt x="0" y="120000"/>
+                </a:lnTo>
+                <a:close/>
+              </a:path>
+            </a:pathLst>
+          </a:custGeom>
+        </p:spPr>
+      </p:sp>
+    </p:spTree>
+    <p:extLst>
+      <p:ext uri="{BB962C8B-B14F-4D97-AF65-F5344CB8AC3E}">
+        <p14:creationId xmlns:p14="http://schemas.microsoft.com/office/powerpoint/2010/main" val="1291808660"/>
+      </p:ext>
+    </p:extLst>
+  </p:cSld>
+  <p:clrMapOvr>
+    <a:masterClrMapping/>
+  </p:clrMapOvr>
+</p:notes>
+</file>
+
+<file path=ppt/notesSlides/notesSlide17.xml><?xml version="1.0" encoding="utf-8"?>
 <p:notes xmlns:a="http://schemas.openxmlformats.org/drawingml/2006/main" xmlns:r="http://schemas.openxmlformats.org/officeDocument/2006/relationships" xmlns:p="http://schemas.openxmlformats.org/presentationml/2006/main" showMasterSp="0" showMasterPhAnim="0">
   <p:cSld>
     <p:spTree>
@@ -1184,7 +1854,700 @@
 </p:notes>
 </file>
 
-<file path=ppt/notesSlides/notesSlide4.xml><?xml version="1.0" encoding="utf-8"?>
+<file path=ppt/notesSlides/notesSlide18.xml><?xml version="1.0" encoding="utf-8"?>
+<p:notes xmlns:a="http://schemas.openxmlformats.org/drawingml/2006/main" xmlns:r="http://schemas.openxmlformats.org/officeDocument/2006/relationships" xmlns:p="http://schemas.openxmlformats.org/presentationml/2006/main" showMasterSp="0" showMasterPhAnim="0">
+  <p:cSld>
+    <p:spTree>
+      <p:nvGrpSpPr>
+        <p:cNvPr id="1" name="Shape 87">
+          <a:extLst>
+            <a:ext uri="{FF2B5EF4-FFF2-40B4-BE49-F238E27FC236}">
+              <a16:creationId xmlns:a16="http://schemas.microsoft.com/office/drawing/2014/main" id="{0033B04A-078A-628C-52BF-74FA9A965BD2}"/>
+            </a:ext>
+          </a:extLst>
+        </p:cNvPr>
+        <p:cNvGrpSpPr/>
+        <p:nvPr/>
+      </p:nvGrpSpPr>
+      <p:grpSpPr>
+        <a:xfrm>
+          <a:off x="0" y="0"/>
+          <a:ext cx="0" cy="0"/>
+          <a:chOff x="0" y="0"/>
+          <a:chExt cx="0" cy="0"/>
+        </a:xfrm>
+      </p:grpSpPr>
+      <p:sp>
+        <p:nvSpPr>
+          <p:cNvPr id="88" name="Google Shape;88;p2:notes">
+            <a:extLst>
+              <a:ext uri="{FF2B5EF4-FFF2-40B4-BE49-F238E27FC236}">
+                <a16:creationId xmlns:a16="http://schemas.microsoft.com/office/drawing/2014/main" id="{0A4B99A0-2D5A-2FAF-9D0C-2015E5A78BAA}"/>
+              </a:ext>
+            </a:extLst>
+          </p:cNvPr>
+          <p:cNvSpPr txBox="1">
+            <a:spLocks noGrp="1"/>
+          </p:cNvSpPr>
+          <p:nvPr>
+            <p:ph type="body" idx="1"/>
+          </p:nvPr>
+        </p:nvSpPr>
+        <p:spPr>
+          <a:xfrm>
+            <a:off x="685800" y="4343400"/>
+            <a:ext cx="5486400" cy="4114800"/>
+          </a:xfrm>
+          <a:prstGeom prst="rect">
+            <a:avLst/>
+          </a:prstGeom>
+        </p:spPr>
+        <p:txBody>
+          <a:bodyPr spcFirstLastPara="1" wrap="square" lIns="91425" tIns="91425" rIns="91425" bIns="91425" anchor="t" anchorCtr="0">
+            <a:noAutofit/>
+          </a:bodyPr>
+          <a:lstStyle/>
+          <a:p>
+            <a:pPr marL="0" lvl="0" indent="0" algn="l" rtl="0">
+              <a:spcBef>
+                <a:spcPts val="0"/>
+              </a:spcBef>
+              <a:spcAft>
+                <a:spcPts val="0"/>
+              </a:spcAft>
+              <a:buNone/>
+            </a:pPr>
+            <a:endParaRPr/>
+          </a:p>
+        </p:txBody>
+      </p:sp>
+      <p:sp>
+        <p:nvSpPr>
+          <p:cNvPr id="89" name="Google Shape;89;p2:notes">
+            <a:extLst>
+              <a:ext uri="{FF2B5EF4-FFF2-40B4-BE49-F238E27FC236}">
+                <a16:creationId xmlns:a16="http://schemas.microsoft.com/office/drawing/2014/main" id="{42E957C3-BA69-3BBF-A90F-1E8D9239406C}"/>
+              </a:ext>
+            </a:extLst>
+          </p:cNvPr>
+          <p:cNvSpPr>
+            <a:spLocks noGrp="1" noRot="1" noChangeAspect="1"/>
+          </p:cNvSpPr>
+          <p:nvPr>
+            <p:ph type="sldImg" idx="2"/>
+          </p:nvPr>
+        </p:nvSpPr>
+        <p:spPr>
+          <a:xfrm>
+            <a:off x="381000" y="685800"/>
+            <a:ext cx="6096000" cy="3429000"/>
+          </a:xfrm>
+          <a:custGeom>
+            <a:avLst/>
+            <a:gdLst/>
+            <a:ahLst/>
+            <a:cxnLst/>
+            <a:rect l="l" t="t" r="r" b="b"/>
+            <a:pathLst>
+              <a:path w="120000" h="120000" extrusionOk="0">
+                <a:moveTo>
+                  <a:pt x="0" y="0"/>
+                </a:moveTo>
+                <a:lnTo>
+                  <a:pt x="120000" y="0"/>
+                </a:lnTo>
+                <a:lnTo>
+                  <a:pt x="120000" y="120000"/>
+                </a:lnTo>
+                <a:lnTo>
+                  <a:pt x="0" y="120000"/>
+                </a:lnTo>
+                <a:close/>
+              </a:path>
+            </a:pathLst>
+          </a:custGeom>
+        </p:spPr>
+      </p:sp>
+    </p:spTree>
+    <p:extLst>
+      <p:ext uri="{BB962C8B-B14F-4D97-AF65-F5344CB8AC3E}">
+        <p14:creationId xmlns:p14="http://schemas.microsoft.com/office/powerpoint/2010/main" val="3907487042"/>
+      </p:ext>
+    </p:extLst>
+  </p:cSld>
+  <p:clrMapOvr>
+    <a:masterClrMapping/>
+  </p:clrMapOvr>
+</p:notes>
+</file>
+
+<file path=ppt/notesSlides/notesSlide19.xml><?xml version="1.0" encoding="utf-8"?>
+<p:notes xmlns:a="http://schemas.openxmlformats.org/drawingml/2006/main" xmlns:r="http://schemas.openxmlformats.org/officeDocument/2006/relationships" xmlns:p="http://schemas.openxmlformats.org/presentationml/2006/main" showMasterSp="0" showMasterPhAnim="0">
+  <p:cSld>
+    <p:spTree>
+      <p:nvGrpSpPr>
+        <p:cNvPr id="1" name="Shape 87">
+          <a:extLst>
+            <a:ext uri="{FF2B5EF4-FFF2-40B4-BE49-F238E27FC236}">
+              <a16:creationId xmlns:a16="http://schemas.microsoft.com/office/drawing/2014/main" id="{F6A8D4DC-C645-8CDD-D098-F262AB88F3EF}"/>
+            </a:ext>
+          </a:extLst>
+        </p:cNvPr>
+        <p:cNvGrpSpPr/>
+        <p:nvPr/>
+      </p:nvGrpSpPr>
+      <p:grpSpPr>
+        <a:xfrm>
+          <a:off x="0" y="0"/>
+          <a:ext cx="0" cy="0"/>
+          <a:chOff x="0" y="0"/>
+          <a:chExt cx="0" cy="0"/>
+        </a:xfrm>
+      </p:grpSpPr>
+      <p:sp>
+        <p:nvSpPr>
+          <p:cNvPr id="88" name="Google Shape;88;p2:notes">
+            <a:extLst>
+              <a:ext uri="{FF2B5EF4-FFF2-40B4-BE49-F238E27FC236}">
+                <a16:creationId xmlns:a16="http://schemas.microsoft.com/office/drawing/2014/main" id="{DE6E1D51-9A82-9826-4A56-DE26EB74E00C}"/>
+              </a:ext>
+            </a:extLst>
+          </p:cNvPr>
+          <p:cNvSpPr txBox="1">
+            <a:spLocks noGrp="1"/>
+          </p:cNvSpPr>
+          <p:nvPr>
+            <p:ph type="body" idx="1"/>
+          </p:nvPr>
+        </p:nvSpPr>
+        <p:spPr>
+          <a:xfrm>
+            <a:off x="685800" y="4343400"/>
+            <a:ext cx="5486400" cy="4114800"/>
+          </a:xfrm>
+          <a:prstGeom prst="rect">
+            <a:avLst/>
+          </a:prstGeom>
+        </p:spPr>
+        <p:txBody>
+          <a:bodyPr spcFirstLastPara="1" wrap="square" lIns="91425" tIns="91425" rIns="91425" bIns="91425" anchor="t" anchorCtr="0">
+            <a:noAutofit/>
+          </a:bodyPr>
+          <a:lstStyle/>
+          <a:p>
+            <a:pPr marL="0" lvl="0" indent="0" algn="l" rtl="0">
+              <a:spcBef>
+                <a:spcPts val="0"/>
+              </a:spcBef>
+              <a:spcAft>
+                <a:spcPts val="0"/>
+              </a:spcAft>
+              <a:buNone/>
+            </a:pPr>
+            <a:endParaRPr/>
+          </a:p>
+        </p:txBody>
+      </p:sp>
+      <p:sp>
+        <p:nvSpPr>
+          <p:cNvPr id="89" name="Google Shape;89;p2:notes">
+            <a:extLst>
+              <a:ext uri="{FF2B5EF4-FFF2-40B4-BE49-F238E27FC236}">
+                <a16:creationId xmlns:a16="http://schemas.microsoft.com/office/drawing/2014/main" id="{0D644B72-2DA1-DA9A-7C03-40F70EB1B712}"/>
+              </a:ext>
+            </a:extLst>
+          </p:cNvPr>
+          <p:cNvSpPr>
+            <a:spLocks noGrp="1" noRot="1" noChangeAspect="1"/>
+          </p:cNvSpPr>
+          <p:nvPr>
+            <p:ph type="sldImg" idx="2"/>
+          </p:nvPr>
+        </p:nvSpPr>
+        <p:spPr>
+          <a:xfrm>
+            <a:off x="381000" y="685800"/>
+            <a:ext cx="6096000" cy="3429000"/>
+          </a:xfrm>
+          <a:custGeom>
+            <a:avLst/>
+            <a:gdLst/>
+            <a:ahLst/>
+            <a:cxnLst/>
+            <a:rect l="l" t="t" r="r" b="b"/>
+            <a:pathLst>
+              <a:path w="120000" h="120000" extrusionOk="0">
+                <a:moveTo>
+                  <a:pt x="0" y="0"/>
+                </a:moveTo>
+                <a:lnTo>
+                  <a:pt x="120000" y="0"/>
+                </a:lnTo>
+                <a:lnTo>
+                  <a:pt x="120000" y="120000"/>
+                </a:lnTo>
+                <a:lnTo>
+                  <a:pt x="0" y="120000"/>
+                </a:lnTo>
+                <a:close/>
+              </a:path>
+            </a:pathLst>
+          </a:custGeom>
+        </p:spPr>
+      </p:sp>
+    </p:spTree>
+    <p:extLst>
+      <p:ext uri="{BB962C8B-B14F-4D97-AF65-F5344CB8AC3E}">
+        <p14:creationId xmlns:p14="http://schemas.microsoft.com/office/powerpoint/2010/main" val="3865559875"/>
+      </p:ext>
+    </p:extLst>
+  </p:cSld>
+  <p:clrMapOvr>
+    <a:masterClrMapping/>
+  </p:clrMapOvr>
+</p:notes>
+</file>
+
+<file path=ppt/notesSlides/notesSlide2.xml><?xml version="1.0" encoding="utf-8"?>
+<p:notes xmlns:a="http://schemas.openxmlformats.org/drawingml/2006/main" xmlns:r="http://schemas.openxmlformats.org/officeDocument/2006/relationships" xmlns:p="http://schemas.openxmlformats.org/presentationml/2006/main" showMasterSp="0" showMasterPhAnim="0">
+  <p:cSld>
+    <p:spTree>
+      <p:nvGrpSpPr>
+        <p:cNvPr id="1" name="Shape 87"/>
+        <p:cNvGrpSpPr/>
+        <p:nvPr/>
+      </p:nvGrpSpPr>
+      <p:grpSpPr>
+        <a:xfrm>
+          <a:off x="0" y="0"/>
+          <a:ext cx="0" cy="0"/>
+          <a:chOff x="0" y="0"/>
+          <a:chExt cx="0" cy="0"/>
+        </a:xfrm>
+      </p:grpSpPr>
+      <p:sp>
+        <p:nvSpPr>
+          <p:cNvPr id="88" name="Google Shape;88;p2:notes"/>
+          <p:cNvSpPr txBox="1">
+            <a:spLocks noGrp="1"/>
+          </p:cNvSpPr>
+          <p:nvPr>
+            <p:ph type="body" idx="1"/>
+          </p:nvPr>
+        </p:nvSpPr>
+        <p:spPr>
+          <a:xfrm>
+            <a:off x="685800" y="4343400"/>
+            <a:ext cx="5486400" cy="4114800"/>
+          </a:xfrm>
+          <a:prstGeom prst="rect">
+            <a:avLst/>
+          </a:prstGeom>
+        </p:spPr>
+        <p:txBody>
+          <a:bodyPr spcFirstLastPara="1" wrap="square" lIns="91425" tIns="91425" rIns="91425" bIns="91425" anchor="t" anchorCtr="0">
+            <a:noAutofit/>
+          </a:bodyPr>
+          <a:lstStyle/>
+          <a:p>
+            <a:pPr marL="0" lvl="0" indent="0" algn="l" rtl="0">
+              <a:spcBef>
+                <a:spcPts val="0"/>
+              </a:spcBef>
+              <a:spcAft>
+                <a:spcPts val="0"/>
+              </a:spcAft>
+              <a:buNone/>
+            </a:pPr>
+            <a:endParaRPr/>
+          </a:p>
+        </p:txBody>
+      </p:sp>
+      <p:sp>
+        <p:nvSpPr>
+          <p:cNvPr id="89" name="Google Shape;89;p2:notes"/>
+          <p:cNvSpPr>
+            <a:spLocks noGrp="1" noRot="1" noChangeAspect="1"/>
+          </p:cNvSpPr>
+          <p:nvPr>
+            <p:ph type="sldImg" idx="2"/>
+          </p:nvPr>
+        </p:nvSpPr>
+        <p:spPr>
+          <a:xfrm>
+            <a:off x="381000" y="685800"/>
+            <a:ext cx="6096000" cy="3429000"/>
+          </a:xfrm>
+          <a:custGeom>
+            <a:avLst/>
+            <a:gdLst/>
+            <a:ahLst/>
+            <a:cxnLst/>
+            <a:rect l="l" t="t" r="r" b="b"/>
+            <a:pathLst>
+              <a:path w="120000" h="120000" extrusionOk="0">
+                <a:moveTo>
+                  <a:pt x="0" y="0"/>
+                </a:moveTo>
+                <a:lnTo>
+                  <a:pt x="120000" y="0"/>
+                </a:lnTo>
+                <a:lnTo>
+                  <a:pt x="120000" y="120000"/>
+                </a:lnTo>
+                <a:lnTo>
+                  <a:pt x="0" y="120000"/>
+                </a:lnTo>
+                <a:close/>
+              </a:path>
+            </a:pathLst>
+          </a:custGeom>
+        </p:spPr>
+      </p:sp>
+    </p:spTree>
+  </p:cSld>
+  <p:clrMapOvr>
+    <a:masterClrMapping/>
+  </p:clrMapOvr>
+</p:notes>
+</file>
+
+<file path=ppt/notesSlides/notesSlide20.xml><?xml version="1.0" encoding="utf-8"?>
+<p:notes xmlns:a="http://schemas.openxmlformats.org/drawingml/2006/main" xmlns:r="http://schemas.openxmlformats.org/officeDocument/2006/relationships" xmlns:p="http://schemas.openxmlformats.org/presentationml/2006/main" showMasterSp="0" showMasterPhAnim="0">
+  <p:cSld>
+    <p:spTree>
+      <p:nvGrpSpPr>
+        <p:cNvPr id="1" name="Shape 110"/>
+        <p:cNvGrpSpPr/>
+        <p:nvPr/>
+      </p:nvGrpSpPr>
+      <p:grpSpPr>
+        <a:xfrm>
+          <a:off x="0" y="0"/>
+          <a:ext cx="0" cy="0"/>
+          <a:chOff x="0" y="0"/>
+          <a:chExt cx="0" cy="0"/>
+        </a:xfrm>
+      </p:grpSpPr>
+      <p:sp>
+        <p:nvSpPr>
+          <p:cNvPr id="111" name="Google Shape;111;p4:notes"/>
+          <p:cNvSpPr txBox="1">
+            <a:spLocks noGrp="1"/>
+          </p:cNvSpPr>
+          <p:nvPr>
+            <p:ph type="body" idx="1"/>
+          </p:nvPr>
+        </p:nvSpPr>
+        <p:spPr>
+          <a:xfrm>
+            <a:off x="685800" y="4343400"/>
+            <a:ext cx="5486400" cy="4114800"/>
+          </a:xfrm>
+          <a:prstGeom prst="rect">
+            <a:avLst/>
+          </a:prstGeom>
+        </p:spPr>
+        <p:txBody>
+          <a:bodyPr spcFirstLastPara="1" wrap="square" lIns="91425" tIns="91425" rIns="91425" bIns="91425" anchor="t" anchorCtr="0">
+            <a:noAutofit/>
+          </a:bodyPr>
+          <a:lstStyle/>
+          <a:p>
+            <a:pPr marL="0" lvl="0" indent="0" algn="l" rtl="0">
+              <a:spcBef>
+                <a:spcPts val="0"/>
+              </a:spcBef>
+              <a:spcAft>
+                <a:spcPts val="0"/>
+              </a:spcAft>
+              <a:buNone/>
+            </a:pPr>
+            <a:endParaRPr/>
+          </a:p>
+        </p:txBody>
+      </p:sp>
+      <p:sp>
+        <p:nvSpPr>
+          <p:cNvPr id="112" name="Google Shape;112;p4:notes"/>
+          <p:cNvSpPr>
+            <a:spLocks noGrp="1" noRot="1" noChangeAspect="1"/>
+          </p:cNvSpPr>
+          <p:nvPr>
+            <p:ph type="sldImg" idx="2"/>
+          </p:nvPr>
+        </p:nvSpPr>
+        <p:spPr>
+          <a:xfrm>
+            <a:off x="381000" y="685800"/>
+            <a:ext cx="6096000" cy="3429000"/>
+          </a:xfrm>
+          <a:custGeom>
+            <a:avLst/>
+            <a:gdLst/>
+            <a:ahLst/>
+            <a:cxnLst/>
+            <a:rect l="l" t="t" r="r" b="b"/>
+            <a:pathLst>
+              <a:path w="120000" h="120000" extrusionOk="0">
+                <a:moveTo>
+                  <a:pt x="0" y="0"/>
+                </a:moveTo>
+                <a:lnTo>
+                  <a:pt x="120000" y="0"/>
+                </a:lnTo>
+                <a:lnTo>
+                  <a:pt x="120000" y="120000"/>
+                </a:lnTo>
+                <a:lnTo>
+                  <a:pt x="0" y="120000"/>
+                </a:lnTo>
+                <a:close/>
+              </a:path>
+            </a:pathLst>
+          </a:custGeom>
+        </p:spPr>
+      </p:sp>
+    </p:spTree>
+  </p:cSld>
+  <p:clrMapOvr>
+    <a:masterClrMapping/>
+  </p:clrMapOvr>
+</p:notes>
+</file>
+
+<file path=ppt/notesSlides/notesSlide21.xml><?xml version="1.0" encoding="utf-8"?>
+<p:notes xmlns:a="http://schemas.openxmlformats.org/drawingml/2006/main" xmlns:r="http://schemas.openxmlformats.org/officeDocument/2006/relationships" xmlns:p="http://schemas.openxmlformats.org/presentationml/2006/main" showMasterSp="0" showMasterPhAnim="0">
+  <p:cSld>
+    <p:spTree>
+      <p:nvGrpSpPr>
+        <p:cNvPr id="1" name="Shape 169"/>
+        <p:cNvGrpSpPr/>
+        <p:nvPr/>
+      </p:nvGrpSpPr>
+      <p:grpSpPr>
+        <a:xfrm>
+          <a:off x="0" y="0"/>
+          <a:ext cx="0" cy="0"/>
+          <a:chOff x="0" y="0"/>
+          <a:chExt cx="0" cy="0"/>
+        </a:xfrm>
+      </p:grpSpPr>
+      <p:sp>
+        <p:nvSpPr>
+          <p:cNvPr id="170" name="Google Shape;170;p9:notes"/>
+          <p:cNvSpPr txBox="1">
+            <a:spLocks noGrp="1"/>
+          </p:cNvSpPr>
+          <p:nvPr>
+            <p:ph type="body" idx="1"/>
+          </p:nvPr>
+        </p:nvSpPr>
+        <p:spPr>
+          <a:xfrm>
+            <a:off x="685800" y="4343400"/>
+            <a:ext cx="5486400" cy="4114800"/>
+          </a:xfrm>
+          <a:prstGeom prst="rect">
+            <a:avLst/>
+          </a:prstGeom>
+        </p:spPr>
+        <p:txBody>
+          <a:bodyPr spcFirstLastPara="1" wrap="square" lIns="91425" tIns="91425" rIns="91425" bIns="91425" anchor="t" anchorCtr="0">
+            <a:noAutofit/>
+          </a:bodyPr>
+          <a:lstStyle/>
+          <a:p>
+            <a:pPr marL="0" lvl="0" indent="0" algn="l" rtl="0">
+              <a:spcBef>
+                <a:spcPts val="0"/>
+              </a:spcBef>
+              <a:spcAft>
+                <a:spcPts val="0"/>
+              </a:spcAft>
+              <a:buNone/>
+            </a:pPr>
+            <a:endParaRPr/>
+          </a:p>
+        </p:txBody>
+      </p:sp>
+      <p:sp>
+        <p:nvSpPr>
+          <p:cNvPr id="171" name="Google Shape;171;p9:notes"/>
+          <p:cNvSpPr>
+            <a:spLocks noGrp="1" noRot="1" noChangeAspect="1"/>
+          </p:cNvSpPr>
+          <p:nvPr>
+            <p:ph type="sldImg" idx="2"/>
+          </p:nvPr>
+        </p:nvSpPr>
+        <p:spPr>
+          <a:xfrm>
+            <a:off x="381000" y="685800"/>
+            <a:ext cx="6096000" cy="3429000"/>
+          </a:xfrm>
+          <a:custGeom>
+            <a:avLst/>
+            <a:gdLst/>
+            <a:ahLst/>
+            <a:cxnLst/>
+            <a:rect l="l" t="t" r="r" b="b"/>
+            <a:pathLst>
+              <a:path w="120000" h="120000" extrusionOk="0">
+                <a:moveTo>
+                  <a:pt x="0" y="0"/>
+                </a:moveTo>
+                <a:lnTo>
+                  <a:pt x="120000" y="0"/>
+                </a:lnTo>
+                <a:lnTo>
+                  <a:pt x="120000" y="120000"/>
+                </a:lnTo>
+                <a:lnTo>
+                  <a:pt x="0" y="120000"/>
+                </a:lnTo>
+                <a:close/>
+              </a:path>
+            </a:pathLst>
+          </a:custGeom>
+        </p:spPr>
+      </p:sp>
+    </p:spTree>
+  </p:cSld>
+  <p:clrMapOvr>
+    <a:masterClrMapping/>
+  </p:clrMapOvr>
+</p:notes>
+</file>
+
+<file path=ppt/notesSlides/notesSlide22.xml><?xml version="1.0" encoding="utf-8"?>
+<p:notes xmlns:a="http://schemas.openxmlformats.org/drawingml/2006/main" xmlns:r="http://schemas.openxmlformats.org/officeDocument/2006/relationships" xmlns:p="http://schemas.openxmlformats.org/presentationml/2006/main" showMasterSp="0" showMasterPhAnim="0">
+  <p:cSld>
+    <p:spTree>
+      <p:nvGrpSpPr>
+        <p:cNvPr id="1" name="Shape 169">
+          <a:extLst>
+            <a:ext uri="{FF2B5EF4-FFF2-40B4-BE49-F238E27FC236}">
+              <a16:creationId xmlns:a16="http://schemas.microsoft.com/office/drawing/2014/main" id="{BF15F52A-1675-B754-7D01-E6510A4D66C6}"/>
+            </a:ext>
+          </a:extLst>
+        </p:cNvPr>
+        <p:cNvGrpSpPr/>
+        <p:nvPr/>
+      </p:nvGrpSpPr>
+      <p:grpSpPr>
+        <a:xfrm>
+          <a:off x="0" y="0"/>
+          <a:ext cx="0" cy="0"/>
+          <a:chOff x="0" y="0"/>
+          <a:chExt cx="0" cy="0"/>
+        </a:xfrm>
+      </p:grpSpPr>
+      <p:sp>
+        <p:nvSpPr>
+          <p:cNvPr id="170" name="Google Shape;170;p9:notes">
+            <a:extLst>
+              <a:ext uri="{FF2B5EF4-FFF2-40B4-BE49-F238E27FC236}">
+                <a16:creationId xmlns:a16="http://schemas.microsoft.com/office/drawing/2014/main" id="{BA4C6CFC-7CC5-2866-E3DF-9CC1E03DB0B9}"/>
+              </a:ext>
+            </a:extLst>
+          </p:cNvPr>
+          <p:cNvSpPr txBox="1">
+            <a:spLocks noGrp="1"/>
+          </p:cNvSpPr>
+          <p:nvPr>
+            <p:ph type="body" idx="1"/>
+          </p:nvPr>
+        </p:nvSpPr>
+        <p:spPr>
+          <a:xfrm>
+            <a:off x="685800" y="4343400"/>
+            <a:ext cx="5486400" cy="4114800"/>
+          </a:xfrm>
+          <a:prstGeom prst="rect">
+            <a:avLst/>
+          </a:prstGeom>
+        </p:spPr>
+        <p:txBody>
+          <a:bodyPr spcFirstLastPara="1" wrap="square" lIns="91425" tIns="91425" rIns="91425" bIns="91425" anchor="t" anchorCtr="0">
+            <a:noAutofit/>
+          </a:bodyPr>
+          <a:lstStyle/>
+          <a:p>
+            <a:pPr marL="0" lvl="0" indent="0" algn="l" rtl="0">
+              <a:spcBef>
+                <a:spcPts val="0"/>
+              </a:spcBef>
+              <a:spcAft>
+                <a:spcPts val="0"/>
+              </a:spcAft>
+              <a:buNone/>
+            </a:pPr>
+            <a:endParaRPr/>
+          </a:p>
+        </p:txBody>
+      </p:sp>
+      <p:sp>
+        <p:nvSpPr>
+          <p:cNvPr id="171" name="Google Shape;171;p9:notes">
+            <a:extLst>
+              <a:ext uri="{FF2B5EF4-FFF2-40B4-BE49-F238E27FC236}">
+                <a16:creationId xmlns:a16="http://schemas.microsoft.com/office/drawing/2014/main" id="{A3AFB4AB-E5A0-8BD3-D5FA-3806EBBDFB55}"/>
+              </a:ext>
+            </a:extLst>
+          </p:cNvPr>
+          <p:cNvSpPr>
+            <a:spLocks noGrp="1" noRot="1" noChangeAspect="1"/>
+          </p:cNvSpPr>
+          <p:nvPr>
+            <p:ph type="sldImg" idx="2"/>
+          </p:nvPr>
+        </p:nvSpPr>
+        <p:spPr>
+          <a:xfrm>
+            <a:off x="381000" y="685800"/>
+            <a:ext cx="6096000" cy="3429000"/>
+          </a:xfrm>
+          <a:custGeom>
+            <a:avLst/>
+            <a:gdLst/>
+            <a:ahLst/>
+            <a:cxnLst/>
+            <a:rect l="l" t="t" r="r" b="b"/>
+            <a:pathLst>
+              <a:path w="120000" h="120000" extrusionOk="0">
+                <a:moveTo>
+                  <a:pt x="0" y="0"/>
+                </a:moveTo>
+                <a:lnTo>
+                  <a:pt x="120000" y="0"/>
+                </a:lnTo>
+                <a:lnTo>
+                  <a:pt x="120000" y="120000"/>
+                </a:lnTo>
+                <a:lnTo>
+                  <a:pt x="0" y="120000"/>
+                </a:lnTo>
+                <a:close/>
+              </a:path>
+            </a:pathLst>
+          </a:custGeom>
+        </p:spPr>
+      </p:sp>
+    </p:spTree>
+    <p:extLst>
+      <p:ext uri="{BB962C8B-B14F-4D97-AF65-F5344CB8AC3E}">
+        <p14:creationId xmlns:p14="http://schemas.microsoft.com/office/powerpoint/2010/main" val="1193050909"/>
+      </p:ext>
+    </p:extLst>
+  </p:cSld>
+  <p:clrMapOvr>
+    <a:masterClrMapping/>
+  </p:clrMapOvr>
+</p:notes>
+</file>
+
+<file path=ppt/notesSlides/notesSlide3.xml><?xml version="1.0" encoding="utf-8"?>
 <p:notes xmlns:a="http://schemas.openxmlformats.org/drawingml/2006/main" xmlns:r="http://schemas.openxmlformats.org/officeDocument/2006/relationships" xmlns:p="http://schemas.openxmlformats.org/presentationml/2006/main" showMasterSp="0" showMasterPhAnim="0">
   <p:cSld>
     <p:spTree>
@@ -1311,7 +2674,7 @@
 </p:notes>
 </file>
 
-<file path=ppt/notesSlides/notesSlide5.xml><?xml version="1.0" encoding="utf-8"?>
+<file path=ppt/notesSlides/notesSlide4.xml><?xml version="1.0" encoding="utf-8"?>
 <p:notes xmlns:a="http://schemas.openxmlformats.org/drawingml/2006/main" xmlns:r="http://schemas.openxmlformats.org/officeDocument/2006/relationships" xmlns:p="http://schemas.openxmlformats.org/presentationml/2006/main" showMasterSp="0" showMasterPhAnim="0">
   <p:cSld>
     <p:spTree>
@@ -1438,7 +2801,7 @@
 </p:notes>
 </file>
 
-<file path=ppt/notesSlides/notesSlide6.xml><?xml version="1.0" encoding="utf-8"?>
+<file path=ppt/notesSlides/notesSlide5.xml><?xml version="1.0" encoding="utf-8"?>
 <p:notes xmlns:a="http://schemas.openxmlformats.org/drawingml/2006/main" xmlns:r="http://schemas.openxmlformats.org/officeDocument/2006/relationships" xmlns:p="http://schemas.openxmlformats.org/presentationml/2006/main" showMasterSp="0" showMasterPhAnim="0">
   <p:cSld>
     <p:spTree>
@@ -1565,7 +2928,7 @@
 </p:notes>
 </file>
 
-<file path=ppt/notesSlides/notesSlide7.xml><?xml version="1.0" encoding="utf-8"?>
+<file path=ppt/notesSlides/notesSlide6.xml><?xml version="1.0" encoding="utf-8"?>
 <p:notes xmlns:a="http://schemas.openxmlformats.org/drawingml/2006/main" xmlns:r="http://schemas.openxmlformats.org/officeDocument/2006/relationships" xmlns:p="http://schemas.openxmlformats.org/presentationml/2006/main" showMasterSp="0" showMasterPhAnim="0">
   <p:cSld>
     <p:spTree>
@@ -1692,7 +3055,7 @@
 </p:notes>
 </file>
 
-<file path=ppt/notesSlides/notesSlide8.xml><?xml version="1.0" encoding="utf-8"?>
+<file path=ppt/notesSlides/notesSlide7.xml><?xml version="1.0" encoding="utf-8"?>
 <p:notes xmlns:a="http://schemas.openxmlformats.org/drawingml/2006/main" xmlns:r="http://schemas.openxmlformats.org/officeDocument/2006/relationships" xmlns:p="http://schemas.openxmlformats.org/presentationml/2006/main" showMasterSp="0" showMasterPhAnim="0">
   <p:cSld>
     <p:spTree>
@@ -1819,7 +3182,7 @@
 </p:notes>
 </file>
 
-<file path=ppt/notesSlides/notesSlide9.xml><?xml version="1.0" encoding="utf-8"?>
+<file path=ppt/notesSlides/notesSlide8.xml><?xml version="1.0" encoding="utf-8"?>
 <p:notes xmlns:a="http://schemas.openxmlformats.org/drawingml/2006/main" xmlns:r="http://schemas.openxmlformats.org/officeDocument/2006/relationships" xmlns:p="http://schemas.openxmlformats.org/presentationml/2006/main" showMasterSp="0" showMasterPhAnim="0">
   <p:cSld>
     <p:spTree>
@@ -1937,6 +3300,133 @@
     <p:extLst>
       <p:ext uri="{BB962C8B-B14F-4D97-AF65-F5344CB8AC3E}">
         <p14:creationId xmlns:p14="http://schemas.microsoft.com/office/powerpoint/2010/main" val="3314966145"/>
+      </p:ext>
+    </p:extLst>
+  </p:cSld>
+  <p:clrMapOvr>
+    <a:masterClrMapping/>
+  </p:clrMapOvr>
+</p:notes>
+</file>
+
+<file path=ppt/notesSlides/notesSlide9.xml><?xml version="1.0" encoding="utf-8"?>
+<p:notes xmlns:a="http://schemas.openxmlformats.org/drawingml/2006/main" xmlns:r="http://schemas.openxmlformats.org/officeDocument/2006/relationships" xmlns:p="http://schemas.openxmlformats.org/presentationml/2006/main" showMasterSp="0" showMasterPhAnim="0">
+  <p:cSld>
+    <p:spTree>
+      <p:nvGrpSpPr>
+        <p:cNvPr id="1" name="Shape 87">
+          <a:extLst>
+            <a:ext uri="{FF2B5EF4-FFF2-40B4-BE49-F238E27FC236}">
+              <a16:creationId xmlns:a16="http://schemas.microsoft.com/office/drawing/2014/main" id="{621EA57F-6ED7-6A0C-9EAC-DE1EFB580B09}"/>
+            </a:ext>
+          </a:extLst>
+        </p:cNvPr>
+        <p:cNvGrpSpPr/>
+        <p:nvPr/>
+      </p:nvGrpSpPr>
+      <p:grpSpPr>
+        <a:xfrm>
+          <a:off x="0" y="0"/>
+          <a:ext cx="0" cy="0"/>
+          <a:chOff x="0" y="0"/>
+          <a:chExt cx="0" cy="0"/>
+        </a:xfrm>
+      </p:grpSpPr>
+      <p:sp>
+        <p:nvSpPr>
+          <p:cNvPr id="88" name="Google Shape;88;p2:notes">
+            <a:extLst>
+              <a:ext uri="{FF2B5EF4-FFF2-40B4-BE49-F238E27FC236}">
+                <a16:creationId xmlns:a16="http://schemas.microsoft.com/office/drawing/2014/main" id="{8014FC38-2484-15B4-B99C-65FD3DCAF737}"/>
+              </a:ext>
+            </a:extLst>
+          </p:cNvPr>
+          <p:cNvSpPr txBox="1">
+            <a:spLocks noGrp="1"/>
+          </p:cNvSpPr>
+          <p:nvPr>
+            <p:ph type="body" idx="1"/>
+          </p:nvPr>
+        </p:nvSpPr>
+        <p:spPr>
+          <a:xfrm>
+            <a:off x="685800" y="4343400"/>
+            <a:ext cx="5486400" cy="4114800"/>
+          </a:xfrm>
+          <a:prstGeom prst="rect">
+            <a:avLst/>
+          </a:prstGeom>
+        </p:spPr>
+        <p:txBody>
+          <a:bodyPr spcFirstLastPara="1" wrap="square" lIns="91425" tIns="91425" rIns="91425" bIns="91425" anchor="t" anchorCtr="0">
+            <a:noAutofit/>
+          </a:bodyPr>
+          <a:lstStyle/>
+          <a:p>
+            <a:pPr marL="0" lvl="0" indent="0" algn="l" rtl="0">
+              <a:spcBef>
+                <a:spcPts val="0"/>
+              </a:spcBef>
+              <a:spcAft>
+                <a:spcPts val="0"/>
+              </a:spcAft>
+              <a:buNone/>
+            </a:pPr>
+            <a:endParaRPr/>
+          </a:p>
+        </p:txBody>
+      </p:sp>
+      <p:sp>
+        <p:nvSpPr>
+          <p:cNvPr id="89" name="Google Shape;89;p2:notes">
+            <a:extLst>
+              <a:ext uri="{FF2B5EF4-FFF2-40B4-BE49-F238E27FC236}">
+                <a16:creationId xmlns:a16="http://schemas.microsoft.com/office/drawing/2014/main" id="{F3F81B57-118C-5873-EB08-FCE35E346081}"/>
+              </a:ext>
+            </a:extLst>
+          </p:cNvPr>
+          <p:cNvSpPr>
+            <a:spLocks noGrp="1" noRot="1" noChangeAspect="1"/>
+          </p:cNvSpPr>
+          <p:nvPr>
+            <p:ph type="sldImg" idx="2"/>
+          </p:nvPr>
+        </p:nvSpPr>
+        <p:spPr>
+          <a:xfrm>
+            <a:off x="381000" y="685800"/>
+            <a:ext cx="6096000" cy="3429000"/>
+          </a:xfrm>
+          <a:custGeom>
+            <a:avLst/>
+            <a:gdLst/>
+            <a:ahLst/>
+            <a:cxnLst/>
+            <a:rect l="l" t="t" r="r" b="b"/>
+            <a:pathLst>
+              <a:path w="120000" h="120000" extrusionOk="0">
+                <a:moveTo>
+                  <a:pt x="0" y="0"/>
+                </a:moveTo>
+                <a:lnTo>
+                  <a:pt x="120000" y="0"/>
+                </a:lnTo>
+                <a:lnTo>
+                  <a:pt x="120000" y="120000"/>
+                </a:lnTo>
+                <a:lnTo>
+                  <a:pt x="0" y="120000"/>
+                </a:lnTo>
+                <a:close/>
+              </a:path>
+            </a:pathLst>
+          </a:custGeom>
+        </p:spPr>
+      </p:sp>
+    </p:spTree>
+    <p:extLst>
+      <p:ext uri="{BB962C8B-B14F-4D97-AF65-F5344CB8AC3E}">
+        <p14:creationId xmlns:p14="http://schemas.microsoft.com/office/powerpoint/2010/main" val="379389422"/>
       </p:ext>
     </p:extLst>
   </p:cSld>
@@ -11868,7 +13358,7 @@
                 <a:cs typeface="Comfortaa"/>
                 <a:sym typeface="Comfortaa"/>
               </a:rPr>
-              <a:t>컴퓨터 이론과 마우스</a:t>
+              <a:t>컴퓨터 이론</a:t>
             </a:r>
             <a:endParaRPr dirty="0"/>
           </a:p>
@@ -12002,8 +13492,8 @@
         </p:nvSpPr>
         <p:spPr>
           <a:xfrm>
-            <a:off x="4352306" y="3651759"/>
-            <a:ext cx="7681872" cy="738664"/>
+            <a:off x="4333645" y="2855546"/>
+            <a:ext cx="7681872" cy="1846659"/>
           </a:xfrm>
           <a:prstGeom prst="rect">
             <a:avLst/>
@@ -12019,7 +13509,7 @@
           </a:bodyPr>
           <a:lstStyle/>
           <a:p>
-            <a:pPr lvl="0" algn="ctr"/>
+            <a:pPr lvl="0"/>
             <a:r>
               <a:rPr lang="ko-KR" altLang="en-US" sz="2400" dirty="0">
                 <a:solidFill>
@@ -12030,20 +13520,20 @@
                 <a:cs typeface="Afacad Flux"/>
                 <a:sym typeface="Afacad Flux"/>
               </a:rPr>
-              <a:t>책상 위 정해진 위치에 놓고 사용하는 </a:t>
-            </a:r>
-            <a:endParaRPr lang="en-US" altLang="ko-KR" sz="2400" dirty="0">
-              <a:solidFill>
-                <a:srgbClr val="334155"/>
-              </a:solidFill>
-              <a:latin typeface="Afacad Flux"/>
-              <a:ea typeface="Afacad Flux"/>
-              <a:cs typeface="Afacad Flux"/>
-              <a:sym typeface="Afacad Flux"/>
-            </a:endParaRPr>
-          </a:p>
-          <a:p>
-            <a:pPr lvl="0" algn="ctr"/>
+              <a:t>스마트폰은 전화 문자</a:t>
+            </a:r>
+            <a:r>
+              <a:rPr lang="en-US" altLang="ko-KR" sz="2400" dirty="0">
+                <a:solidFill>
+                  <a:srgbClr val="334155"/>
+                </a:solidFill>
+                <a:latin typeface="Afacad Flux"/>
+                <a:ea typeface="Afacad Flux"/>
+                <a:cs typeface="Afacad Flux"/>
+                <a:sym typeface="Afacad Flux"/>
+              </a:rPr>
+              <a:t>. </a:t>
+            </a:r>
             <a:r>
               <a:rPr lang="ko-KR" altLang="en-US" sz="2400" dirty="0">
                 <a:solidFill>
@@ -12054,7 +13544,103 @@
                 <a:cs typeface="Afacad Flux"/>
                 <a:sym typeface="Afacad Flux"/>
               </a:rPr>
-              <a:t>개인용 컴퓨터를 말합니다</a:t>
+              <a:t>인터넷</a:t>
+            </a:r>
+            <a:r>
+              <a:rPr lang="en-US" altLang="ko-KR" sz="2400" dirty="0">
+                <a:solidFill>
+                  <a:srgbClr val="334155"/>
+                </a:solidFill>
+                <a:latin typeface="Afacad Flux"/>
+                <a:ea typeface="Afacad Flux"/>
+                <a:cs typeface="Afacad Flux"/>
+                <a:sym typeface="Afacad Flux"/>
+              </a:rPr>
+              <a:t>, </a:t>
+            </a:r>
+            <a:r>
+              <a:rPr lang="ko-KR" altLang="en-US" sz="2400" dirty="0">
+                <a:solidFill>
+                  <a:srgbClr val="334155"/>
+                </a:solidFill>
+                <a:latin typeface="Afacad Flux"/>
+                <a:ea typeface="Afacad Flux"/>
+                <a:cs typeface="Afacad Flux"/>
+                <a:sym typeface="Afacad Flux"/>
+              </a:rPr>
+              <a:t>게임</a:t>
+            </a:r>
+            <a:r>
+              <a:rPr lang="en-US" altLang="ko-KR" sz="2400" dirty="0">
+                <a:solidFill>
+                  <a:srgbClr val="334155"/>
+                </a:solidFill>
+                <a:latin typeface="Afacad Flux"/>
+                <a:ea typeface="Afacad Flux"/>
+                <a:cs typeface="Afacad Flux"/>
+                <a:sym typeface="Afacad Flux"/>
+              </a:rPr>
+              <a:t>, </a:t>
+            </a:r>
+            <a:r>
+              <a:rPr lang="ko-KR" altLang="en-US" sz="2400" dirty="0">
+                <a:solidFill>
+                  <a:srgbClr val="334155"/>
+                </a:solidFill>
+                <a:latin typeface="Afacad Flux"/>
+                <a:ea typeface="Afacad Flux"/>
+                <a:cs typeface="Afacad Flux"/>
+                <a:sym typeface="Afacad Flux"/>
+              </a:rPr>
+              <a:t>음악</a:t>
+            </a:r>
+            <a:r>
+              <a:rPr lang="en-US" altLang="ko-KR" sz="2400" dirty="0">
+                <a:solidFill>
+                  <a:srgbClr val="334155"/>
+                </a:solidFill>
+                <a:latin typeface="Afacad Flux"/>
+                <a:ea typeface="Afacad Flux"/>
+                <a:cs typeface="Afacad Flux"/>
+                <a:sym typeface="Afacad Flux"/>
+              </a:rPr>
+              <a:t>, </a:t>
+            </a:r>
+            <a:r>
+              <a:rPr lang="ko-KR" altLang="en-US" sz="2400" dirty="0">
+                <a:solidFill>
+                  <a:srgbClr val="334155"/>
+                </a:solidFill>
+                <a:latin typeface="Afacad Flux"/>
+                <a:ea typeface="Afacad Flux"/>
+                <a:cs typeface="Afacad Flux"/>
+                <a:sym typeface="Afacad Flux"/>
+              </a:rPr>
+              <a:t>동영상 등 다양한 기능을 제공하는 휴대용 컴퓨터입니다</a:t>
+            </a:r>
+            <a:r>
+              <a:rPr lang="en-US" altLang="ko-KR" sz="2400" dirty="0">
+                <a:solidFill>
+                  <a:srgbClr val="334155"/>
+                </a:solidFill>
+                <a:latin typeface="Afacad Flux"/>
+                <a:ea typeface="Afacad Flux"/>
+                <a:cs typeface="Afacad Flux"/>
+                <a:sym typeface="Afacad Flux"/>
+              </a:rPr>
+              <a:t>. </a:t>
+            </a:r>
+            <a:r>
+              <a:rPr lang="ko-KR" altLang="en-US" sz="2400" dirty="0">
+                <a:solidFill>
+                  <a:srgbClr val="334155"/>
+                </a:solidFill>
+                <a:latin typeface="Afacad Flux"/>
+                <a:ea typeface="Afacad Flux"/>
+                <a:cs typeface="Afacad Flux"/>
+                <a:sym typeface="Afacad Flux"/>
+              </a:rPr>
+              <a:t>스마트폰은 손안의 작은 컴퓨터라고 불리는 만큼 언제 어디서나 필요한 정보를 얻고 사람들과 소통하며 다양한 콘텐츠를 사용할 수 있습니다</a:t>
             </a:r>
             <a:endParaRPr lang="en-US" altLang="ko-KR" sz="2400" dirty="0">
               <a:solidFill>
@@ -12130,35 +13716,6 @@
       </p:sp>
       <p:pic>
         <p:nvPicPr>
-          <p:cNvPr id="3" name="그림 2">
-            <a:extLst>
-              <a:ext uri="{FF2B5EF4-FFF2-40B4-BE49-F238E27FC236}">
-                <a16:creationId xmlns:a16="http://schemas.microsoft.com/office/drawing/2014/main" id="{189B453F-26BC-4696-BF86-F72E7BA1B81F}"/>
-              </a:ext>
-            </a:extLst>
-          </p:cNvPr>
-          <p:cNvPicPr>
-            <a:picLocks noChangeAspect="1"/>
-          </p:cNvPicPr>
-          <p:nvPr/>
-        </p:nvPicPr>
-        <p:blipFill>
-          <a:blip r:embed="rId4"/>
-          <a:srcRect t="3896" b="3896"/>
-          <a:stretch/>
-        </p:blipFill>
-        <p:spPr>
-          <a:xfrm>
-            <a:off x="1557233" y="1653892"/>
-            <a:ext cx="2589051" cy="4295817"/>
-          </a:xfrm>
-          <a:prstGeom prst="rect">
-            <a:avLst/>
-          </a:prstGeom>
-        </p:spPr>
-      </p:pic>
-      <p:pic>
-        <p:nvPicPr>
           <p:cNvPr id="2" name="그림 1">
             <a:extLst>
               <a:ext uri="{FF2B5EF4-FFF2-40B4-BE49-F238E27FC236}">
@@ -12172,15 +13729,16 @@
           <p:nvPr/>
         </p:nvPicPr>
         <p:blipFill>
-          <a:blip r:embed="rId5"/>
+          <a:blip r:embed="rId4"/>
+          <a:srcRect l="27688" t="68212" r="57778"/>
           <a:stretch>
             <a:fillRect/>
           </a:stretch>
         </p:blipFill>
         <p:spPr>
           <a:xfrm>
-            <a:off x="3057101" y="1452286"/>
-            <a:ext cx="6077798" cy="3953427"/>
+            <a:off x="1007705" y="1585282"/>
+            <a:ext cx="2904931" cy="4132954"/>
           </a:xfrm>
           <a:prstGeom prst="rect">
             <a:avLst/>
@@ -12200,20 +13758,18 @@
 </p:sld>
 </file>
 
-<file path=ppt/slides/slide2.xml><?xml version="1.0" encoding="utf-8"?>
+<file path=ppt/slides/slide11.xml><?xml version="1.0" encoding="utf-8"?>
 <p:sld xmlns:a="http://schemas.openxmlformats.org/drawingml/2006/main" xmlns:r="http://schemas.openxmlformats.org/officeDocument/2006/relationships" xmlns:p="http://schemas.openxmlformats.org/presentationml/2006/main">
   <p:cSld>
-    <p:bg>
-      <p:bgPr>
-        <a:solidFill>
-          <a:srgbClr val="FFFFFF"/>
-        </a:solidFill>
-        <a:effectLst/>
-      </p:bgPr>
-    </p:bg>
     <p:spTree>
       <p:nvGrpSpPr>
-        <p:cNvPr id="1" name="Shape 90"/>
+        <p:cNvPr id="1" name="Shape 90">
+          <a:extLst>
+            <a:ext uri="{FF2B5EF4-FFF2-40B4-BE49-F238E27FC236}">
+              <a16:creationId xmlns:a16="http://schemas.microsoft.com/office/drawing/2014/main" id="{64A45241-9B2C-AD90-68D7-E139FDAC5B91}"/>
+            </a:ext>
+          </a:extLst>
+        </p:cNvPr>
         <p:cNvGrpSpPr/>
         <p:nvPr/>
       </p:nvGrpSpPr>
@@ -12227,7 +13783,13 @@
       </p:grpSpPr>
       <p:pic>
         <p:nvPicPr>
-          <p:cNvPr id="91" name="Google Shape;91;p14" descr="image.png"/>
+          <p:cNvPr id="91" name="Google Shape;91;p14" descr="image.png">
+            <a:extLst>
+              <a:ext uri="{FF2B5EF4-FFF2-40B4-BE49-F238E27FC236}">
+                <a16:creationId xmlns:a16="http://schemas.microsoft.com/office/drawing/2014/main" id="{12244C6D-F3A1-4EA9-BB9F-1EA2BF6ACE4C}"/>
+              </a:ext>
+            </a:extLst>
+          </p:cNvPr>
           <p:cNvPicPr preferRelativeResize="0"/>
           <p:nvPr/>
         </p:nvPicPr>
@@ -12254,14 +13816,20 @@
       </p:pic>
       <p:sp>
         <p:nvSpPr>
-          <p:cNvPr id="93" name="Google Shape;93;p14"/>
+          <p:cNvPr id="94" name="Google Shape;94;p14">
+            <a:extLst>
+              <a:ext uri="{FF2B5EF4-FFF2-40B4-BE49-F238E27FC236}">
+                <a16:creationId xmlns:a16="http://schemas.microsoft.com/office/drawing/2014/main" id="{BFD226D9-7838-DC89-4199-B67665CD080B}"/>
+              </a:ext>
+            </a:extLst>
+          </p:cNvPr>
           <p:cNvSpPr txBox="1"/>
           <p:nvPr/>
         </p:nvSpPr>
         <p:spPr>
           <a:xfrm>
-            <a:off x="6334125" y="2900362"/>
-            <a:ext cx="5550693" cy="461665"/>
+            <a:off x="4333645" y="2354505"/>
+            <a:ext cx="7681872" cy="1846659"/>
           </a:xfrm>
           <a:prstGeom prst="rect">
             <a:avLst/>
@@ -12277,168 +13845,376 @@
           </a:bodyPr>
           <a:lstStyle/>
           <a:p>
-            <a:pPr marL="0" marR="0" lvl="0" indent="0" algn="l" rtl="0">
-              <a:spcBef>
-                <a:spcPts val="0"/>
-              </a:spcBef>
-              <a:spcAft>
-                <a:spcPts val="0"/>
-              </a:spcAft>
-              <a:buNone/>
-            </a:pPr>
-            <a:r>
-              <a:rPr lang="ko-KR" altLang="en-US" sz="3000" b="1" i="0" u="none" strike="noStrike" cap="none" dirty="0">
-                <a:solidFill>
-                  <a:srgbClr val="FF823A"/>
-                </a:solidFill>
-                <a:latin typeface="Afacad Flux"/>
-                <a:ea typeface="Afacad Flux"/>
-                <a:cs typeface="Afacad Flux"/>
-                <a:sym typeface="Afacad Flux"/>
-              </a:rPr>
-              <a:t>학습 목표</a:t>
-            </a:r>
-            <a:endParaRPr dirty="0"/>
+            <a:pPr lvl="0"/>
+            <a:r>
+              <a:rPr lang="ko-KR" altLang="en-US" sz="2400" dirty="0">
+                <a:solidFill>
+                  <a:srgbClr val="334155"/>
+                </a:solidFill>
+                <a:latin typeface="Afacad Flux"/>
+                <a:ea typeface="Afacad Flux"/>
+                <a:cs typeface="Afacad Flux"/>
+                <a:sym typeface="Afacad Flux"/>
+              </a:rPr>
+              <a:t>웨어러블 디바이스는 신체에 착용할 수 있는 소형 컴퓨터입니다</a:t>
+            </a:r>
+            <a:r>
+              <a:rPr lang="en-US" altLang="ko-KR" sz="2400" dirty="0">
+                <a:solidFill>
+                  <a:srgbClr val="334155"/>
+                </a:solidFill>
+                <a:latin typeface="Afacad Flux"/>
+                <a:ea typeface="Afacad Flux"/>
+                <a:cs typeface="Afacad Flux"/>
+                <a:sym typeface="Afacad Flux"/>
+              </a:rPr>
+              <a:t>. </a:t>
+            </a:r>
+            <a:r>
+              <a:rPr lang="ko-KR" altLang="en-US" sz="2400" dirty="0" err="1">
+                <a:solidFill>
+                  <a:srgbClr val="334155"/>
+                </a:solidFill>
+                <a:latin typeface="Afacad Flux"/>
+                <a:ea typeface="Afacad Flux"/>
+                <a:cs typeface="Afacad Flux"/>
+                <a:sym typeface="Afacad Flux"/>
+              </a:rPr>
+              <a:t>스마트워치</a:t>
+            </a:r>
+            <a:r>
+              <a:rPr lang="en-US" altLang="ko-KR" sz="2400" dirty="0">
+                <a:solidFill>
+                  <a:srgbClr val="334155"/>
+                </a:solidFill>
+                <a:latin typeface="Afacad Flux"/>
+                <a:ea typeface="Afacad Flux"/>
+                <a:cs typeface="Afacad Flux"/>
+                <a:sym typeface="Afacad Flux"/>
+              </a:rPr>
+              <a:t>, </a:t>
+            </a:r>
+            <a:r>
+              <a:rPr lang="ko-KR" altLang="en-US" sz="2400" dirty="0">
+                <a:solidFill>
+                  <a:srgbClr val="334155"/>
+                </a:solidFill>
+                <a:latin typeface="Afacad Flux"/>
+                <a:ea typeface="Afacad Flux"/>
+                <a:cs typeface="Afacad Flux"/>
+                <a:sym typeface="Afacad Flux"/>
+              </a:rPr>
+              <a:t>밴드</a:t>
+            </a:r>
+            <a:r>
+              <a:rPr lang="en-US" altLang="ko-KR" sz="2400" dirty="0">
+                <a:solidFill>
+                  <a:srgbClr val="334155"/>
+                </a:solidFill>
+                <a:latin typeface="Afacad Flux"/>
+                <a:ea typeface="Afacad Flux"/>
+                <a:cs typeface="Afacad Flux"/>
+                <a:sym typeface="Afacad Flux"/>
+              </a:rPr>
+              <a:t>, </a:t>
+            </a:r>
+            <a:r>
+              <a:rPr lang="ko-KR" altLang="en-US" sz="2400" dirty="0">
+                <a:solidFill>
+                  <a:srgbClr val="334155"/>
+                </a:solidFill>
+                <a:latin typeface="Afacad Flux"/>
+                <a:ea typeface="Afacad Flux"/>
+                <a:cs typeface="Afacad Flux"/>
+                <a:sym typeface="Afacad Flux"/>
+              </a:rPr>
+              <a:t>안경</a:t>
+            </a:r>
+            <a:r>
+              <a:rPr lang="en-US" altLang="ko-KR" sz="2400" dirty="0">
+                <a:solidFill>
+                  <a:srgbClr val="334155"/>
+                </a:solidFill>
+                <a:latin typeface="Afacad Flux"/>
+                <a:ea typeface="Afacad Flux"/>
+                <a:cs typeface="Afacad Flux"/>
+                <a:sym typeface="Afacad Flux"/>
+              </a:rPr>
+              <a:t>, </a:t>
+            </a:r>
+            <a:r>
+              <a:rPr lang="ko-KR" altLang="en-US" sz="2400" dirty="0">
+                <a:solidFill>
+                  <a:srgbClr val="334155"/>
+                </a:solidFill>
+                <a:latin typeface="Afacad Flux"/>
+                <a:ea typeface="Afacad Flux"/>
+                <a:cs typeface="Afacad Flux"/>
+                <a:sym typeface="Afacad Flux"/>
+              </a:rPr>
+              <a:t>목걸이</a:t>
+            </a:r>
+            <a:r>
+              <a:rPr lang="en-US" altLang="ko-KR" sz="2400" dirty="0">
+                <a:solidFill>
+                  <a:srgbClr val="334155"/>
+                </a:solidFill>
+                <a:latin typeface="Afacad Flux"/>
+                <a:ea typeface="Afacad Flux"/>
+                <a:cs typeface="Afacad Flux"/>
+                <a:sym typeface="Afacad Flux"/>
+              </a:rPr>
+              <a:t>, </a:t>
+            </a:r>
+            <a:r>
+              <a:rPr lang="ko-KR" altLang="en-US" sz="2400" dirty="0">
+                <a:solidFill>
+                  <a:srgbClr val="334155"/>
+                </a:solidFill>
+                <a:latin typeface="Afacad Flux"/>
+                <a:ea typeface="Afacad Flux"/>
+                <a:cs typeface="Afacad Flux"/>
+                <a:sym typeface="Afacad Flux"/>
+              </a:rPr>
+              <a:t>셔츠</a:t>
+            </a:r>
+            <a:r>
+              <a:rPr lang="en-US" altLang="ko-KR" sz="2400" dirty="0">
+                <a:solidFill>
+                  <a:srgbClr val="334155"/>
+                </a:solidFill>
+                <a:latin typeface="Afacad Flux"/>
+                <a:ea typeface="Afacad Flux"/>
+                <a:cs typeface="Afacad Flux"/>
+                <a:sym typeface="Afacad Flux"/>
+              </a:rPr>
+              <a:t>,</a:t>
+            </a:r>
+            <a:r>
+              <a:rPr lang="ko-KR" altLang="en-US" sz="2400" dirty="0">
+                <a:solidFill>
+                  <a:srgbClr val="334155"/>
+                </a:solidFill>
+                <a:latin typeface="Afacad Flux"/>
+                <a:ea typeface="Afacad Flux"/>
+                <a:cs typeface="Afacad Flux"/>
+                <a:sym typeface="Afacad Flux"/>
+              </a:rPr>
+              <a:t> 신발</a:t>
+            </a:r>
+            <a:r>
+              <a:rPr lang="en-US" altLang="ko-KR" sz="2400" dirty="0">
+                <a:solidFill>
+                  <a:srgbClr val="334155"/>
+                </a:solidFill>
+                <a:latin typeface="Afacad Flux"/>
+                <a:ea typeface="Afacad Flux"/>
+                <a:cs typeface="Afacad Flux"/>
+                <a:sym typeface="Afacad Flux"/>
+              </a:rPr>
+              <a:t>, </a:t>
+            </a:r>
+            <a:r>
+              <a:rPr lang="ko-KR" altLang="en-US" sz="2400" dirty="0">
+                <a:solidFill>
+                  <a:srgbClr val="334155"/>
+                </a:solidFill>
+                <a:latin typeface="Afacad Flux"/>
+                <a:ea typeface="Afacad Flux"/>
+                <a:cs typeface="Afacad Flux"/>
+                <a:sym typeface="Afacad Flux"/>
+              </a:rPr>
+              <a:t>생체 이식 등의 여러 종류가 있으며</a:t>
+            </a:r>
+            <a:r>
+              <a:rPr lang="en-US" altLang="ko-KR" sz="2400" dirty="0">
+                <a:solidFill>
+                  <a:srgbClr val="334155"/>
+                </a:solidFill>
+                <a:latin typeface="Afacad Flux"/>
+                <a:ea typeface="Afacad Flux"/>
+                <a:cs typeface="Afacad Flux"/>
+                <a:sym typeface="Afacad Flux"/>
+              </a:rPr>
+              <a:t>, </a:t>
+            </a:r>
+            <a:r>
+              <a:rPr lang="ko-KR" altLang="en-US" sz="2400" dirty="0">
+                <a:solidFill>
+                  <a:srgbClr val="334155"/>
+                </a:solidFill>
+                <a:latin typeface="Afacad Flux"/>
+                <a:ea typeface="Afacad Flux"/>
+                <a:cs typeface="Afacad Flux"/>
+                <a:sym typeface="Afacad Flux"/>
+              </a:rPr>
+              <a:t>각 디바이스는 음성인식</a:t>
+            </a:r>
+            <a:r>
+              <a:rPr lang="en-US" altLang="ko-KR" sz="2400" dirty="0">
+                <a:solidFill>
+                  <a:srgbClr val="334155"/>
+                </a:solidFill>
+                <a:latin typeface="Afacad Flux"/>
+                <a:ea typeface="Afacad Flux"/>
+                <a:cs typeface="Afacad Flux"/>
+                <a:sym typeface="Afacad Flux"/>
+              </a:rPr>
+              <a:t>, </a:t>
+            </a:r>
+            <a:r>
+              <a:rPr lang="ko-KR" altLang="en-US" sz="2400" dirty="0">
+                <a:solidFill>
+                  <a:srgbClr val="334155"/>
+                </a:solidFill>
+                <a:latin typeface="Afacad Flux"/>
+                <a:ea typeface="Afacad Flux"/>
+                <a:cs typeface="Afacad Flux"/>
+                <a:sym typeface="Afacad Flux"/>
+              </a:rPr>
+              <a:t>건강관리</a:t>
+            </a:r>
+            <a:r>
+              <a:rPr lang="en-US" altLang="ko-KR" sz="2400" dirty="0">
+                <a:solidFill>
+                  <a:srgbClr val="334155"/>
+                </a:solidFill>
+                <a:latin typeface="Afacad Flux"/>
+                <a:ea typeface="Afacad Flux"/>
+                <a:cs typeface="Afacad Flux"/>
+                <a:sym typeface="Afacad Flux"/>
+              </a:rPr>
+              <a:t>, </a:t>
+            </a:r>
+            <a:r>
+              <a:rPr lang="ko-KR" altLang="en-US" sz="2400" dirty="0">
+                <a:solidFill>
+                  <a:srgbClr val="334155"/>
+                </a:solidFill>
+                <a:latin typeface="Afacad Flux"/>
+                <a:ea typeface="Afacad Flux"/>
+                <a:cs typeface="Afacad Flux"/>
+                <a:sym typeface="Afacad Flux"/>
+              </a:rPr>
+              <a:t>촬영</a:t>
+            </a:r>
+            <a:r>
+              <a:rPr lang="en-US" altLang="ko-KR" sz="2400" dirty="0">
+                <a:solidFill>
+                  <a:srgbClr val="334155"/>
+                </a:solidFill>
+                <a:latin typeface="Afacad Flux"/>
+                <a:ea typeface="Afacad Flux"/>
+                <a:cs typeface="Afacad Flux"/>
+                <a:sym typeface="Afacad Flux"/>
+              </a:rPr>
+              <a:t>, </a:t>
+            </a:r>
+            <a:r>
+              <a:rPr lang="ko-KR" altLang="en-US" sz="2400" dirty="0">
+                <a:solidFill>
+                  <a:srgbClr val="334155"/>
+                </a:solidFill>
+                <a:latin typeface="Afacad Flux"/>
+                <a:ea typeface="Afacad Flux"/>
+                <a:cs typeface="Afacad Flux"/>
+                <a:sym typeface="Afacad Flux"/>
+              </a:rPr>
+              <a:t>미디어 컨트롤러</a:t>
+            </a:r>
+            <a:r>
+              <a:rPr lang="en-US" altLang="ko-KR" sz="2400" dirty="0">
+                <a:solidFill>
+                  <a:srgbClr val="334155"/>
+                </a:solidFill>
+                <a:latin typeface="Afacad Flux"/>
+                <a:ea typeface="Afacad Flux"/>
+                <a:cs typeface="Afacad Flux"/>
+                <a:sym typeface="Afacad Flux"/>
+              </a:rPr>
+              <a:t>, </a:t>
+            </a:r>
+            <a:r>
+              <a:rPr lang="ko-KR" altLang="en-US" sz="2400" dirty="0">
+                <a:solidFill>
+                  <a:srgbClr val="334155"/>
+                </a:solidFill>
+                <a:latin typeface="Afacad Flux"/>
+                <a:ea typeface="Afacad Flux"/>
+                <a:cs typeface="Afacad Flux"/>
+                <a:sym typeface="Afacad Flux"/>
+              </a:rPr>
+              <a:t>증강</a:t>
+            </a:r>
+            <a:r>
+              <a:rPr lang="en-US" altLang="ko-KR" sz="2400" dirty="0">
+                <a:solidFill>
+                  <a:srgbClr val="334155"/>
+                </a:solidFill>
+                <a:latin typeface="Afacad Flux"/>
+                <a:ea typeface="Afacad Flux"/>
+                <a:cs typeface="Afacad Flux"/>
+                <a:sym typeface="Afacad Flux"/>
+              </a:rPr>
+              <a:t> </a:t>
+            </a:r>
+            <a:r>
+              <a:rPr lang="ko-KR" altLang="en-US" sz="2400" dirty="0">
+                <a:solidFill>
+                  <a:srgbClr val="334155"/>
+                </a:solidFill>
+                <a:latin typeface="Afacad Flux"/>
+                <a:ea typeface="Afacad Flux"/>
+                <a:cs typeface="Afacad Flux"/>
+                <a:sym typeface="Afacad Flux"/>
+              </a:rPr>
+              <a:t>현실</a:t>
+            </a:r>
+            <a:r>
+              <a:rPr lang="en-US" altLang="ko-KR" sz="2400" dirty="0">
+                <a:solidFill>
+                  <a:srgbClr val="334155"/>
+                </a:solidFill>
+                <a:latin typeface="Afacad Flux"/>
+                <a:ea typeface="Afacad Flux"/>
+                <a:cs typeface="Afacad Flux"/>
+                <a:sym typeface="Afacad Flux"/>
+              </a:rPr>
+              <a:t>, </a:t>
+            </a:r>
+            <a:r>
+              <a:rPr lang="ko-KR" altLang="en-US" sz="2400" dirty="0">
+                <a:solidFill>
+                  <a:srgbClr val="334155"/>
+                </a:solidFill>
+                <a:latin typeface="Afacad Flux"/>
+                <a:ea typeface="Afacad Flux"/>
+                <a:cs typeface="Afacad Flux"/>
+                <a:sym typeface="Afacad Flux"/>
+              </a:rPr>
+              <a:t>가상현실 등의 기능을 제공합니다</a:t>
+            </a:r>
+            <a:endParaRPr lang="en-US" altLang="ko-KR" sz="2400" dirty="0">
+              <a:solidFill>
+                <a:srgbClr val="334155"/>
+              </a:solidFill>
+              <a:latin typeface="Afacad Flux"/>
+              <a:ea typeface="Afacad Flux"/>
+              <a:cs typeface="Afacad Flux"/>
+              <a:sym typeface="Afacad Flux"/>
+            </a:endParaRPr>
           </a:p>
         </p:txBody>
       </p:sp>
       <p:sp>
         <p:nvSpPr>
-          <p:cNvPr id="94" name="Google Shape;94;p14"/>
-          <p:cNvSpPr txBox="1"/>
-          <p:nvPr/>
-        </p:nvSpPr>
-        <p:spPr>
-          <a:xfrm>
-            <a:off x="6334125" y="3805237"/>
-            <a:ext cx="5753491" cy="600164"/>
-          </a:xfrm>
-          <a:prstGeom prst="rect">
-            <a:avLst/>
-          </a:prstGeom>
-          <a:noFill/>
-          <a:ln>
-            <a:noFill/>
-          </a:ln>
-        </p:spPr>
-        <p:txBody>
-          <a:bodyPr spcFirstLastPara="1" wrap="square" lIns="0" tIns="0" rIns="0" bIns="0" anchor="t" anchorCtr="0">
-            <a:spAutoFit/>
-          </a:bodyPr>
-          <a:lstStyle/>
-          <a:p>
-            <a:pPr marL="342900" lvl="0" indent="-342900">
-              <a:buFont typeface="Arial" panose="020B0604020202020204" pitchFamily="34" charset="0"/>
-              <a:buChar char="•"/>
-            </a:pPr>
-            <a:r>
-              <a:rPr lang="ko-KR" altLang="en-US" sz="1950" dirty="0">
-                <a:solidFill>
-                  <a:srgbClr val="334155"/>
-                </a:solidFill>
-                <a:latin typeface="Afacad Flux"/>
-                <a:ea typeface="Afacad Flux"/>
-                <a:cs typeface="Afacad Flux"/>
-                <a:sym typeface="Afacad Flux"/>
-              </a:rPr>
-              <a:t>하드웨어</a:t>
-            </a:r>
-            <a:r>
-              <a:rPr lang="en-US" altLang="ko-KR" sz="1950" dirty="0">
-                <a:solidFill>
-                  <a:srgbClr val="334155"/>
-                </a:solidFill>
-                <a:latin typeface="Afacad Flux"/>
-                <a:ea typeface="Afacad Flux"/>
-                <a:cs typeface="Afacad Flux"/>
-                <a:sym typeface="Afacad Flux"/>
-              </a:rPr>
-              <a:t>, </a:t>
-            </a:r>
-            <a:r>
-              <a:rPr lang="ko-KR" altLang="en-US" sz="1950" dirty="0">
-                <a:solidFill>
-                  <a:srgbClr val="334155"/>
-                </a:solidFill>
-                <a:latin typeface="Afacad Flux"/>
-                <a:ea typeface="Afacad Flux"/>
-                <a:cs typeface="Afacad Flux"/>
-                <a:sym typeface="Afacad Flux"/>
-              </a:rPr>
-              <a:t>소프트웨어의 개념을 배웁니다</a:t>
-            </a:r>
-            <a:r>
-              <a:rPr lang="en-US" altLang="ko-KR" sz="1950" dirty="0">
-                <a:solidFill>
-                  <a:srgbClr val="334155"/>
-                </a:solidFill>
-                <a:latin typeface="Afacad Flux"/>
-                <a:ea typeface="Afacad Flux"/>
-                <a:cs typeface="Afacad Flux"/>
-                <a:sym typeface="Afacad Flux"/>
-              </a:rPr>
-              <a:t>.</a:t>
-            </a:r>
-          </a:p>
-          <a:p>
-            <a:pPr marL="342900" lvl="0" indent="-342900">
-              <a:buFont typeface="Arial" panose="020B0604020202020204" pitchFamily="34" charset="0"/>
-              <a:buChar char="•"/>
-            </a:pPr>
-            <a:r>
-              <a:rPr lang="ko-KR" altLang="en-US" sz="1950" dirty="0">
-                <a:solidFill>
-                  <a:srgbClr val="334155"/>
-                </a:solidFill>
-                <a:latin typeface="Afacad Flux"/>
-                <a:ea typeface="Afacad Flux"/>
-                <a:cs typeface="Afacad Flux"/>
-                <a:sym typeface="Afacad Flux"/>
-              </a:rPr>
-              <a:t>마우스가 </a:t>
-            </a:r>
-            <a:r>
-              <a:rPr lang="ko-KR" altLang="en-US" sz="1950" dirty="0" err="1">
-                <a:solidFill>
-                  <a:srgbClr val="334155"/>
-                </a:solidFill>
-                <a:latin typeface="Afacad Flux"/>
-                <a:ea typeface="Afacad Flux"/>
-                <a:cs typeface="Afacad Flux"/>
-                <a:sym typeface="Afacad Flux"/>
-              </a:rPr>
-              <a:t>뭔지</a:t>
-            </a:r>
-            <a:r>
-              <a:rPr lang="ko-KR" altLang="en-US" sz="1950" dirty="0">
-                <a:solidFill>
-                  <a:srgbClr val="334155"/>
-                </a:solidFill>
-                <a:latin typeface="Afacad Flux"/>
-                <a:ea typeface="Afacad Flux"/>
-                <a:cs typeface="Afacad Flux"/>
-                <a:sym typeface="Afacad Flux"/>
-              </a:rPr>
-              <a:t> 배워보고 마우스를 사용해 봅니다</a:t>
-            </a:r>
-            <a:r>
-              <a:rPr lang="en-US" altLang="ko-KR" sz="1950" dirty="0">
-                <a:solidFill>
-                  <a:srgbClr val="334155"/>
-                </a:solidFill>
-                <a:latin typeface="Afacad Flux"/>
-                <a:ea typeface="Afacad Flux"/>
-                <a:cs typeface="Afacad Flux"/>
-                <a:sym typeface="Afacad Flux"/>
-              </a:rPr>
-              <a:t>.</a:t>
-            </a:r>
-          </a:p>
-        </p:txBody>
-      </p:sp>
-      <p:sp>
-        <p:nvSpPr>
-          <p:cNvPr id="95" name="Google Shape;95;p14"/>
+          <p:cNvPr id="95" name="Google Shape;95;p14">
+            <a:extLst>
+              <a:ext uri="{FF2B5EF4-FFF2-40B4-BE49-F238E27FC236}">
+                <a16:creationId xmlns:a16="http://schemas.microsoft.com/office/drawing/2014/main" id="{D9F3F0A0-268B-77AB-A16B-A529A1033F4C}"/>
+              </a:ext>
+            </a:extLst>
+          </p:cNvPr>
           <p:cNvSpPr txBox="1"/>
           <p:nvPr/>
         </p:nvSpPr>
@@ -12472,7 +14248,7 @@
                 <a:cs typeface="Comfortaa"/>
                 <a:sym typeface="Comfortaa"/>
               </a:rPr>
-              <a:t>진도 나갈 페이지 </a:t>
+              <a:t>웨어러블 디바이스란</a:t>
             </a:r>
             <a:r>
               <a:rPr lang="en-US" altLang="ko-KR" sz="3900" b="1" dirty="0">
@@ -12484,7 +14260,7 @@
                 <a:cs typeface="Comfortaa"/>
                 <a:sym typeface="Comfortaa"/>
               </a:rPr>
-              <a:t>: 6page~17page</a:t>
+              <a:t>?</a:t>
             </a:r>
             <a:endParaRPr dirty="0"/>
           </a:p>
@@ -12492,52 +14268,211 @@
       </p:sp>
       <p:pic>
         <p:nvPicPr>
-          <p:cNvPr id="1026" name="Picture 2" descr="AI수업이 아니라 위도우 기초 수업이야">
+          <p:cNvPr id="3" name="그림 2">
             <a:extLst>
               <a:ext uri="{FF2B5EF4-FFF2-40B4-BE49-F238E27FC236}">
-                <a16:creationId xmlns:a16="http://schemas.microsoft.com/office/drawing/2014/main" id="{937ADDF3-624B-EFEA-0313-4584C2781C94}"/>
+                <a16:creationId xmlns:a16="http://schemas.microsoft.com/office/drawing/2014/main" id="{F5E7D329-5E3F-7A33-FCBA-76900265FBFD}"/>
               </a:ext>
             </a:extLst>
           </p:cNvPr>
           <p:cNvPicPr>
-            <a:picLocks noChangeAspect="1" noChangeArrowheads="1"/>
+            <a:picLocks noChangeAspect="1"/>
           </p:cNvPicPr>
           <p:nvPr/>
         </p:nvPicPr>
         <p:blipFill>
-          <a:blip r:embed="rId4">
-            <a:extLst>
-              <a:ext uri="{28A0092B-C50C-407E-A947-70E740481C1C}">
-                <a14:useLocalDpi xmlns:a14="http://schemas.microsoft.com/office/drawing/2010/main" val="0"/>
-              </a:ext>
-            </a:extLst>
-          </a:blip>
-          <a:srcRect/>
+          <a:blip r:embed="rId4"/>
+          <a:srcRect l="13672" t="26259" r="64189" b="35380"/>
           <a:stretch>
             <a:fillRect/>
           </a:stretch>
         </p:blipFill>
-        <p:spPr bwMode="auto">
+        <p:spPr>
           <a:xfrm>
-            <a:off x="700414" y="1653892"/>
-            <a:ext cx="4302690" cy="4302690"/>
+            <a:off x="757353" y="1747927"/>
+            <a:ext cx="3317777" cy="3739375"/>
+          </a:xfrm>
+          <a:prstGeom prst="rect">
+            <a:avLst/>
+          </a:prstGeom>
+        </p:spPr>
+      </p:pic>
+      <p:sp>
+        <p:nvSpPr>
+          <p:cNvPr id="4" name="Google Shape;94;p14">
+            <a:extLst>
+              <a:ext uri="{FF2B5EF4-FFF2-40B4-BE49-F238E27FC236}">
+                <a16:creationId xmlns:a16="http://schemas.microsoft.com/office/drawing/2014/main" id="{D8A83755-0247-75F8-E20A-CBDFD4F69E61}"/>
+              </a:ext>
+            </a:extLst>
+          </p:cNvPr>
+          <p:cNvSpPr txBox="1"/>
+          <p:nvPr/>
+        </p:nvSpPr>
+        <p:spPr>
+          <a:xfrm>
+            <a:off x="4333645" y="4201164"/>
+            <a:ext cx="7681872" cy="553998"/>
           </a:xfrm>
           <a:prstGeom prst="rect">
             <a:avLst/>
           </a:prstGeom>
           <a:noFill/>
-          <a:extLst>
-            <a:ext uri="{909E8E84-426E-40DD-AFC4-6F175D3DCCD1}">
-              <a14:hiddenFill xmlns:a14="http://schemas.microsoft.com/office/drawing/2010/main">
-                <a:solidFill>
-                  <a:srgbClr val="FFFFFF"/>
-                </a:solidFill>
-              </a14:hiddenFill>
-            </a:ext>
-          </a:extLst>
+          <a:ln>
+            <a:noFill/>
+          </a:ln>
         </p:spPr>
-      </p:pic>
+        <p:txBody>
+          <a:bodyPr spcFirstLastPara="1" wrap="square" lIns="0" tIns="0" rIns="0" bIns="0" anchor="t" anchorCtr="0">
+            <a:spAutoFit/>
+          </a:bodyPr>
+          <a:lstStyle/>
+          <a:p>
+            <a:pPr marL="342900" lvl="0" indent="-342900">
+              <a:buClr>
+                <a:schemeClr val="tx1">
+                  <a:lumMod val="50000"/>
+                  <a:lumOff val="50000"/>
+                </a:schemeClr>
+              </a:buClr>
+              <a:buFont typeface="Arial" panose="020B0604020202020204" pitchFamily="34" charset="0"/>
+              <a:buChar char="•"/>
+            </a:pPr>
+            <a:r>
+              <a:rPr lang="ko-KR" altLang="en-US" sz="1800" dirty="0">
+                <a:solidFill>
+                  <a:schemeClr val="tx1">
+                    <a:lumMod val="50000"/>
+                    <a:lumOff val="50000"/>
+                  </a:schemeClr>
+                </a:solidFill>
+                <a:latin typeface="Afacad Flux"/>
+                <a:ea typeface="Afacad Flux"/>
+                <a:cs typeface="Afacad Flux"/>
+                <a:sym typeface="Afacad Flux"/>
+              </a:rPr>
+              <a:t>증강현실 </a:t>
+            </a:r>
+            <a:r>
+              <a:rPr lang="en-US" altLang="ko-KR" sz="1800" dirty="0">
+                <a:solidFill>
+                  <a:schemeClr val="tx1">
+                    <a:lumMod val="50000"/>
+                    <a:lumOff val="50000"/>
+                  </a:schemeClr>
+                </a:solidFill>
+                <a:latin typeface="Afacad Flux"/>
+                <a:ea typeface="Afacad Flux"/>
+                <a:cs typeface="Afacad Flux"/>
+                <a:sym typeface="Afacad Flux"/>
+              </a:rPr>
+              <a:t>: </a:t>
+            </a:r>
+            <a:r>
+              <a:rPr lang="ko-KR" altLang="en-US" sz="1800" dirty="0">
+                <a:solidFill>
+                  <a:schemeClr val="tx1">
+                    <a:lumMod val="50000"/>
+                    <a:lumOff val="50000"/>
+                  </a:schemeClr>
+                </a:solidFill>
+                <a:latin typeface="Afacad Flux"/>
+                <a:ea typeface="Afacad Flux"/>
+                <a:cs typeface="Afacad Flux"/>
+                <a:sym typeface="Afacad Flux"/>
+              </a:rPr>
+              <a:t>현실 세계에 가상 정보를 덧입히는 기술을 사용합니다 </a:t>
+            </a:r>
+            <a:endParaRPr lang="en-US" altLang="ko-KR" sz="1800" dirty="0">
+              <a:solidFill>
+                <a:schemeClr val="tx1">
+                  <a:lumMod val="50000"/>
+                  <a:lumOff val="50000"/>
+                </a:schemeClr>
+              </a:solidFill>
+              <a:latin typeface="Afacad Flux"/>
+              <a:ea typeface="Afacad Flux"/>
+              <a:cs typeface="Afacad Flux"/>
+              <a:sym typeface="Afacad Flux"/>
+            </a:endParaRPr>
+          </a:p>
+          <a:p>
+            <a:pPr marL="342900" lvl="0" indent="-342900">
+              <a:buClr>
+                <a:schemeClr val="tx1">
+                  <a:lumMod val="50000"/>
+                  <a:lumOff val="50000"/>
+                </a:schemeClr>
+              </a:buClr>
+              <a:buFont typeface="Arial" panose="020B0604020202020204" pitchFamily="34" charset="0"/>
+              <a:buChar char="•"/>
+            </a:pPr>
+            <a:r>
+              <a:rPr lang="ko-KR" altLang="en-US" sz="1800" dirty="0">
+                <a:solidFill>
+                  <a:schemeClr val="tx1">
+                    <a:lumMod val="50000"/>
+                    <a:lumOff val="50000"/>
+                  </a:schemeClr>
+                </a:solidFill>
+                <a:latin typeface="Afacad Flux"/>
+                <a:ea typeface="Afacad Flux"/>
+                <a:cs typeface="Afacad Flux"/>
+                <a:sym typeface="Afacad Flux"/>
+              </a:rPr>
+              <a:t>가상현실</a:t>
+            </a:r>
+            <a:r>
+              <a:rPr lang="en-US" altLang="ko-KR" sz="1800" dirty="0">
+                <a:solidFill>
+                  <a:schemeClr val="tx1">
+                    <a:lumMod val="50000"/>
+                    <a:lumOff val="50000"/>
+                  </a:schemeClr>
+                </a:solidFill>
+                <a:latin typeface="Afacad Flux"/>
+                <a:ea typeface="Afacad Flux"/>
+                <a:cs typeface="Afacad Flux"/>
+                <a:sym typeface="Afacad Flux"/>
+              </a:rPr>
+              <a:t>:</a:t>
+            </a:r>
+            <a:r>
+              <a:rPr lang="ko-KR" altLang="en-US" sz="1800" dirty="0">
+                <a:solidFill>
+                  <a:schemeClr val="tx1">
+                    <a:lumMod val="50000"/>
+                    <a:lumOff val="50000"/>
+                  </a:schemeClr>
+                </a:solidFill>
+                <a:latin typeface="Afacad Flux"/>
+                <a:ea typeface="Afacad Flux"/>
+                <a:cs typeface="Afacad Flux"/>
+                <a:sym typeface="Afacad Flux"/>
+              </a:rPr>
+              <a:t>현실 세계를 차단하고 가상 세계를 보여주는 기술을 사용합니다</a:t>
+            </a:r>
+            <a:endParaRPr lang="en-US" altLang="ko-KR" sz="1800" dirty="0">
+              <a:solidFill>
+                <a:schemeClr val="tx1">
+                  <a:lumMod val="50000"/>
+                  <a:lumOff val="50000"/>
+                </a:schemeClr>
+              </a:solidFill>
+              <a:latin typeface="Afacad Flux"/>
+              <a:ea typeface="Afacad Flux"/>
+              <a:cs typeface="Afacad Flux"/>
+              <a:sym typeface="Afacad Flux"/>
+            </a:endParaRPr>
+          </a:p>
+        </p:txBody>
+      </p:sp>
     </p:spTree>
+    <p:extLst>
+      <p:ext uri="{BB962C8B-B14F-4D97-AF65-F5344CB8AC3E}">
+        <p14:creationId xmlns:p14="http://schemas.microsoft.com/office/powerpoint/2010/main" val="4100964503"/>
+      </p:ext>
+    </p:extLst>
   </p:cSld>
   <p:clrMapOvr>
     <a:masterClrMapping/>
@@ -12545,7 +14480,2102 @@
 </p:sld>
 </file>
 
-<file path=ppt/slides/slide3.xml><?xml version="1.0" encoding="utf-8"?>
+<file path=ppt/slides/slide12.xml><?xml version="1.0" encoding="utf-8"?>
+<p:sld xmlns:a="http://schemas.openxmlformats.org/drawingml/2006/main" xmlns:r="http://schemas.openxmlformats.org/officeDocument/2006/relationships" xmlns:p="http://schemas.openxmlformats.org/presentationml/2006/main">
+  <p:cSld>
+    <p:spTree>
+      <p:nvGrpSpPr>
+        <p:cNvPr id="1" name="Shape 187">
+          <a:extLst>
+            <a:ext uri="{FF2B5EF4-FFF2-40B4-BE49-F238E27FC236}">
+              <a16:creationId xmlns:a16="http://schemas.microsoft.com/office/drawing/2014/main" id="{DBD4D56E-7236-A32C-D516-32CFBBECEC92}"/>
+            </a:ext>
+          </a:extLst>
+        </p:cNvPr>
+        <p:cNvGrpSpPr/>
+        <p:nvPr/>
+      </p:nvGrpSpPr>
+      <p:grpSpPr>
+        <a:xfrm>
+          <a:off x="0" y="0"/>
+          <a:ext cx="0" cy="0"/>
+          <a:chOff x="0" y="0"/>
+          <a:chExt cx="0" cy="0"/>
+        </a:xfrm>
+      </p:grpSpPr>
+      <p:pic>
+        <p:nvPicPr>
+          <p:cNvPr id="188" name="Google Shape;188;p23" descr="image.png">
+            <a:extLst>
+              <a:ext uri="{FF2B5EF4-FFF2-40B4-BE49-F238E27FC236}">
+                <a16:creationId xmlns:a16="http://schemas.microsoft.com/office/drawing/2014/main" id="{4F977548-06E8-612B-74BE-36FDC012C9F4}"/>
+              </a:ext>
+            </a:extLst>
+          </p:cNvPr>
+          <p:cNvPicPr preferRelativeResize="0"/>
+          <p:nvPr/>
+        </p:nvPicPr>
+        <p:blipFill rotWithShape="1">
+          <a:blip r:embed="rId3">
+            <a:alphaModFix/>
+          </a:blip>
+          <a:srcRect/>
+          <a:stretch/>
+        </p:blipFill>
+        <p:spPr>
+          <a:xfrm>
+            <a:off x="0" y="0"/>
+            <a:ext cx="12192000" cy="6858000"/>
+          </a:xfrm>
+          <a:prstGeom prst="rect">
+            <a:avLst/>
+          </a:prstGeom>
+          <a:noFill/>
+          <a:ln>
+            <a:noFill/>
+          </a:ln>
+        </p:spPr>
+      </p:pic>
+      <p:sp>
+        <p:nvSpPr>
+          <p:cNvPr id="189" name="Google Shape;189;p23">
+            <a:extLst>
+              <a:ext uri="{FF2B5EF4-FFF2-40B4-BE49-F238E27FC236}">
+                <a16:creationId xmlns:a16="http://schemas.microsoft.com/office/drawing/2014/main" id="{6FB7FA39-3E68-8A9A-34E5-290C1CE14436}"/>
+              </a:ext>
+            </a:extLst>
+          </p:cNvPr>
+          <p:cNvSpPr txBox="1"/>
+          <p:nvPr/>
+        </p:nvSpPr>
+        <p:spPr>
+          <a:xfrm>
+            <a:off x="116186" y="510081"/>
+            <a:ext cx="11959628" cy="2492990"/>
+          </a:xfrm>
+          <a:prstGeom prst="rect">
+            <a:avLst/>
+          </a:prstGeom>
+          <a:noFill/>
+          <a:ln>
+            <a:noFill/>
+          </a:ln>
+        </p:spPr>
+        <p:txBody>
+          <a:bodyPr spcFirstLastPara="1" wrap="square" lIns="0" tIns="0" rIns="0" bIns="0" anchor="t" anchorCtr="0">
+            <a:spAutoFit/>
+          </a:bodyPr>
+          <a:lstStyle/>
+          <a:p>
+            <a:pPr lvl="0" algn="ctr"/>
+            <a:r>
+              <a:rPr lang="ko-KR" altLang="en-US" sz="5400" b="1" dirty="0">
+                <a:solidFill>
+                  <a:srgbClr val="FFFFFF"/>
+                </a:solidFill>
+                <a:latin typeface="Comfortaa"/>
+                <a:ea typeface="Comfortaa"/>
+                <a:cs typeface="Comfortaa"/>
+                <a:sym typeface="Comfortaa"/>
+              </a:rPr>
+              <a:t>증강현실과 가상현실은 즐기려면 </a:t>
+            </a:r>
+            <a:r>
+              <a:rPr lang="ko-KR" altLang="en-US" sz="5400" b="1" dirty="0" err="1">
+                <a:solidFill>
+                  <a:srgbClr val="FFFFFF"/>
+                </a:solidFill>
+                <a:latin typeface="Comfortaa"/>
+                <a:ea typeface="Comfortaa"/>
+                <a:cs typeface="Comfortaa"/>
+                <a:sym typeface="Comfortaa"/>
+              </a:rPr>
+              <a:t>웹어러블</a:t>
+            </a:r>
+            <a:r>
+              <a:rPr lang="ko-KR" altLang="en-US" sz="5400" b="1" dirty="0">
+                <a:solidFill>
+                  <a:srgbClr val="FFFFFF"/>
+                </a:solidFill>
+                <a:latin typeface="Comfortaa"/>
+                <a:ea typeface="Comfortaa"/>
+                <a:cs typeface="Comfortaa"/>
+                <a:sym typeface="Comfortaa"/>
+              </a:rPr>
+              <a:t> 디바이스같이 </a:t>
+            </a:r>
+            <a:endParaRPr lang="en-US" altLang="ko-KR" sz="5400" b="1" dirty="0">
+              <a:solidFill>
+                <a:srgbClr val="FFFFFF"/>
+              </a:solidFill>
+              <a:latin typeface="Comfortaa"/>
+              <a:ea typeface="Comfortaa"/>
+              <a:cs typeface="Comfortaa"/>
+              <a:sym typeface="Comfortaa"/>
+            </a:endParaRPr>
+          </a:p>
+          <a:p>
+            <a:pPr lvl="0" algn="ctr"/>
+            <a:r>
+              <a:rPr lang="ko-KR" altLang="en-US" sz="5400" b="1" dirty="0">
+                <a:solidFill>
+                  <a:srgbClr val="FFFFFF"/>
+                </a:solidFill>
+                <a:latin typeface="Comfortaa"/>
+                <a:ea typeface="Comfortaa"/>
+                <a:cs typeface="Comfortaa"/>
+                <a:sym typeface="Comfortaa"/>
+              </a:rPr>
+              <a:t>복잡한걸 </a:t>
+            </a:r>
+            <a:r>
+              <a:rPr lang="ko-KR" altLang="en-US" sz="5400" b="1" dirty="0" err="1">
+                <a:solidFill>
+                  <a:srgbClr val="FFFFFF"/>
+                </a:solidFill>
+                <a:latin typeface="Comfortaa"/>
+                <a:ea typeface="Comfortaa"/>
+                <a:cs typeface="Comfortaa"/>
+                <a:sym typeface="Comfortaa"/>
+              </a:rPr>
+              <a:t>써야하나요</a:t>
+            </a:r>
+            <a:r>
+              <a:rPr lang="en-US" altLang="ko-KR" sz="5400" b="1" dirty="0">
+                <a:solidFill>
+                  <a:srgbClr val="FFFFFF"/>
+                </a:solidFill>
+                <a:latin typeface="Comfortaa"/>
+                <a:ea typeface="Comfortaa"/>
+                <a:cs typeface="Comfortaa"/>
+                <a:sym typeface="Comfortaa"/>
+              </a:rPr>
+              <a:t>? </a:t>
+            </a:r>
+            <a:endParaRPr sz="1000" dirty="0"/>
+          </a:p>
+        </p:txBody>
+      </p:sp>
+      <p:sp>
+        <p:nvSpPr>
+          <p:cNvPr id="190" name="Google Shape;190;p23">
+            <a:extLst>
+              <a:ext uri="{FF2B5EF4-FFF2-40B4-BE49-F238E27FC236}">
+                <a16:creationId xmlns:a16="http://schemas.microsoft.com/office/drawing/2014/main" id="{FA787DB3-D094-5443-9B61-0F358DDF73BC}"/>
+              </a:ext>
+            </a:extLst>
+          </p:cNvPr>
+          <p:cNvSpPr txBox="1"/>
+          <p:nvPr/>
+        </p:nvSpPr>
+        <p:spPr>
+          <a:xfrm>
+            <a:off x="3314700" y="3186112"/>
+            <a:ext cx="5562600" cy="419100"/>
+          </a:xfrm>
+          <a:prstGeom prst="rect">
+            <a:avLst/>
+          </a:prstGeom>
+          <a:noFill/>
+          <a:ln>
+            <a:noFill/>
+          </a:ln>
+        </p:spPr>
+        <p:txBody>
+          <a:bodyPr spcFirstLastPara="1" wrap="square" lIns="0" tIns="0" rIns="0" bIns="0" anchor="t" anchorCtr="0">
+            <a:spAutoFit/>
+          </a:bodyPr>
+          <a:lstStyle/>
+          <a:p>
+            <a:pPr marL="0" marR="0" lvl="0" indent="0" algn="l" rtl="0">
+              <a:spcBef>
+                <a:spcPts val="0"/>
+              </a:spcBef>
+              <a:spcAft>
+                <a:spcPts val="0"/>
+              </a:spcAft>
+              <a:buNone/>
+            </a:pPr>
+            <a:r>
+              <a:rPr lang="en-US" sz="2400" b="0" i="0" u="none" strike="noStrike" cap="none" dirty="0">
+                <a:solidFill>
+                  <a:srgbClr val="FFFFFF"/>
+                </a:solidFill>
+                <a:latin typeface="Afacad Flux"/>
+                <a:ea typeface="Afacad Flux"/>
+                <a:cs typeface="Afacad Flux"/>
+                <a:sym typeface="Afacad Flux"/>
+              </a:rPr>
+              <a:t>안영진 </a:t>
+            </a:r>
+            <a:r>
+              <a:rPr lang="en-US" sz="2400" b="0" i="0" u="none" strike="noStrike" cap="none" dirty="0" err="1">
+                <a:solidFill>
+                  <a:srgbClr val="FFFFFF"/>
+                </a:solidFill>
+                <a:latin typeface="Afacad Flux"/>
+                <a:ea typeface="Afacad Flux"/>
+                <a:cs typeface="Afacad Flux"/>
+                <a:sym typeface="Afacad Flux"/>
+              </a:rPr>
+              <a:t>선생님이</a:t>
+            </a:r>
+            <a:r>
+              <a:rPr lang="en-US" sz="2400" b="0" i="0" u="none" strike="noStrike" cap="none" dirty="0">
+                <a:solidFill>
+                  <a:srgbClr val="FFFFFF"/>
+                </a:solidFill>
+                <a:latin typeface="Afacad Flux"/>
+                <a:ea typeface="Afacad Flux"/>
+                <a:cs typeface="Afacad Flux"/>
+                <a:sym typeface="Afacad Flux"/>
+              </a:rPr>
+              <a:t> </a:t>
+            </a:r>
+            <a:r>
+              <a:rPr lang="en-US" sz="2400" b="0" i="0" u="none" strike="noStrike" cap="none" dirty="0" err="1">
+                <a:solidFill>
+                  <a:srgbClr val="FFFFFF"/>
+                </a:solidFill>
+                <a:latin typeface="Afacad Flux"/>
+                <a:ea typeface="Afacad Flux"/>
+                <a:cs typeface="Afacad Flux"/>
+                <a:sym typeface="Afacad Flux"/>
+              </a:rPr>
+              <a:t>무엇이든</a:t>
+            </a:r>
+            <a:r>
+              <a:rPr lang="en-US" sz="2400" b="0" i="0" u="none" strike="noStrike" cap="none" dirty="0">
+                <a:solidFill>
+                  <a:srgbClr val="FFFFFF"/>
+                </a:solidFill>
+                <a:latin typeface="Afacad Flux"/>
+                <a:ea typeface="Afacad Flux"/>
+                <a:cs typeface="Afacad Flux"/>
+                <a:sym typeface="Afacad Flux"/>
+              </a:rPr>
+              <a:t> </a:t>
+            </a:r>
+            <a:r>
+              <a:rPr lang="en-US" sz="2400" b="0" i="0" u="none" strike="noStrike" cap="none" dirty="0" err="1">
+                <a:solidFill>
+                  <a:srgbClr val="FFFFFF"/>
+                </a:solidFill>
+                <a:latin typeface="Afacad Flux"/>
+                <a:ea typeface="Afacad Flux"/>
+                <a:cs typeface="Afacad Flux"/>
+                <a:sym typeface="Afacad Flux"/>
+              </a:rPr>
+              <a:t>답해줄게요</a:t>
+            </a:r>
+            <a:r>
+              <a:rPr lang="en-US" sz="2400" b="0" i="0" u="none" strike="noStrike" cap="none" dirty="0">
+                <a:solidFill>
+                  <a:srgbClr val="FFFFFF"/>
+                </a:solidFill>
+                <a:latin typeface="Afacad Flux"/>
+                <a:ea typeface="Afacad Flux"/>
+                <a:cs typeface="Afacad Flux"/>
+                <a:sym typeface="Afacad Flux"/>
+              </a:rPr>
+              <a:t>!</a:t>
+            </a:r>
+            <a:endParaRPr dirty="0"/>
+          </a:p>
+        </p:txBody>
+      </p:sp>
+      <p:sp>
+        <p:nvSpPr>
+          <p:cNvPr id="192" name="Google Shape;192;p23">
+            <a:extLst>
+              <a:ext uri="{FF2B5EF4-FFF2-40B4-BE49-F238E27FC236}">
+                <a16:creationId xmlns:a16="http://schemas.microsoft.com/office/drawing/2014/main" id="{DD9602BA-57A0-B3D7-B11D-AC0637C34C74}"/>
+              </a:ext>
+            </a:extLst>
+          </p:cNvPr>
+          <p:cNvSpPr txBox="1"/>
+          <p:nvPr/>
+        </p:nvSpPr>
+        <p:spPr>
+          <a:xfrm>
+            <a:off x="3314700" y="4614862"/>
+            <a:ext cx="5562600" cy="304800"/>
+          </a:xfrm>
+          <a:prstGeom prst="rect">
+            <a:avLst/>
+          </a:prstGeom>
+          <a:noFill/>
+          <a:ln>
+            <a:noFill/>
+          </a:ln>
+        </p:spPr>
+        <p:txBody>
+          <a:bodyPr spcFirstLastPara="1" wrap="square" lIns="0" tIns="0" rIns="0" bIns="0" anchor="t" anchorCtr="0">
+            <a:spAutoFit/>
+          </a:bodyPr>
+          <a:lstStyle/>
+          <a:p>
+            <a:pPr marL="0" marR="0" lvl="0" indent="0" algn="l" rtl="0">
+              <a:spcBef>
+                <a:spcPts val="0"/>
+              </a:spcBef>
+              <a:spcAft>
+                <a:spcPts val="0"/>
+              </a:spcAft>
+              <a:buNone/>
+            </a:pPr>
+            <a:r>
+              <a:rPr lang="en-US" sz="1800" b="0" i="0" u="none" strike="noStrike" cap="none">
+                <a:solidFill>
+                  <a:srgbClr val="334155"/>
+                </a:solidFill>
+                <a:latin typeface="Afacad Flux"/>
+                <a:ea typeface="Afacad Flux"/>
+                <a:cs typeface="Afacad Flux"/>
+                <a:sym typeface="Afacad Flux"/>
+              </a:rPr>
+              <a:t>여러분의 멋진 미래를 응원합니다!</a:t>
+            </a:r>
+            <a:endParaRPr/>
+          </a:p>
+        </p:txBody>
+      </p:sp>
+    </p:spTree>
+    <p:extLst>
+      <p:ext uri="{BB962C8B-B14F-4D97-AF65-F5344CB8AC3E}">
+        <p14:creationId xmlns:p14="http://schemas.microsoft.com/office/powerpoint/2010/main" val="3016007998"/>
+      </p:ext>
+    </p:extLst>
+  </p:cSld>
+  <p:clrMapOvr>
+    <a:masterClrMapping/>
+  </p:clrMapOvr>
+</p:sld>
+</file>
+
+<file path=ppt/slides/slide13.xml><?xml version="1.0" encoding="utf-8"?>
+<p:sld xmlns:a="http://schemas.openxmlformats.org/drawingml/2006/main" xmlns:r="http://schemas.openxmlformats.org/officeDocument/2006/relationships" xmlns:p="http://schemas.openxmlformats.org/presentationml/2006/main">
+  <p:cSld>
+    <p:spTree>
+      <p:nvGrpSpPr>
+        <p:cNvPr id="1" name="Shape 90">
+          <a:extLst>
+            <a:ext uri="{FF2B5EF4-FFF2-40B4-BE49-F238E27FC236}">
+              <a16:creationId xmlns:a16="http://schemas.microsoft.com/office/drawing/2014/main" id="{E06171BE-1396-D290-878C-3A099C395146}"/>
+            </a:ext>
+          </a:extLst>
+        </p:cNvPr>
+        <p:cNvGrpSpPr/>
+        <p:nvPr/>
+      </p:nvGrpSpPr>
+      <p:grpSpPr>
+        <a:xfrm>
+          <a:off x="0" y="0"/>
+          <a:ext cx="0" cy="0"/>
+          <a:chOff x="0" y="0"/>
+          <a:chExt cx="0" cy="0"/>
+        </a:xfrm>
+      </p:grpSpPr>
+      <p:pic>
+        <p:nvPicPr>
+          <p:cNvPr id="91" name="Google Shape;91;p14" descr="image.png">
+            <a:extLst>
+              <a:ext uri="{FF2B5EF4-FFF2-40B4-BE49-F238E27FC236}">
+                <a16:creationId xmlns:a16="http://schemas.microsoft.com/office/drawing/2014/main" id="{4CE6D2FA-B5A7-6E45-7803-C414896DB0C9}"/>
+              </a:ext>
+            </a:extLst>
+          </p:cNvPr>
+          <p:cNvPicPr preferRelativeResize="0"/>
+          <p:nvPr/>
+        </p:nvPicPr>
+        <p:blipFill rotWithShape="1">
+          <a:blip r:embed="rId3">
+            <a:alphaModFix/>
+          </a:blip>
+          <a:srcRect/>
+          <a:stretch/>
+        </p:blipFill>
+        <p:spPr>
+          <a:xfrm>
+            <a:off x="0" y="-4763"/>
+            <a:ext cx="12192000" cy="6858000"/>
+          </a:xfrm>
+          <a:prstGeom prst="rect">
+            <a:avLst/>
+          </a:prstGeom>
+          <a:noFill/>
+          <a:ln>
+            <a:noFill/>
+          </a:ln>
+        </p:spPr>
+      </p:pic>
+      <p:sp>
+        <p:nvSpPr>
+          <p:cNvPr id="93" name="Google Shape;93;p14">
+            <a:extLst>
+              <a:ext uri="{FF2B5EF4-FFF2-40B4-BE49-F238E27FC236}">
+                <a16:creationId xmlns:a16="http://schemas.microsoft.com/office/drawing/2014/main" id="{53A10ECD-72AD-BC26-1EC0-A19E80049B0D}"/>
+              </a:ext>
+            </a:extLst>
+          </p:cNvPr>
+          <p:cNvSpPr txBox="1"/>
+          <p:nvPr/>
+        </p:nvSpPr>
+        <p:spPr>
+          <a:xfrm>
+            <a:off x="6334125" y="2004069"/>
+            <a:ext cx="5550693" cy="461665"/>
+          </a:xfrm>
+          <a:prstGeom prst="rect">
+            <a:avLst/>
+          </a:prstGeom>
+          <a:noFill/>
+          <a:ln>
+            <a:noFill/>
+          </a:ln>
+        </p:spPr>
+        <p:txBody>
+          <a:bodyPr spcFirstLastPara="1" wrap="square" lIns="0" tIns="0" rIns="0" bIns="0" anchor="t" anchorCtr="0">
+            <a:spAutoFit/>
+          </a:bodyPr>
+          <a:lstStyle/>
+          <a:p>
+            <a:pPr marL="0" marR="0" lvl="0" indent="0" algn="l" rtl="0">
+              <a:spcBef>
+                <a:spcPts val="0"/>
+              </a:spcBef>
+              <a:spcAft>
+                <a:spcPts val="0"/>
+              </a:spcAft>
+              <a:buNone/>
+            </a:pPr>
+            <a:r>
+              <a:rPr lang="ko-KR" altLang="en-US" sz="3000" b="1" i="0" u="none" strike="noStrike" cap="none" dirty="0">
+                <a:solidFill>
+                  <a:srgbClr val="FF823A"/>
+                </a:solidFill>
+                <a:latin typeface="Afacad Flux"/>
+                <a:ea typeface="Afacad Flux"/>
+                <a:cs typeface="Afacad Flux"/>
+                <a:sym typeface="Afacad Flux"/>
+              </a:rPr>
+              <a:t>반 </a:t>
+            </a:r>
+            <a:r>
+              <a:rPr lang="ko-KR" altLang="en-US" sz="3000" b="1" i="0" u="none" strike="noStrike" cap="none" dirty="0" err="1">
+                <a:solidFill>
+                  <a:srgbClr val="FF823A"/>
+                </a:solidFill>
+                <a:latin typeface="Afacad Flux"/>
+                <a:ea typeface="Afacad Flux"/>
+                <a:cs typeface="Afacad Flux"/>
+                <a:sym typeface="Afacad Flux"/>
+              </a:rPr>
+              <a:t>쯤</a:t>
+            </a:r>
+            <a:r>
+              <a:rPr lang="ko-KR" altLang="en-US" sz="3000" b="1" dirty="0">
+                <a:solidFill>
+                  <a:srgbClr val="FF823A"/>
+                </a:solidFill>
+                <a:latin typeface="Afacad Flux"/>
+                <a:ea typeface="Afacad Flux"/>
+                <a:cs typeface="Afacad Flux"/>
+                <a:sym typeface="Afacad Flux"/>
+              </a:rPr>
+              <a:t> 맞습니다</a:t>
+            </a:r>
+            <a:endParaRPr dirty="0"/>
+          </a:p>
+        </p:txBody>
+      </p:sp>
+      <p:sp>
+        <p:nvSpPr>
+          <p:cNvPr id="94" name="Google Shape;94;p14">
+            <a:extLst>
+              <a:ext uri="{FF2B5EF4-FFF2-40B4-BE49-F238E27FC236}">
+                <a16:creationId xmlns:a16="http://schemas.microsoft.com/office/drawing/2014/main" id="{CC800489-4C8A-94E1-949E-26100BCD257C}"/>
+              </a:ext>
+            </a:extLst>
+          </p:cNvPr>
+          <p:cNvSpPr txBox="1"/>
+          <p:nvPr/>
+        </p:nvSpPr>
+        <p:spPr>
+          <a:xfrm>
+            <a:off x="6334125" y="2908944"/>
+            <a:ext cx="5753491" cy="2100575"/>
+          </a:xfrm>
+          <a:prstGeom prst="rect">
+            <a:avLst/>
+          </a:prstGeom>
+          <a:noFill/>
+          <a:ln>
+            <a:noFill/>
+          </a:ln>
+        </p:spPr>
+        <p:txBody>
+          <a:bodyPr spcFirstLastPara="1" wrap="square" lIns="0" tIns="0" rIns="0" bIns="0" anchor="t" anchorCtr="0">
+            <a:spAutoFit/>
+          </a:bodyPr>
+          <a:lstStyle/>
+          <a:p>
+            <a:pPr lvl="0"/>
+            <a:r>
+              <a:rPr lang="ko-KR" altLang="en-US" sz="1950" b="1" dirty="0">
+                <a:solidFill>
+                  <a:srgbClr val="FF0000"/>
+                </a:solidFill>
+                <a:latin typeface="Afacad Flux"/>
+                <a:ea typeface="Afacad Flux"/>
+                <a:cs typeface="Afacad Flux"/>
+                <a:sym typeface="Afacad Flux"/>
+              </a:rPr>
+              <a:t>증강현실</a:t>
+            </a:r>
+            <a:r>
+              <a:rPr lang="en-US" altLang="ko-KR" sz="1950" b="1" dirty="0">
+                <a:solidFill>
+                  <a:srgbClr val="FF0000"/>
+                </a:solidFill>
+                <a:latin typeface="Afacad Flux"/>
+                <a:ea typeface="Afacad Flux"/>
+                <a:cs typeface="Afacad Flux"/>
+                <a:sym typeface="Afacad Flux"/>
+              </a:rPr>
+              <a:t>(AR)</a:t>
+            </a:r>
+            <a:r>
+              <a:rPr lang="ko-KR" altLang="en-US" sz="1950" b="1" dirty="0">
+                <a:solidFill>
+                  <a:srgbClr val="FF0000"/>
+                </a:solidFill>
+                <a:latin typeface="Afacad Flux"/>
+                <a:ea typeface="Afacad Flux"/>
+                <a:cs typeface="Afacad Flux"/>
+                <a:sym typeface="Afacad Flux"/>
+              </a:rPr>
+              <a:t>은 우리가 이미 가지고 있는 스마트폰의 카메라와 센서만으로도 충분히 마법 같은 화면을 만들 수 있기 때문</a:t>
+            </a:r>
+            <a:r>
+              <a:rPr lang="ko-KR" altLang="en-US" sz="1950" dirty="0">
+                <a:solidFill>
+                  <a:schemeClr val="tx1"/>
+                </a:solidFill>
+                <a:latin typeface="Afacad Flux"/>
+                <a:ea typeface="Afacad Flux"/>
+                <a:cs typeface="Afacad Flux"/>
+                <a:sym typeface="Afacad Flux"/>
+              </a:rPr>
+              <a:t>에</a:t>
+            </a:r>
+            <a:r>
+              <a:rPr lang="ko-KR" altLang="en-US" sz="1950" b="1" dirty="0">
+                <a:solidFill>
+                  <a:srgbClr val="FF0000"/>
+                </a:solidFill>
+                <a:latin typeface="Afacad Flux"/>
+                <a:ea typeface="Afacad Flux"/>
+                <a:cs typeface="Afacad Flux"/>
+                <a:sym typeface="Afacad Flux"/>
+              </a:rPr>
+              <a:t> </a:t>
+            </a:r>
+            <a:r>
+              <a:rPr lang="ko-KR" altLang="en-US" sz="1950" dirty="0">
+                <a:solidFill>
+                  <a:srgbClr val="334155"/>
+                </a:solidFill>
+                <a:latin typeface="Afacad Flux"/>
+                <a:ea typeface="Afacad Flux"/>
+                <a:cs typeface="Afacad Flux"/>
+                <a:sym typeface="Afacad Flux"/>
+              </a:rPr>
+              <a:t>복잡한 장비가 전혀 필요 없으며</a:t>
+            </a:r>
+            <a:r>
+              <a:rPr lang="en-US" altLang="ko-KR" sz="1950" dirty="0">
+                <a:solidFill>
+                  <a:srgbClr val="334155"/>
+                </a:solidFill>
+                <a:latin typeface="Afacad Flux"/>
+                <a:ea typeface="Afacad Flux"/>
+                <a:cs typeface="Afacad Flux"/>
+                <a:sym typeface="Afacad Flux"/>
+              </a:rPr>
+              <a:t>, </a:t>
+            </a:r>
+            <a:r>
+              <a:rPr lang="ko-KR" altLang="en-US" sz="1950" b="1" dirty="0">
+                <a:solidFill>
+                  <a:srgbClr val="FF0000"/>
+                </a:solidFill>
+                <a:latin typeface="Afacad Flux"/>
+                <a:ea typeface="Afacad Flux"/>
+                <a:cs typeface="Afacad Flux"/>
+                <a:sym typeface="Afacad Flux"/>
+              </a:rPr>
+              <a:t>가상현실</a:t>
+            </a:r>
+            <a:r>
+              <a:rPr lang="en-US" altLang="ko-KR" sz="1950" b="1" dirty="0">
+                <a:solidFill>
+                  <a:srgbClr val="FF0000"/>
+                </a:solidFill>
+                <a:latin typeface="Afacad Flux"/>
+                <a:ea typeface="Afacad Flux"/>
+                <a:cs typeface="Afacad Flux"/>
+                <a:sym typeface="Afacad Flux"/>
+              </a:rPr>
+              <a:t>(VR)</a:t>
+            </a:r>
+            <a:r>
+              <a:rPr lang="ko-KR" altLang="en-US" sz="1950" b="1" dirty="0">
+                <a:solidFill>
+                  <a:srgbClr val="FF0000"/>
+                </a:solidFill>
+                <a:latin typeface="Afacad Flux"/>
+                <a:ea typeface="Afacad Flux"/>
+                <a:cs typeface="Afacad Flux"/>
+                <a:sym typeface="Afacad Flux"/>
+              </a:rPr>
+              <a:t>처럼 눈을 완전히 가리고 다른 세상으로 쏙 들어가고 싶을 때만 전용 헤드셋을 쓰는 것이므로 </a:t>
+            </a:r>
+            <a:r>
+              <a:rPr lang="en-US" altLang="ko-KR" sz="1950" b="1" dirty="0">
+                <a:solidFill>
+                  <a:srgbClr val="FF0000"/>
+                </a:solidFill>
+                <a:latin typeface="Afacad Flux"/>
+                <a:ea typeface="Afacad Flux"/>
+                <a:cs typeface="Afacad Flux"/>
+                <a:sym typeface="Afacad Flux"/>
+              </a:rPr>
+              <a:t>"</a:t>
+            </a:r>
+            <a:r>
+              <a:rPr lang="ko-KR" altLang="en-US" sz="1950" b="1" dirty="0">
+                <a:solidFill>
+                  <a:srgbClr val="FF0000"/>
+                </a:solidFill>
+                <a:latin typeface="Afacad Flux"/>
+                <a:ea typeface="Afacad Flux"/>
+                <a:cs typeface="Afacad Flux"/>
+                <a:sym typeface="Afacad Flux"/>
+              </a:rPr>
+              <a:t>복잡한 장비를 꼭 써야 한다</a:t>
+            </a:r>
+            <a:r>
+              <a:rPr lang="en-US" altLang="ko-KR" sz="1950" b="1" dirty="0">
+                <a:solidFill>
+                  <a:srgbClr val="FF0000"/>
+                </a:solidFill>
+                <a:latin typeface="Afacad Flux"/>
+                <a:ea typeface="Afacad Flux"/>
+                <a:cs typeface="Afacad Flux"/>
+                <a:sym typeface="Afacad Flux"/>
+              </a:rPr>
+              <a:t>"</a:t>
+            </a:r>
+            <a:r>
+              <a:rPr lang="ko-KR" altLang="en-US" sz="1950" b="1" dirty="0">
+                <a:solidFill>
+                  <a:srgbClr val="FF0000"/>
+                </a:solidFill>
+                <a:latin typeface="Afacad Flux"/>
+                <a:ea typeface="Afacad Flux"/>
+                <a:cs typeface="Afacad Flux"/>
+                <a:sym typeface="Afacad Flux"/>
+              </a:rPr>
+              <a:t>는 말은 정답이 아닙니다</a:t>
+            </a:r>
+            <a:r>
+              <a:rPr lang="en-US" altLang="ko-KR" sz="1950" b="1" dirty="0">
+                <a:solidFill>
+                  <a:srgbClr val="FF0000"/>
+                </a:solidFill>
+                <a:latin typeface="Afacad Flux"/>
+                <a:ea typeface="Afacad Flux"/>
+                <a:cs typeface="Afacad Flux"/>
+                <a:sym typeface="Afacad Flux"/>
+              </a:rPr>
+              <a:t>.</a:t>
+            </a:r>
+            <a:r>
+              <a:rPr lang="en-US" altLang="ko-KR" sz="1950" dirty="0">
+                <a:solidFill>
+                  <a:srgbClr val="334155"/>
+                </a:solidFill>
+                <a:latin typeface="Afacad Flux"/>
+                <a:ea typeface="Afacad Flux"/>
+                <a:cs typeface="Afacad Flux"/>
+                <a:sym typeface="Afacad Flux"/>
+              </a:rPr>
+              <a:t> </a:t>
+            </a:r>
+            <a:r>
+              <a:rPr lang="ko-KR" altLang="en-US" sz="1950" dirty="0">
+                <a:solidFill>
+                  <a:srgbClr val="334155"/>
+                </a:solidFill>
+                <a:latin typeface="Afacad Flux"/>
+                <a:ea typeface="Afacad Flux"/>
+                <a:cs typeface="Afacad Flux"/>
+                <a:sym typeface="Afacad Flux"/>
+              </a:rPr>
+              <a:t>수업이 끝나면 </a:t>
+            </a:r>
+            <a:r>
+              <a:rPr lang="en-US" altLang="ko-KR" sz="1950" dirty="0">
+                <a:solidFill>
+                  <a:srgbClr val="334155"/>
+                </a:solidFill>
+                <a:latin typeface="Afacad Flux"/>
+                <a:ea typeface="Afacad Flux"/>
+                <a:cs typeface="Afacad Flux"/>
+                <a:sym typeface="Afacad Flux"/>
+              </a:rPr>
+              <a:t>AR</a:t>
+            </a:r>
+            <a:r>
+              <a:rPr lang="ko-KR" altLang="en-US" sz="1950" dirty="0">
+                <a:solidFill>
+                  <a:srgbClr val="334155"/>
+                </a:solidFill>
+                <a:latin typeface="Afacad Flux"/>
+                <a:ea typeface="Afacad Flux"/>
+                <a:cs typeface="Afacad Flux"/>
+                <a:sym typeface="Afacad Flux"/>
+              </a:rPr>
+              <a:t>을 직접 휴대폰으로 </a:t>
+            </a:r>
+            <a:r>
+              <a:rPr lang="ko-KR" altLang="en-US" sz="1950" dirty="0" err="1">
+                <a:solidFill>
+                  <a:srgbClr val="334155"/>
+                </a:solidFill>
+                <a:latin typeface="Afacad Flux"/>
+                <a:ea typeface="Afacad Flux"/>
+                <a:cs typeface="Afacad Flux"/>
+                <a:sym typeface="Afacad Flux"/>
+              </a:rPr>
+              <a:t>즐겨볼거에요</a:t>
+            </a:r>
+            <a:endParaRPr lang="en-US" altLang="ko-KR" sz="1950" dirty="0">
+              <a:solidFill>
+                <a:srgbClr val="334155"/>
+              </a:solidFill>
+              <a:latin typeface="Afacad Flux"/>
+              <a:ea typeface="Afacad Flux"/>
+              <a:cs typeface="Afacad Flux"/>
+              <a:sym typeface="Afacad Flux"/>
+            </a:endParaRPr>
+          </a:p>
+        </p:txBody>
+      </p:sp>
+      <p:sp>
+        <p:nvSpPr>
+          <p:cNvPr id="95" name="Google Shape;95;p14">
+            <a:extLst>
+              <a:ext uri="{FF2B5EF4-FFF2-40B4-BE49-F238E27FC236}">
+                <a16:creationId xmlns:a16="http://schemas.microsoft.com/office/drawing/2014/main" id="{4C51F3AF-170A-4EF4-DA42-F7CD211D8C2B}"/>
+              </a:ext>
+            </a:extLst>
+          </p:cNvPr>
+          <p:cNvSpPr txBox="1"/>
+          <p:nvPr/>
+        </p:nvSpPr>
+        <p:spPr>
+          <a:xfrm>
+            <a:off x="571500" y="571500"/>
+            <a:ext cx="11601450" cy="600164"/>
+          </a:xfrm>
+          <a:prstGeom prst="rect">
+            <a:avLst/>
+          </a:prstGeom>
+          <a:noFill/>
+          <a:ln>
+            <a:noFill/>
+          </a:ln>
+        </p:spPr>
+        <p:txBody>
+          <a:bodyPr spcFirstLastPara="1" wrap="square" lIns="0" tIns="0" rIns="0" bIns="0" anchor="t" anchorCtr="0">
+            <a:spAutoFit/>
+          </a:bodyPr>
+          <a:lstStyle/>
+          <a:p>
+            <a:pPr lvl="0"/>
+            <a:r>
+              <a:rPr lang="ko-KR" altLang="en-US" sz="3900" b="1" dirty="0">
+                <a:solidFill>
+                  <a:srgbClr val="1E293B"/>
+                </a:solidFill>
+                <a:latin typeface="Comfortaa"/>
+                <a:ea typeface="Comfortaa"/>
+                <a:cs typeface="Comfortaa"/>
+                <a:sym typeface="Comfortaa"/>
+              </a:rPr>
+              <a:t>정답은</a:t>
+            </a:r>
+            <a:r>
+              <a:rPr lang="en-US" altLang="ko-KR" sz="3900" b="1" dirty="0">
+                <a:solidFill>
+                  <a:srgbClr val="1E293B"/>
+                </a:solidFill>
+                <a:latin typeface="Comfortaa"/>
+                <a:ea typeface="Comfortaa"/>
+                <a:cs typeface="Comfortaa"/>
+                <a:sym typeface="Comfortaa"/>
+              </a:rPr>
+              <a:t>?</a:t>
+            </a:r>
+            <a:endParaRPr dirty="0"/>
+          </a:p>
+        </p:txBody>
+      </p:sp>
+      <p:pic>
+        <p:nvPicPr>
+          <p:cNvPr id="8" name="그림 7">
+            <a:extLst>
+              <a:ext uri="{FF2B5EF4-FFF2-40B4-BE49-F238E27FC236}">
+                <a16:creationId xmlns:a16="http://schemas.microsoft.com/office/drawing/2014/main" id="{57D9108D-9C4F-403A-464A-6EDA8E62432C}"/>
+              </a:ext>
+            </a:extLst>
+          </p:cNvPr>
+          <p:cNvPicPr>
+            <a:picLocks noChangeAspect="1"/>
+          </p:cNvPicPr>
+          <p:nvPr/>
+        </p:nvPicPr>
+        <p:blipFill>
+          <a:blip r:embed="rId4"/>
+          <a:srcRect l="6067" t="23385" r="59041" b="15291"/>
+          <a:stretch>
+            <a:fillRect/>
+          </a:stretch>
+        </p:blipFill>
+        <p:spPr>
+          <a:xfrm>
+            <a:off x="782625" y="1621358"/>
+            <a:ext cx="4163538" cy="4134399"/>
+          </a:xfrm>
+          <a:prstGeom prst="rect">
+            <a:avLst/>
+          </a:prstGeom>
+        </p:spPr>
+      </p:pic>
+    </p:spTree>
+    <p:extLst>
+      <p:ext uri="{BB962C8B-B14F-4D97-AF65-F5344CB8AC3E}">
+        <p14:creationId xmlns:p14="http://schemas.microsoft.com/office/powerpoint/2010/main" val="3837168043"/>
+      </p:ext>
+    </p:extLst>
+  </p:cSld>
+  <p:clrMapOvr>
+    <a:masterClrMapping/>
+  </p:clrMapOvr>
+</p:sld>
+</file>
+
+<file path=ppt/slides/slide14.xml><?xml version="1.0" encoding="utf-8"?>
+<p:sld xmlns:a="http://schemas.openxmlformats.org/drawingml/2006/main" xmlns:r="http://schemas.openxmlformats.org/officeDocument/2006/relationships" xmlns:p="http://schemas.openxmlformats.org/presentationml/2006/main">
+  <p:cSld>
+    <p:spTree>
+      <p:nvGrpSpPr>
+        <p:cNvPr id="1" name="Shape 121">
+          <a:extLst>
+            <a:ext uri="{FF2B5EF4-FFF2-40B4-BE49-F238E27FC236}">
+              <a16:creationId xmlns:a16="http://schemas.microsoft.com/office/drawing/2014/main" id="{7F1DF74C-359F-674C-E8A9-FDF25F0B05C9}"/>
+            </a:ext>
+          </a:extLst>
+        </p:cNvPr>
+        <p:cNvGrpSpPr/>
+        <p:nvPr/>
+      </p:nvGrpSpPr>
+      <p:grpSpPr>
+        <a:xfrm>
+          <a:off x="0" y="0"/>
+          <a:ext cx="0" cy="0"/>
+          <a:chOff x="0" y="0"/>
+          <a:chExt cx="0" cy="0"/>
+        </a:xfrm>
+      </p:grpSpPr>
+      <p:pic>
+        <p:nvPicPr>
+          <p:cNvPr id="122" name="Google Shape;122;p17" descr="image.png">
+            <a:extLst>
+              <a:ext uri="{FF2B5EF4-FFF2-40B4-BE49-F238E27FC236}">
+                <a16:creationId xmlns:a16="http://schemas.microsoft.com/office/drawing/2014/main" id="{137B7BE7-FB59-08CA-C8AF-20F3D4DF5E19}"/>
+              </a:ext>
+            </a:extLst>
+          </p:cNvPr>
+          <p:cNvPicPr preferRelativeResize="0"/>
+          <p:nvPr/>
+        </p:nvPicPr>
+        <p:blipFill rotWithShape="1">
+          <a:blip r:embed="rId3">
+            <a:alphaModFix/>
+          </a:blip>
+          <a:srcRect/>
+          <a:stretch/>
+        </p:blipFill>
+        <p:spPr>
+          <a:xfrm>
+            <a:off x="0" y="0"/>
+            <a:ext cx="12192000" cy="6858000"/>
+          </a:xfrm>
+          <a:prstGeom prst="rect">
+            <a:avLst/>
+          </a:prstGeom>
+          <a:noFill/>
+          <a:ln>
+            <a:noFill/>
+          </a:ln>
+        </p:spPr>
+      </p:pic>
+      <p:sp>
+        <p:nvSpPr>
+          <p:cNvPr id="129" name="Google Shape;129;p17">
+            <a:extLst>
+              <a:ext uri="{FF2B5EF4-FFF2-40B4-BE49-F238E27FC236}">
+                <a16:creationId xmlns:a16="http://schemas.microsoft.com/office/drawing/2014/main" id="{C7F03032-EE07-F507-8EF6-94EFC9225005}"/>
+              </a:ext>
+            </a:extLst>
+          </p:cNvPr>
+          <p:cNvSpPr txBox="1"/>
+          <p:nvPr/>
+        </p:nvSpPr>
+        <p:spPr>
+          <a:xfrm>
+            <a:off x="571500" y="571500"/>
+            <a:ext cx="11601450" cy="600164"/>
+          </a:xfrm>
+          <a:prstGeom prst="rect">
+            <a:avLst/>
+          </a:prstGeom>
+          <a:noFill/>
+          <a:ln>
+            <a:noFill/>
+          </a:ln>
+        </p:spPr>
+        <p:txBody>
+          <a:bodyPr spcFirstLastPara="1" wrap="square" lIns="0" tIns="0" rIns="0" bIns="0" anchor="t" anchorCtr="0">
+            <a:spAutoFit/>
+          </a:bodyPr>
+          <a:lstStyle/>
+          <a:p>
+            <a:pPr marL="0" marR="0" lvl="0" indent="0" algn="l" rtl="0">
+              <a:spcBef>
+                <a:spcPts val="0"/>
+              </a:spcBef>
+              <a:spcAft>
+                <a:spcPts val="0"/>
+              </a:spcAft>
+              <a:buNone/>
+            </a:pPr>
+            <a:r>
+              <a:rPr lang="ko-KR" altLang="en-US" sz="3900" b="1" dirty="0">
+                <a:solidFill>
+                  <a:srgbClr val="1E293B"/>
+                </a:solidFill>
+                <a:latin typeface="Comfortaa"/>
+                <a:ea typeface="Comfortaa"/>
+                <a:cs typeface="Comfortaa"/>
+                <a:sym typeface="Comfortaa"/>
+              </a:rPr>
+              <a:t>소프트웨어</a:t>
+            </a:r>
+            <a:endParaRPr dirty="0"/>
+          </a:p>
+        </p:txBody>
+      </p:sp>
+      <p:sp>
+        <p:nvSpPr>
+          <p:cNvPr id="2" name="Google Shape;94;p14">
+            <a:extLst>
+              <a:ext uri="{FF2B5EF4-FFF2-40B4-BE49-F238E27FC236}">
+                <a16:creationId xmlns:a16="http://schemas.microsoft.com/office/drawing/2014/main" id="{30621007-BD29-09AB-B7A6-5EC77679FAF2}"/>
+              </a:ext>
+            </a:extLst>
+          </p:cNvPr>
+          <p:cNvSpPr txBox="1"/>
+          <p:nvPr/>
+        </p:nvSpPr>
+        <p:spPr>
+          <a:xfrm>
+            <a:off x="618734" y="1743163"/>
+            <a:ext cx="9953233" cy="2239074"/>
+          </a:xfrm>
+          <a:prstGeom prst="rect">
+            <a:avLst/>
+          </a:prstGeom>
+          <a:noFill/>
+          <a:ln>
+            <a:noFill/>
+          </a:ln>
+        </p:spPr>
+        <p:txBody>
+          <a:bodyPr spcFirstLastPara="1" wrap="square" lIns="0" tIns="0" rIns="0" bIns="0" anchor="t" anchorCtr="0">
+            <a:spAutoFit/>
+          </a:bodyPr>
+          <a:lstStyle/>
+          <a:p>
+            <a:pPr lvl="0"/>
+            <a:r>
+              <a:rPr lang="ko-KR" altLang="en-US" sz="2400" dirty="0">
+                <a:solidFill>
+                  <a:srgbClr val="334155"/>
+                </a:solidFill>
+                <a:latin typeface="Afacad Flux"/>
+                <a:ea typeface="Afacad Flux"/>
+                <a:cs typeface="Afacad Flux"/>
+                <a:sym typeface="Afacad Flux"/>
+              </a:rPr>
+              <a:t>책</a:t>
+            </a:r>
+            <a:r>
+              <a:rPr lang="en-US" altLang="ko-KR" sz="1950" dirty="0">
+                <a:solidFill>
+                  <a:srgbClr val="334155"/>
+                </a:solidFill>
+                <a:latin typeface="Afacad Flux"/>
+                <a:ea typeface="Afacad Flux"/>
+                <a:cs typeface="Afacad Flux"/>
+                <a:sym typeface="Afacad Flux"/>
+              </a:rPr>
+              <a:t> </a:t>
+            </a:r>
+          </a:p>
+          <a:p>
+            <a:pPr lvl="0"/>
+            <a:r>
+              <a:rPr lang="en-US" altLang="ko-KR" sz="1950" dirty="0">
+                <a:solidFill>
+                  <a:srgbClr val="334155"/>
+                </a:solidFill>
+                <a:latin typeface="Afacad Flux"/>
+                <a:ea typeface="Afacad Flux"/>
+                <a:cs typeface="Afacad Flux"/>
+                <a:sym typeface="Afacad Flux"/>
+              </a:rPr>
+              <a:t>'</a:t>
+            </a:r>
+            <a:r>
+              <a:rPr lang="ko-KR" altLang="en-US" sz="1950" dirty="0">
+                <a:solidFill>
+                  <a:srgbClr val="334155"/>
+                </a:solidFill>
+                <a:latin typeface="Afacad Flux"/>
+                <a:ea typeface="Afacad Flux"/>
+                <a:cs typeface="Afacad Flux"/>
+                <a:sym typeface="Afacad Flux"/>
+              </a:rPr>
+              <a:t>부드러운</a:t>
+            </a:r>
+            <a:r>
+              <a:rPr lang="en-US" altLang="ko-KR" sz="1950" dirty="0">
+                <a:solidFill>
+                  <a:srgbClr val="334155"/>
+                </a:solidFill>
+                <a:latin typeface="Afacad Flux"/>
+                <a:ea typeface="Afacad Flux"/>
+                <a:cs typeface="Afacad Flux"/>
+                <a:sym typeface="Afacad Flux"/>
+              </a:rPr>
+              <a:t>'</a:t>
+            </a:r>
+            <a:r>
+              <a:rPr lang="ko-KR" altLang="en-US" sz="1950" dirty="0">
+                <a:solidFill>
+                  <a:srgbClr val="334155"/>
+                </a:solidFill>
+                <a:latin typeface="Afacad Flux"/>
+                <a:ea typeface="Afacad Flux"/>
+                <a:cs typeface="Afacad Flux"/>
+                <a:sym typeface="Afacad Flux"/>
+              </a:rPr>
+              <a:t>이라는 뜻의 소프트</a:t>
+            </a:r>
+            <a:r>
+              <a:rPr lang="en-US" altLang="ko-KR" sz="1950" dirty="0">
+                <a:solidFill>
+                  <a:srgbClr val="334155"/>
+                </a:solidFill>
+                <a:latin typeface="Afacad Flux"/>
+                <a:ea typeface="Afacad Flux"/>
+                <a:cs typeface="Afacad Flux"/>
+                <a:sym typeface="Afacad Flux"/>
+              </a:rPr>
+              <a:t>(Soft)</a:t>
+            </a:r>
+            <a:r>
+              <a:rPr lang="ko-KR" altLang="en-US" sz="1950" dirty="0">
+                <a:solidFill>
+                  <a:srgbClr val="334155"/>
+                </a:solidFill>
+                <a:latin typeface="Afacad Flux"/>
+                <a:ea typeface="Afacad Flux"/>
+                <a:cs typeface="Afacad Flux"/>
+                <a:sym typeface="Afacad Flux"/>
+              </a:rPr>
+              <a:t>와 </a:t>
+            </a:r>
+            <a:r>
+              <a:rPr lang="en-US" altLang="ko-KR" sz="1950" dirty="0">
+                <a:solidFill>
+                  <a:srgbClr val="334155"/>
+                </a:solidFill>
+                <a:latin typeface="Afacad Flux"/>
+                <a:ea typeface="Afacad Flux"/>
+                <a:cs typeface="Afacad Flux"/>
+                <a:sym typeface="Afacad Flux"/>
+              </a:rPr>
+              <a:t>'</a:t>
+            </a:r>
+            <a:r>
+              <a:rPr lang="ko-KR" altLang="en-US" sz="1950" dirty="0">
+                <a:solidFill>
+                  <a:srgbClr val="334155"/>
+                </a:solidFill>
+                <a:latin typeface="Afacad Flux"/>
+                <a:ea typeface="Afacad Flux"/>
+                <a:cs typeface="Afacad Flux"/>
+                <a:sym typeface="Afacad Flux"/>
+              </a:rPr>
+              <a:t>제품</a:t>
+            </a:r>
+            <a:r>
+              <a:rPr lang="en-US" altLang="ko-KR" sz="1950" dirty="0">
+                <a:solidFill>
+                  <a:srgbClr val="334155"/>
+                </a:solidFill>
+                <a:latin typeface="Afacad Flux"/>
+                <a:ea typeface="Afacad Flux"/>
+                <a:cs typeface="Afacad Flux"/>
+                <a:sym typeface="Afacad Flux"/>
+              </a:rPr>
+              <a:t>'</a:t>
+            </a:r>
+            <a:r>
+              <a:rPr lang="ko-KR" altLang="en-US" sz="1950" dirty="0">
+                <a:solidFill>
+                  <a:srgbClr val="334155"/>
+                </a:solidFill>
+                <a:latin typeface="Afacad Flux"/>
+                <a:ea typeface="Afacad Flux"/>
+                <a:cs typeface="Afacad Flux"/>
+                <a:sym typeface="Afacad Flux"/>
+              </a:rPr>
+              <a:t>이라는 뜻의 </a:t>
+            </a:r>
+            <a:r>
+              <a:rPr lang="ko-KR" altLang="en-US" sz="1950" dirty="0" err="1">
+                <a:solidFill>
+                  <a:srgbClr val="334155"/>
+                </a:solidFill>
+                <a:latin typeface="Afacad Flux"/>
+                <a:ea typeface="Afacad Flux"/>
+                <a:cs typeface="Afacad Flux"/>
+                <a:sym typeface="Afacad Flux"/>
+              </a:rPr>
+              <a:t>웨어</a:t>
+            </a:r>
+            <a:r>
+              <a:rPr lang="en-US" altLang="ko-KR" sz="1950" dirty="0">
+                <a:solidFill>
+                  <a:srgbClr val="334155"/>
+                </a:solidFill>
+                <a:latin typeface="Afacad Flux"/>
+                <a:ea typeface="Afacad Flux"/>
+                <a:cs typeface="Afacad Flux"/>
+                <a:sym typeface="Afacad Flux"/>
+              </a:rPr>
+              <a:t>(Ware)</a:t>
+            </a:r>
+            <a:r>
+              <a:rPr lang="ko-KR" altLang="en-US" sz="1950" dirty="0">
+                <a:solidFill>
+                  <a:srgbClr val="334155"/>
+                </a:solidFill>
+                <a:latin typeface="Afacad Flux"/>
+                <a:ea typeface="Afacad Flux"/>
+                <a:cs typeface="Afacad Flux"/>
+                <a:sym typeface="Afacad Flux"/>
+              </a:rPr>
+              <a:t>의 두 단어가 복합되어 이루어진 단어로 시스템 소프트웨어와 응용 소프트웨어로 구분됩니다</a:t>
+            </a:r>
+            <a:r>
+              <a:rPr lang="en-US" altLang="ko-KR" sz="1950" dirty="0">
+                <a:solidFill>
+                  <a:srgbClr val="334155"/>
+                </a:solidFill>
+                <a:latin typeface="Afacad Flux"/>
+                <a:ea typeface="Afacad Flux"/>
+                <a:cs typeface="Afacad Flux"/>
+                <a:sym typeface="Afacad Flux"/>
+              </a:rPr>
+              <a:t>.</a:t>
+            </a:r>
+          </a:p>
+          <a:p>
+            <a:pPr lvl="0"/>
+            <a:endParaRPr lang="en-US" altLang="ko-KR" sz="1950" dirty="0">
+              <a:solidFill>
+                <a:srgbClr val="334155"/>
+              </a:solidFill>
+              <a:latin typeface="Afacad Flux"/>
+              <a:ea typeface="Afacad Flux"/>
+              <a:cs typeface="Afacad Flux"/>
+              <a:sym typeface="Afacad Flux"/>
+            </a:endParaRPr>
+          </a:p>
+          <a:p>
+            <a:pPr lvl="0"/>
+            <a:r>
+              <a:rPr lang="ko-KR" altLang="en-US" sz="2400" dirty="0">
+                <a:solidFill>
+                  <a:srgbClr val="334155"/>
+                </a:solidFill>
+                <a:latin typeface="Afacad Flux"/>
+                <a:ea typeface="Afacad Flux"/>
+                <a:cs typeface="Afacad Flux"/>
+                <a:sym typeface="Afacad Flux"/>
+              </a:rPr>
+              <a:t>쉽게 표현하기</a:t>
+            </a:r>
+            <a:endParaRPr lang="en-US" altLang="ko-KR" sz="2400" dirty="0">
+              <a:solidFill>
+                <a:srgbClr val="334155"/>
+              </a:solidFill>
+              <a:latin typeface="Afacad Flux"/>
+              <a:ea typeface="Afacad Flux"/>
+              <a:cs typeface="Afacad Flux"/>
+              <a:sym typeface="Afacad Flux"/>
+            </a:endParaRPr>
+          </a:p>
+          <a:p>
+            <a:r>
+              <a:rPr lang="ko-KR" altLang="en-US" sz="1950" dirty="0">
+                <a:solidFill>
+                  <a:srgbClr val="334155"/>
+                </a:solidFill>
+                <a:latin typeface="Afacad Flux"/>
+                <a:ea typeface="Afacad Flux"/>
+                <a:cs typeface="Afacad Flux"/>
+                <a:sym typeface="Afacad Flux"/>
+              </a:rPr>
+              <a:t>소프트웨어는 프로그램이나 </a:t>
+            </a:r>
+            <a:r>
+              <a:rPr lang="en-US" altLang="ko-KR" sz="1950" dirty="0">
+                <a:solidFill>
+                  <a:srgbClr val="334155"/>
+                </a:solidFill>
+                <a:latin typeface="Afacad Flux"/>
+                <a:ea typeface="Afacad Flux"/>
+                <a:cs typeface="Afacad Flux"/>
+                <a:sym typeface="Afacad Flux"/>
+              </a:rPr>
+              <a:t>OS(</a:t>
+            </a:r>
+            <a:r>
+              <a:rPr lang="ko-KR" altLang="en-US" sz="1950" dirty="0">
+                <a:solidFill>
+                  <a:srgbClr val="334155"/>
+                </a:solidFill>
+                <a:latin typeface="Afacad Flux"/>
+                <a:ea typeface="Afacad Flux"/>
+                <a:cs typeface="Afacad Flux"/>
+                <a:sym typeface="Afacad Flux"/>
+              </a:rPr>
+              <a:t>운영체제</a:t>
+            </a:r>
+            <a:r>
+              <a:rPr lang="en-US" altLang="ko-KR" sz="1950" dirty="0">
+                <a:solidFill>
+                  <a:srgbClr val="334155"/>
+                </a:solidFill>
+                <a:latin typeface="Afacad Flux"/>
+                <a:ea typeface="Afacad Flux"/>
+                <a:cs typeface="Afacad Flux"/>
+                <a:sym typeface="Afacad Flux"/>
+              </a:rPr>
+              <a:t>)</a:t>
+            </a:r>
+            <a:r>
+              <a:rPr lang="ko-KR" altLang="en-US" sz="1950" dirty="0">
+                <a:solidFill>
+                  <a:srgbClr val="334155"/>
+                </a:solidFill>
+                <a:latin typeface="Afacad Flux"/>
+                <a:ea typeface="Afacad Flux"/>
+                <a:cs typeface="Afacad Flux"/>
+                <a:sym typeface="Afacad Flux"/>
+              </a:rPr>
+              <a:t>처럼 눈에 보이지 않고 만질 수도 없지만</a:t>
+            </a:r>
+            <a:r>
+              <a:rPr lang="en-US" altLang="ko-KR" sz="1950" dirty="0">
+                <a:solidFill>
+                  <a:srgbClr val="334155"/>
+                </a:solidFill>
+                <a:latin typeface="Afacad Flux"/>
+                <a:ea typeface="Afacad Flux"/>
+                <a:cs typeface="Afacad Flux"/>
+                <a:sym typeface="Afacad Flux"/>
+              </a:rPr>
+              <a:t>, </a:t>
+            </a:r>
+            <a:r>
+              <a:rPr lang="ko-KR" altLang="en-US" sz="1950" dirty="0">
+                <a:solidFill>
+                  <a:srgbClr val="334155"/>
+                </a:solidFill>
+                <a:latin typeface="Afacad Flux"/>
+                <a:ea typeface="Afacad Flux"/>
+                <a:cs typeface="Afacad Flux"/>
+                <a:sym typeface="Afacad Flux"/>
+              </a:rPr>
+              <a:t>컴퓨터가 무엇을 해야 할지 알려주는 똑똑한 생각과 같아요</a:t>
+            </a:r>
+            <a:r>
+              <a:rPr lang="en-US" altLang="ko-KR" sz="1950" dirty="0">
+                <a:solidFill>
+                  <a:srgbClr val="334155"/>
+                </a:solidFill>
+                <a:latin typeface="Afacad Flux"/>
+                <a:ea typeface="Afacad Flux"/>
+                <a:cs typeface="Afacad Flux"/>
+                <a:sym typeface="Afacad Flux"/>
+              </a:rPr>
+              <a:t>. </a:t>
+            </a:r>
+          </a:p>
+        </p:txBody>
+      </p:sp>
+    </p:spTree>
+    <p:extLst>
+      <p:ext uri="{BB962C8B-B14F-4D97-AF65-F5344CB8AC3E}">
+        <p14:creationId xmlns:p14="http://schemas.microsoft.com/office/powerpoint/2010/main" val="4102721569"/>
+      </p:ext>
+    </p:extLst>
+  </p:cSld>
+  <p:clrMapOvr>
+    <a:masterClrMapping/>
+  </p:clrMapOvr>
+</p:sld>
+</file>
+
+<file path=ppt/slides/slide15.xml><?xml version="1.0" encoding="utf-8"?>
+<p:sld xmlns:a="http://schemas.openxmlformats.org/drawingml/2006/main" xmlns:r="http://schemas.openxmlformats.org/officeDocument/2006/relationships" xmlns:p="http://schemas.openxmlformats.org/presentationml/2006/main">
+  <p:cSld>
+    <p:spTree>
+      <p:nvGrpSpPr>
+        <p:cNvPr id="1" name="Shape 90">
+          <a:extLst>
+            <a:ext uri="{FF2B5EF4-FFF2-40B4-BE49-F238E27FC236}">
+              <a16:creationId xmlns:a16="http://schemas.microsoft.com/office/drawing/2014/main" id="{325B24B3-6F50-C7B6-846B-2C03079F7631}"/>
+            </a:ext>
+          </a:extLst>
+        </p:cNvPr>
+        <p:cNvGrpSpPr/>
+        <p:nvPr/>
+      </p:nvGrpSpPr>
+      <p:grpSpPr>
+        <a:xfrm>
+          <a:off x="0" y="0"/>
+          <a:ext cx="0" cy="0"/>
+          <a:chOff x="0" y="0"/>
+          <a:chExt cx="0" cy="0"/>
+        </a:xfrm>
+      </p:grpSpPr>
+      <p:pic>
+        <p:nvPicPr>
+          <p:cNvPr id="91" name="Google Shape;91;p14" descr="image.png">
+            <a:extLst>
+              <a:ext uri="{FF2B5EF4-FFF2-40B4-BE49-F238E27FC236}">
+                <a16:creationId xmlns:a16="http://schemas.microsoft.com/office/drawing/2014/main" id="{EC84F384-C365-A7D6-8CED-A90AE9D63536}"/>
+              </a:ext>
+            </a:extLst>
+          </p:cNvPr>
+          <p:cNvPicPr preferRelativeResize="0"/>
+          <p:nvPr/>
+        </p:nvPicPr>
+        <p:blipFill rotWithShape="1">
+          <a:blip r:embed="rId3">
+            <a:alphaModFix/>
+          </a:blip>
+          <a:srcRect/>
+          <a:stretch/>
+        </p:blipFill>
+        <p:spPr>
+          <a:xfrm>
+            <a:off x="0" y="-4763"/>
+            <a:ext cx="12192000" cy="6858000"/>
+          </a:xfrm>
+          <a:prstGeom prst="rect">
+            <a:avLst/>
+          </a:prstGeom>
+          <a:noFill/>
+          <a:ln>
+            <a:noFill/>
+          </a:ln>
+        </p:spPr>
+      </p:pic>
+      <p:sp>
+        <p:nvSpPr>
+          <p:cNvPr id="94" name="Google Shape;94;p14">
+            <a:extLst>
+              <a:ext uri="{FF2B5EF4-FFF2-40B4-BE49-F238E27FC236}">
+                <a16:creationId xmlns:a16="http://schemas.microsoft.com/office/drawing/2014/main" id="{956B0DD3-DDDF-3D7C-B41E-CA96A14F2ADC}"/>
+              </a:ext>
+            </a:extLst>
+          </p:cNvPr>
+          <p:cNvSpPr txBox="1"/>
+          <p:nvPr/>
+        </p:nvSpPr>
+        <p:spPr>
+          <a:xfrm>
+            <a:off x="4333645" y="2855546"/>
+            <a:ext cx="7681872" cy="1846659"/>
+          </a:xfrm>
+          <a:prstGeom prst="rect">
+            <a:avLst/>
+          </a:prstGeom>
+          <a:noFill/>
+          <a:ln>
+            <a:noFill/>
+          </a:ln>
+        </p:spPr>
+        <p:txBody>
+          <a:bodyPr spcFirstLastPara="1" wrap="square" lIns="0" tIns="0" rIns="0" bIns="0" anchor="t" anchorCtr="0">
+            <a:spAutoFit/>
+          </a:bodyPr>
+          <a:lstStyle/>
+          <a:p>
+            <a:pPr lvl="0"/>
+            <a:r>
+              <a:rPr lang="ko-KR" altLang="en-US" sz="2400" dirty="0">
+                <a:solidFill>
+                  <a:srgbClr val="334155"/>
+                </a:solidFill>
+                <a:latin typeface="Afacad Flux"/>
+                <a:ea typeface="Afacad Flux"/>
+                <a:cs typeface="Afacad Flux"/>
+                <a:sym typeface="Afacad Flux"/>
+              </a:rPr>
+              <a:t>사용자가 컴퓨터 하드웨어 및 각종 장치 정보를 효율적으로 사용할 수 있게 도와주는 소프트웨어를 말하며 대표적으로 운영체제가 있습니다</a:t>
+            </a:r>
+            <a:r>
+              <a:rPr lang="en-US" altLang="ko-KR" sz="2400" dirty="0">
+                <a:solidFill>
+                  <a:srgbClr val="334155"/>
+                </a:solidFill>
+                <a:latin typeface="Afacad Flux"/>
+                <a:ea typeface="Afacad Flux"/>
+                <a:cs typeface="Afacad Flux"/>
+                <a:sym typeface="Afacad Flux"/>
+              </a:rPr>
+              <a:t>.</a:t>
+            </a:r>
+            <a:r>
+              <a:rPr lang="ko-KR" altLang="en-US" sz="2400" dirty="0">
+                <a:solidFill>
+                  <a:srgbClr val="334155"/>
+                </a:solidFill>
+                <a:latin typeface="Afacad Flux"/>
+                <a:ea typeface="Afacad Flux"/>
+                <a:cs typeface="Afacad Flux"/>
+                <a:sym typeface="Afacad Flux"/>
+              </a:rPr>
+              <a:t> </a:t>
+            </a:r>
+            <a:endParaRPr lang="en-US" altLang="ko-KR" sz="2400" dirty="0">
+              <a:solidFill>
+                <a:srgbClr val="334155"/>
+              </a:solidFill>
+              <a:latin typeface="Afacad Flux"/>
+              <a:ea typeface="Afacad Flux"/>
+              <a:cs typeface="Afacad Flux"/>
+              <a:sym typeface="Afacad Flux"/>
+            </a:endParaRPr>
+          </a:p>
+          <a:p>
+            <a:pPr lvl="0"/>
+            <a:r>
+              <a:rPr lang="en-US" altLang="ko-KR" sz="2400" dirty="0">
+                <a:solidFill>
+                  <a:srgbClr val="334155"/>
+                </a:solidFill>
+                <a:latin typeface="Afacad Flux"/>
+                <a:ea typeface="Afacad Flux"/>
+                <a:cs typeface="Afacad Flux"/>
+                <a:sym typeface="Afacad Flux"/>
+              </a:rPr>
+              <a:t>ex) </a:t>
+            </a:r>
+            <a:r>
+              <a:rPr lang="ko-KR" altLang="en-US" sz="2400" dirty="0">
+                <a:solidFill>
+                  <a:srgbClr val="334155"/>
+                </a:solidFill>
+                <a:latin typeface="Afacad Flux"/>
+                <a:ea typeface="Afacad Flux"/>
+                <a:cs typeface="Afacad Flux"/>
+                <a:sym typeface="Afacad Flux"/>
+              </a:rPr>
+              <a:t>윈도우</a:t>
+            </a:r>
+            <a:r>
+              <a:rPr lang="en-US" altLang="ko-KR" sz="2400" dirty="0">
+                <a:solidFill>
+                  <a:srgbClr val="334155"/>
+                </a:solidFill>
+                <a:latin typeface="Afacad Flux"/>
+                <a:ea typeface="Afacad Flux"/>
+                <a:cs typeface="Afacad Flux"/>
+                <a:sym typeface="Afacad Flux"/>
+              </a:rPr>
+              <a:t>, </a:t>
+            </a:r>
+            <a:r>
+              <a:rPr lang="ko-KR" altLang="en-US" sz="2400" dirty="0">
+                <a:solidFill>
+                  <a:srgbClr val="334155"/>
+                </a:solidFill>
+                <a:latin typeface="Afacad Flux"/>
+                <a:ea typeface="Afacad Flux"/>
+                <a:cs typeface="Afacad Flux"/>
+                <a:sym typeface="Afacad Flux"/>
+              </a:rPr>
+              <a:t>안드로이드</a:t>
+            </a:r>
+            <a:r>
+              <a:rPr lang="en-US" altLang="ko-KR" sz="2400" dirty="0">
+                <a:solidFill>
+                  <a:srgbClr val="334155"/>
+                </a:solidFill>
+                <a:latin typeface="Afacad Flux"/>
+                <a:ea typeface="Afacad Flux"/>
+                <a:cs typeface="Afacad Flux"/>
+                <a:sym typeface="Afacad Flux"/>
+              </a:rPr>
+              <a:t>, iOS, </a:t>
+            </a:r>
+            <a:r>
+              <a:rPr lang="ko-KR" altLang="en-US" sz="2400" dirty="0">
+                <a:solidFill>
+                  <a:srgbClr val="334155"/>
+                </a:solidFill>
+                <a:latin typeface="Afacad Flux"/>
+                <a:ea typeface="Afacad Flux"/>
+                <a:cs typeface="Afacad Flux"/>
+                <a:sym typeface="Afacad Flux"/>
+              </a:rPr>
+              <a:t>리눅스</a:t>
+            </a:r>
+            <a:r>
+              <a:rPr lang="en-US" altLang="ko-KR" sz="2400" dirty="0">
+                <a:solidFill>
+                  <a:srgbClr val="334155"/>
+                </a:solidFill>
+                <a:latin typeface="Afacad Flux"/>
+                <a:ea typeface="Afacad Flux"/>
+                <a:cs typeface="Afacad Flux"/>
+                <a:sym typeface="Afacad Flux"/>
+              </a:rPr>
+              <a:t> </a:t>
+            </a:r>
+            <a:r>
+              <a:rPr lang="ko-KR" altLang="en-US" sz="2400" dirty="0">
+                <a:solidFill>
+                  <a:srgbClr val="334155"/>
+                </a:solidFill>
+                <a:latin typeface="Afacad Flux"/>
+                <a:ea typeface="Afacad Flux"/>
+                <a:cs typeface="Afacad Flux"/>
+                <a:sym typeface="Afacad Flux"/>
+              </a:rPr>
+              <a:t>등</a:t>
+            </a:r>
+            <a:endParaRPr lang="en-US" altLang="ko-KR" sz="2400" dirty="0">
+              <a:solidFill>
+                <a:srgbClr val="334155"/>
+              </a:solidFill>
+              <a:latin typeface="Afacad Flux"/>
+              <a:ea typeface="Afacad Flux"/>
+              <a:cs typeface="Afacad Flux"/>
+              <a:sym typeface="Afacad Flux"/>
+            </a:endParaRPr>
+          </a:p>
+          <a:p>
+            <a:pPr lvl="0"/>
+            <a:endParaRPr lang="en-US" altLang="ko-KR" sz="2400" dirty="0">
+              <a:solidFill>
+                <a:srgbClr val="334155"/>
+              </a:solidFill>
+              <a:latin typeface="Afacad Flux"/>
+              <a:ea typeface="Afacad Flux"/>
+              <a:cs typeface="Afacad Flux"/>
+              <a:sym typeface="Afacad Flux"/>
+            </a:endParaRPr>
+          </a:p>
+        </p:txBody>
+      </p:sp>
+      <p:sp>
+        <p:nvSpPr>
+          <p:cNvPr id="95" name="Google Shape;95;p14">
+            <a:extLst>
+              <a:ext uri="{FF2B5EF4-FFF2-40B4-BE49-F238E27FC236}">
+                <a16:creationId xmlns:a16="http://schemas.microsoft.com/office/drawing/2014/main" id="{3980B15D-FF59-FF04-1A89-E772D3C69F08}"/>
+              </a:ext>
+            </a:extLst>
+          </p:cNvPr>
+          <p:cNvSpPr txBox="1"/>
+          <p:nvPr/>
+        </p:nvSpPr>
+        <p:spPr>
+          <a:xfrm>
+            <a:off x="571500" y="571500"/>
+            <a:ext cx="11601450" cy="600164"/>
+          </a:xfrm>
+          <a:prstGeom prst="rect">
+            <a:avLst/>
+          </a:prstGeom>
+          <a:noFill/>
+          <a:ln>
+            <a:noFill/>
+          </a:ln>
+        </p:spPr>
+        <p:txBody>
+          <a:bodyPr spcFirstLastPara="1" wrap="square" lIns="0" tIns="0" rIns="0" bIns="0" anchor="t" anchorCtr="0">
+            <a:spAutoFit/>
+          </a:bodyPr>
+          <a:lstStyle/>
+          <a:p>
+            <a:pPr lvl="0"/>
+            <a:r>
+              <a:rPr lang="ko-KR" altLang="en-US" sz="3900" b="1" dirty="0">
+                <a:solidFill>
+                  <a:srgbClr val="1E293B"/>
+                </a:solidFill>
+                <a:latin typeface="Comfortaa"/>
+                <a:ea typeface="Comfortaa"/>
+                <a:cs typeface="Comfortaa"/>
+                <a:sym typeface="Comfortaa"/>
+              </a:rPr>
+              <a:t>시스템 소프트웨어란</a:t>
+            </a:r>
+            <a:r>
+              <a:rPr lang="en-US" altLang="ko-KR" sz="3900" b="1" dirty="0">
+                <a:solidFill>
+                  <a:srgbClr val="1E293B"/>
+                </a:solidFill>
+                <a:latin typeface="Comfortaa"/>
+                <a:ea typeface="Comfortaa"/>
+                <a:cs typeface="Comfortaa"/>
+                <a:sym typeface="Comfortaa"/>
+              </a:rPr>
+              <a:t>?</a:t>
+            </a:r>
+            <a:endParaRPr dirty="0"/>
+          </a:p>
+        </p:txBody>
+      </p:sp>
+      <p:pic>
+        <p:nvPicPr>
+          <p:cNvPr id="2" name="그림 1">
+            <a:extLst>
+              <a:ext uri="{FF2B5EF4-FFF2-40B4-BE49-F238E27FC236}">
+                <a16:creationId xmlns:a16="http://schemas.microsoft.com/office/drawing/2014/main" id="{1E172868-C2C8-2205-CD73-F812CE4EC9A7}"/>
+              </a:ext>
+            </a:extLst>
+          </p:cNvPr>
+          <p:cNvPicPr>
+            <a:picLocks noChangeAspect="1"/>
+          </p:cNvPicPr>
+          <p:nvPr/>
+        </p:nvPicPr>
+        <p:blipFill>
+          <a:blip r:embed="rId4"/>
+          <a:srcRect t="-191" b="-610"/>
+          <a:stretch>
+            <a:fillRect/>
+          </a:stretch>
+        </p:blipFill>
+        <p:spPr>
+          <a:xfrm>
+            <a:off x="858416" y="1402604"/>
+            <a:ext cx="2238204" cy="4043265"/>
+          </a:xfrm>
+          <a:prstGeom prst="rect">
+            <a:avLst/>
+          </a:prstGeom>
+        </p:spPr>
+      </p:pic>
+    </p:spTree>
+    <p:extLst>
+      <p:ext uri="{BB962C8B-B14F-4D97-AF65-F5344CB8AC3E}">
+        <p14:creationId xmlns:p14="http://schemas.microsoft.com/office/powerpoint/2010/main" val="2617180754"/>
+      </p:ext>
+    </p:extLst>
+  </p:cSld>
+  <p:clrMapOvr>
+    <a:masterClrMapping/>
+  </p:clrMapOvr>
+</p:sld>
+</file>
+
+<file path=ppt/slides/slide16.xml><?xml version="1.0" encoding="utf-8"?>
+<p:sld xmlns:a="http://schemas.openxmlformats.org/drawingml/2006/main" xmlns:r="http://schemas.openxmlformats.org/officeDocument/2006/relationships" xmlns:p="http://schemas.openxmlformats.org/presentationml/2006/main">
+  <p:cSld>
+    <p:spTree>
+      <p:nvGrpSpPr>
+        <p:cNvPr id="1" name="Shape 90">
+          <a:extLst>
+            <a:ext uri="{FF2B5EF4-FFF2-40B4-BE49-F238E27FC236}">
+              <a16:creationId xmlns:a16="http://schemas.microsoft.com/office/drawing/2014/main" id="{288A616C-7E10-4141-7887-71ECDE16A446}"/>
+            </a:ext>
+          </a:extLst>
+        </p:cNvPr>
+        <p:cNvGrpSpPr/>
+        <p:nvPr/>
+      </p:nvGrpSpPr>
+      <p:grpSpPr>
+        <a:xfrm>
+          <a:off x="0" y="0"/>
+          <a:ext cx="0" cy="0"/>
+          <a:chOff x="0" y="0"/>
+          <a:chExt cx="0" cy="0"/>
+        </a:xfrm>
+      </p:grpSpPr>
+      <p:pic>
+        <p:nvPicPr>
+          <p:cNvPr id="91" name="Google Shape;91;p14" descr="image.png">
+            <a:extLst>
+              <a:ext uri="{FF2B5EF4-FFF2-40B4-BE49-F238E27FC236}">
+                <a16:creationId xmlns:a16="http://schemas.microsoft.com/office/drawing/2014/main" id="{1C5A3D77-1B42-5EB5-0E50-C44F1D190F0C}"/>
+              </a:ext>
+            </a:extLst>
+          </p:cNvPr>
+          <p:cNvPicPr preferRelativeResize="0"/>
+          <p:nvPr/>
+        </p:nvPicPr>
+        <p:blipFill rotWithShape="1">
+          <a:blip r:embed="rId3">
+            <a:alphaModFix/>
+          </a:blip>
+          <a:srcRect/>
+          <a:stretch/>
+        </p:blipFill>
+        <p:spPr>
+          <a:xfrm>
+            <a:off x="0" y="-4763"/>
+            <a:ext cx="12192000" cy="6858000"/>
+          </a:xfrm>
+          <a:prstGeom prst="rect">
+            <a:avLst/>
+          </a:prstGeom>
+          <a:noFill/>
+          <a:ln>
+            <a:noFill/>
+          </a:ln>
+        </p:spPr>
+      </p:pic>
+      <p:sp>
+        <p:nvSpPr>
+          <p:cNvPr id="94" name="Google Shape;94;p14">
+            <a:extLst>
+              <a:ext uri="{FF2B5EF4-FFF2-40B4-BE49-F238E27FC236}">
+                <a16:creationId xmlns:a16="http://schemas.microsoft.com/office/drawing/2014/main" id="{D1E94045-E7CE-9356-BB9D-65DB3B5B28FD}"/>
+              </a:ext>
+            </a:extLst>
+          </p:cNvPr>
+          <p:cNvSpPr txBox="1"/>
+          <p:nvPr/>
+        </p:nvSpPr>
+        <p:spPr>
+          <a:xfrm>
+            <a:off x="4333645" y="2855546"/>
+            <a:ext cx="7681872" cy="1477328"/>
+          </a:xfrm>
+          <a:prstGeom prst="rect">
+            <a:avLst/>
+          </a:prstGeom>
+          <a:noFill/>
+          <a:ln>
+            <a:noFill/>
+          </a:ln>
+        </p:spPr>
+        <p:txBody>
+          <a:bodyPr spcFirstLastPara="1" wrap="square" lIns="0" tIns="0" rIns="0" bIns="0" anchor="t" anchorCtr="0">
+            <a:spAutoFit/>
+          </a:bodyPr>
+          <a:lstStyle/>
+          <a:p>
+            <a:pPr lvl="0"/>
+            <a:r>
+              <a:rPr lang="ko-KR" altLang="en-US" sz="2400" dirty="0">
+                <a:solidFill>
+                  <a:srgbClr val="334155"/>
+                </a:solidFill>
+                <a:latin typeface="Afacad Flux"/>
+                <a:ea typeface="Afacad Flux"/>
+                <a:cs typeface="Afacad Flux"/>
+                <a:sym typeface="Afacad Flux"/>
+              </a:rPr>
+              <a:t>사용자가 컴퓨터를 사용하여 어떠한 일을 하려고 할 때 사용되는 모든 프로그램을 말합니다</a:t>
+            </a:r>
+            <a:r>
+              <a:rPr lang="en-US" altLang="ko-KR" sz="2400" dirty="0">
+                <a:solidFill>
+                  <a:srgbClr val="334155"/>
+                </a:solidFill>
+                <a:latin typeface="Afacad Flux"/>
+                <a:ea typeface="Afacad Flux"/>
+                <a:cs typeface="Afacad Flux"/>
+                <a:sym typeface="Afacad Flux"/>
+              </a:rPr>
+              <a:t>. </a:t>
+            </a:r>
+            <a:r>
+              <a:rPr lang="ko-KR" altLang="en-US" sz="2400" dirty="0">
+                <a:solidFill>
+                  <a:srgbClr val="334155"/>
+                </a:solidFill>
+                <a:latin typeface="Afacad Flux"/>
+                <a:ea typeface="Afacad Flux"/>
+                <a:cs typeface="Afacad Flux"/>
+                <a:sym typeface="Afacad Flux"/>
+              </a:rPr>
+              <a:t>게임</a:t>
+            </a:r>
+            <a:r>
+              <a:rPr lang="en-US" altLang="ko-KR" sz="2400" dirty="0">
+                <a:solidFill>
+                  <a:srgbClr val="334155"/>
+                </a:solidFill>
+                <a:latin typeface="Afacad Flux"/>
+                <a:ea typeface="Afacad Flux"/>
+                <a:cs typeface="Afacad Flux"/>
+                <a:sym typeface="Afacad Flux"/>
+              </a:rPr>
+              <a:t>, </a:t>
+            </a:r>
+            <a:r>
+              <a:rPr lang="ko-KR" altLang="en-US" sz="2400" dirty="0">
+                <a:solidFill>
+                  <a:srgbClr val="334155"/>
+                </a:solidFill>
+                <a:latin typeface="Afacad Flux"/>
+                <a:ea typeface="Afacad Flux"/>
+                <a:cs typeface="Afacad Flux"/>
+                <a:sym typeface="Afacad Flux"/>
+              </a:rPr>
+              <a:t>그래픽 메신저</a:t>
+            </a:r>
+            <a:r>
+              <a:rPr lang="en-US" altLang="ko-KR" sz="2400" dirty="0">
+                <a:solidFill>
+                  <a:srgbClr val="334155"/>
+                </a:solidFill>
+                <a:latin typeface="Afacad Flux"/>
+                <a:ea typeface="Afacad Flux"/>
+                <a:cs typeface="Afacad Flux"/>
+                <a:sym typeface="Afacad Flux"/>
+              </a:rPr>
+              <a:t>, </a:t>
+            </a:r>
+            <a:r>
+              <a:rPr lang="ko-KR" altLang="en-US" sz="2400" dirty="0">
+                <a:solidFill>
+                  <a:srgbClr val="334155"/>
+                </a:solidFill>
+                <a:latin typeface="Afacad Flux"/>
+                <a:ea typeface="Afacad Flux"/>
+                <a:cs typeface="Afacad Flux"/>
+                <a:sym typeface="Afacad Flux"/>
+              </a:rPr>
+              <a:t>파워포인트</a:t>
+            </a:r>
+            <a:r>
+              <a:rPr lang="en-US" altLang="ko-KR" sz="2400" dirty="0">
+                <a:solidFill>
+                  <a:srgbClr val="334155"/>
+                </a:solidFill>
+                <a:latin typeface="Afacad Flux"/>
+                <a:ea typeface="Afacad Flux"/>
+                <a:cs typeface="Afacad Flux"/>
+                <a:sym typeface="Afacad Flux"/>
+              </a:rPr>
+              <a:t>, </a:t>
+            </a:r>
+            <a:r>
+              <a:rPr lang="ko-KR" altLang="en-US" sz="2400" dirty="0">
+                <a:solidFill>
+                  <a:srgbClr val="334155"/>
+                </a:solidFill>
+                <a:latin typeface="Afacad Flux"/>
+                <a:ea typeface="Afacad Flux"/>
+                <a:cs typeface="Afacad Flux"/>
+                <a:sym typeface="Afacad Flux"/>
+              </a:rPr>
+              <a:t>워드프로세서</a:t>
+            </a:r>
+            <a:r>
+              <a:rPr lang="en-US" altLang="ko-KR" sz="2400" dirty="0">
+                <a:solidFill>
+                  <a:srgbClr val="334155"/>
+                </a:solidFill>
+                <a:latin typeface="Afacad Flux"/>
+                <a:ea typeface="Afacad Flux"/>
+                <a:cs typeface="Afacad Flux"/>
+                <a:sym typeface="Afacad Flux"/>
+              </a:rPr>
+              <a:t>, </a:t>
+            </a:r>
+            <a:r>
+              <a:rPr lang="ko-KR" altLang="en-US" sz="2400" dirty="0">
+                <a:solidFill>
+                  <a:srgbClr val="334155"/>
+                </a:solidFill>
+                <a:latin typeface="Afacad Flux"/>
+                <a:ea typeface="Afacad Flux"/>
+                <a:cs typeface="Afacad Flux"/>
+                <a:sym typeface="Afacad Flux"/>
+              </a:rPr>
+              <a:t>웹 브라우저 등이 있습니다</a:t>
+            </a:r>
+            <a:r>
+              <a:rPr lang="en-US" altLang="ko-KR" sz="2400" dirty="0">
+                <a:solidFill>
+                  <a:srgbClr val="334155"/>
+                </a:solidFill>
+                <a:latin typeface="Afacad Flux"/>
+                <a:ea typeface="Afacad Flux"/>
+                <a:cs typeface="Afacad Flux"/>
+                <a:sym typeface="Afacad Flux"/>
+              </a:rPr>
+              <a:t>.</a:t>
+            </a:r>
+          </a:p>
+          <a:p>
+            <a:pPr lvl="0"/>
+            <a:endParaRPr lang="en-US" altLang="ko-KR" sz="2400" dirty="0">
+              <a:solidFill>
+                <a:srgbClr val="334155"/>
+              </a:solidFill>
+              <a:latin typeface="Afacad Flux"/>
+              <a:ea typeface="Afacad Flux"/>
+              <a:cs typeface="Afacad Flux"/>
+              <a:sym typeface="Afacad Flux"/>
+            </a:endParaRPr>
+          </a:p>
+        </p:txBody>
+      </p:sp>
+      <p:sp>
+        <p:nvSpPr>
+          <p:cNvPr id="95" name="Google Shape;95;p14">
+            <a:extLst>
+              <a:ext uri="{FF2B5EF4-FFF2-40B4-BE49-F238E27FC236}">
+                <a16:creationId xmlns:a16="http://schemas.microsoft.com/office/drawing/2014/main" id="{A01A9428-8FCF-295C-B468-B4C3EE527088}"/>
+              </a:ext>
+            </a:extLst>
+          </p:cNvPr>
+          <p:cNvSpPr txBox="1"/>
+          <p:nvPr/>
+        </p:nvSpPr>
+        <p:spPr>
+          <a:xfrm>
+            <a:off x="571500" y="571500"/>
+            <a:ext cx="11601450" cy="600164"/>
+          </a:xfrm>
+          <a:prstGeom prst="rect">
+            <a:avLst/>
+          </a:prstGeom>
+          <a:noFill/>
+          <a:ln>
+            <a:noFill/>
+          </a:ln>
+        </p:spPr>
+        <p:txBody>
+          <a:bodyPr spcFirstLastPara="1" wrap="square" lIns="0" tIns="0" rIns="0" bIns="0" anchor="t" anchorCtr="0">
+            <a:spAutoFit/>
+          </a:bodyPr>
+          <a:lstStyle/>
+          <a:p>
+            <a:pPr lvl="0"/>
+            <a:r>
+              <a:rPr lang="ko-KR" altLang="en-US" sz="3900" b="1" dirty="0" err="1">
+                <a:solidFill>
+                  <a:srgbClr val="1E293B"/>
+                </a:solidFill>
+                <a:latin typeface="Comfortaa"/>
+                <a:ea typeface="Comfortaa"/>
+                <a:cs typeface="Comfortaa"/>
+                <a:sym typeface="Comfortaa"/>
+              </a:rPr>
+              <a:t>응용소프트웨어란</a:t>
+            </a:r>
+            <a:r>
+              <a:rPr lang="en-US" altLang="ko-KR" sz="3900" b="1" dirty="0">
+                <a:solidFill>
+                  <a:srgbClr val="1E293B"/>
+                </a:solidFill>
+                <a:latin typeface="Comfortaa"/>
+                <a:ea typeface="Comfortaa"/>
+                <a:cs typeface="Comfortaa"/>
+                <a:sym typeface="Comfortaa"/>
+              </a:rPr>
+              <a:t>?</a:t>
+            </a:r>
+            <a:endParaRPr dirty="0"/>
+          </a:p>
+        </p:txBody>
+      </p:sp>
+      <p:pic>
+        <p:nvPicPr>
+          <p:cNvPr id="2" name="그림 1">
+            <a:extLst>
+              <a:ext uri="{FF2B5EF4-FFF2-40B4-BE49-F238E27FC236}">
+                <a16:creationId xmlns:a16="http://schemas.microsoft.com/office/drawing/2014/main" id="{71EC135C-1380-98B9-39B7-187732C97DDB}"/>
+              </a:ext>
+            </a:extLst>
+          </p:cNvPr>
+          <p:cNvPicPr>
+            <a:picLocks noChangeAspect="1"/>
+          </p:cNvPicPr>
+          <p:nvPr/>
+        </p:nvPicPr>
+        <p:blipFill>
+          <a:blip r:embed="rId4"/>
+          <a:srcRect l="397" r="397"/>
+          <a:stretch/>
+        </p:blipFill>
+        <p:spPr>
+          <a:xfrm>
+            <a:off x="858415" y="1402604"/>
+            <a:ext cx="2486033" cy="4490962"/>
+          </a:xfrm>
+          <a:prstGeom prst="rect">
+            <a:avLst/>
+          </a:prstGeom>
+        </p:spPr>
+      </p:pic>
+    </p:spTree>
+    <p:extLst>
+      <p:ext uri="{BB962C8B-B14F-4D97-AF65-F5344CB8AC3E}">
+        <p14:creationId xmlns:p14="http://schemas.microsoft.com/office/powerpoint/2010/main" val="3453292554"/>
+      </p:ext>
+    </p:extLst>
+  </p:cSld>
+  <p:clrMapOvr>
+    <a:masterClrMapping/>
+  </p:clrMapOvr>
+</p:sld>
+</file>
+
+<file path=ppt/slides/slide17.xml><?xml version="1.0" encoding="utf-8"?>
 <p:sld xmlns:a="http://schemas.openxmlformats.org/drawingml/2006/main" xmlns:r="http://schemas.openxmlformats.org/officeDocument/2006/relationships" xmlns:p="http://schemas.openxmlformats.org/presentationml/2006/main">
   <p:cSld>
     <p:spTree>
@@ -12680,7 +16710,19 @@
                 <a:cs typeface="Comfortaa"/>
                 <a:sym typeface="Comfortaa"/>
               </a:rPr>
-              <a:t>번째 내용</a:t>
+              <a:t>번째 </a:t>
+            </a:r>
+            <a:r>
+              <a:rPr lang="ko-KR" altLang="en-US" sz="6000" b="1" dirty="0">
+                <a:solidFill>
+                  <a:schemeClr val="bg2"/>
+                </a:solidFill>
+                <a:latin typeface="Comfortaa"/>
+                <a:ea typeface="Comfortaa"/>
+                <a:cs typeface="Comfortaa"/>
+                <a:sym typeface="Comfortaa"/>
+              </a:rPr>
+              <a:t>놀이</a:t>
             </a:r>
             <a:endParaRPr dirty="0">
               <a:solidFill>
@@ -12704,8 +16746,8 @@
         </p:nvSpPr>
         <p:spPr>
           <a:xfrm>
-            <a:off x="2366117" y="3346629"/>
-            <a:ext cx="7459763" cy="692497"/>
+            <a:off x="1852132" y="3082751"/>
+            <a:ext cx="8487734" cy="692497"/>
           </a:xfrm>
           <a:prstGeom prst="rect">
             <a:avLst/>
@@ -12740,7 +16782,7 @@
                 <a:cs typeface="Afacad Flux"/>
                 <a:sym typeface="Afacad Flux"/>
               </a:rPr>
-              <a:t>하드웨어</a:t>
+              <a:t>숨은 하드웨어</a:t>
             </a:r>
             <a:r>
               <a:rPr lang="en-US" altLang="ko-KR" sz="4500" b="1" i="0" u="none" strike="noStrike" cap="none" dirty="0">
@@ -12764,19 +16806,7 @@
                 <a:cs typeface="Afacad Flux"/>
                 <a:sym typeface="Afacad Flux"/>
               </a:rPr>
-              <a:t> 소프트웨어란</a:t>
-            </a:r>
-            <a:r>
-              <a:rPr lang="en-US" altLang="ko-KR" sz="4500" b="1" i="0" u="none" strike="noStrike" cap="none" dirty="0">
-                <a:solidFill>
-                  <a:srgbClr val="334155"/>
-                </a:solidFill>
-                <a:latin typeface="Afacad Flux"/>
-                <a:ea typeface="Afacad Flux"/>
-                <a:cs typeface="Afacad Flux"/>
-                <a:sym typeface="Afacad Flux"/>
-              </a:rPr>
-              <a:t>?</a:t>
+              <a:t> 소프트웨어 맞추기</a:t>
             </a:r>
             <a:endParaRPr lang="en-US" dirty="0"/>
           </a:p>
@@ -12797,7 +16827,7 @@
         <p:spPr>
           <a:xfrm>
             <a:off x="3386137" y="4586287"/>
-            <a:ext cx="5419725" cy="361950"/>
+            <a:ext cx="5419725" cy="323165"/>
           </a:xfrm>
           <a:prstGeom prst="rect">
             <a:avLst/>
@@ -12823,7 +16853,7 @@
               <a:buNone/>
             </a:pPr>
             <a:r>
-              <a:rPr lang="en-US" sz="2100" b="0" i="0" u="none" strike="noStrike" cap="none">
+              <a:rPr lang="ko-KR" altLang="en-US" sz="2100" b="0" i="0" u="none" strike="noStrike" cap="none" dirty="0">
                 <a:solidFill>
                   <a:srgbClr val="64748B"/>
                 </a:solidFill>
@@ -12832,9 +16862,33 @@
                 <a:cs typeface="Afacad Flux"/>
                 <a:sym typeface="Afacad Flux"/>
               </a:rPr>
-              <a:t>"내가 되고 싶은 모습은 무엇일까요?"</a:t>
-            </a:r>
-            <a:endParaRPr/>
+              <a:t>싸우지 말고 </a:t>
+            </a:r>
+            <a:r>
+              <a:rPr lang="ko-KR" altLang="en-US" sz="2100" b="0" i="0" u="none" strike="noStrike" cap="none" dirty="0" err="1">
+                <a:solidFill>
+                  <a:srgbClr val="64748B"/>
+                </a:solidFill>
+                <a:latin typeface="Afacad Flux"/>
+                <a:ea typeface="Afacad Flux"/>
+                <a:cs typeface="Afacad Flux"/>
+                <a:sym typeface="Afacad Flux"/>
+              </a:rPr>
+              <a:t>친구들이랑</a:t>
+            </a:r>
+            <a:r>
+              <a:rPr lang="ko-KR" altLang="en-US" sz="2100" b="0" i="0" u="none" strike="noStrike" cap="none" dirty="0">
+                <a:solidFill>
+                  <a:srgbClr val="64748B"/>
+                </a:solidFill>
+                <a:latin typeface="Afacad Flux"/>
+                <a:ea typeface="Afacad Flux"/>
+                <a:cs typeface="Afacad Flux"/>
+                <a:sym typeface="Afacad Flux"/>
+              </a:rPr>
+              <a:t> 협동하기</a:t>
+            </a:r>
+            <a:endParaRPr dirty="0"/>
           </a:p>
         </p:txBody>
       </p:sp>
@@ -12851,7 +16905,1582 @@
 </p:sld>
 </file>
 
-<file path=ppt/slides/slide4.xml><?xml version="1.0" encoding="utf-8"?>
+<file path=ppt/slides/slide18.xml><?xml version="1.0" encoding="utf-8"?>
+<p:sld xmlns:a="http://schemas.openxmlformats.org/drawingml/2006/main" xmlns:r="http://schemas.openxmlformats.org/officeDocument/2006/relationships" xmlns:p="http://schemas.openxmlformats.org/presentationml/2006/main">
+  <p:cSld>
+    <p:spTree>
+      <p:nvGrpSpPr>
+        <p:cNvPr id="1" name="Shape 90">
+          <a:extLst>
+            <a:ext uri="{FF2B5EF4-FFF2-40B4-BE49-F238E27FC236}">
+              <a16:creationId xmlns:a16="http://schemas.microsoft.com/office/drawing/2014/main" id="{267D7F31-4E45-74F0-E44B-927889D726DB}"/>
+            </a:ext>
+          </a:extLst>
+        </p:cNvPr>
+        <p:cNvGrpSpPr/>
+        <p:nvPr/>
+      </p:nvGrpSpPr>
+      <p:grpSpPr>
+        <a:xfrm>
+          <a:off x="0" y="0"/>
+          <a:ext cx="0" cy="0"/>
+          <a:chOff x="0" y="0"/>
+          <a:chExt cx="0" cy="0"/>
+        </a:xfrm>
+      </p:grpSpPr>
+      <p:pic>
+        <p:nvPicPr>
+          <p:cNvPr id="91" name="Google Shape;91;p14" descr="image.png">
+            <a:extLst>
+              <a:ext uri="{FF2B5EF4-FFF2-40B4-BE49-F238E27FC236}">
+                <a16:creationId xmlns:a16="http://schemas.microsoft.com/office/drawing/2014/main" id="{16189944-B137-C8B4-3899-90E3A16DD71A}"/>
+              </a:ext>
+            </a:extLst>
+          </p:cNvPr>
+          <p:cNvPicPr preferRelativeResize="0"/>
+          <p:nvPr/>
+        </p:nvPicPr>
+        <p:blipFill rotWithShape="1">
+          <a:blip r:embed="rId3">
+            <a:alphaModFix/>
+          </a:blip>
+          <a:srcRect/>
+          <a:stretch/>
+        </p:blipFill>
+        <p:spPr>
+          <a:xfrm>
+            <a:off x="0" y="-4763"/>
+            <a:ext cx="12192000" cy="6858000"/>
+          </a:xfrm>
+          <a:prstGeom prst="rect">
+            <a:avLst/>
+          </a:prstGeom>
+          <a:noFill/>
+          <a:ln>
+            <a:noFill/>
+          </a:ln>
+        </p:spPr>
+      </p:pic>
+      <p:sp>
+        <p:nvSpPr>
+          <p:cNvPr id="95" name="Google Shape;95;p14">
+            <a:extLst>
+              <a:ext uri="{FF2B5EF4-FFF2-40B4-BE49-F238E27FC236}">
+                <a16:creationId xmlns:a16="http://schemas.microsoft.com/office/drawing/2014/main" id="{48900CE1-DC43-5DC0-9C79-EECB8B4630EB}"/>
+              </a:ext>
+            </a:extLst>
+          </p:cNvPr>
+          <p:cNvSpPr txBox="1"/>
+          <p:nvPr/>
+        </p:nvSpPr>
+        <p:spPr>
+          <a:xfrm>
+            <a:off x="0" y="571500"/>
+            <a:ext cx="12172950" cy="600164"/>
+          </a:xfrm>
+          <a:prstGeom prst="rect">
+            <a:avLst/>
+          </a:prstGeom>
+          <a:noFill/>
+          <a:ln>
+            <a:noFill/>
+          </a:ln>
+        </p:spPr>
+        <p:txBody>
+          <a:bodyPr spcFirstLastPara="1" wrap="square" lIns="0" tIns="0" rIns="0" bIns="0" anchor="t" anchorCtr="0">
+            <a:spAutoFit/>
+          </a:bodyPr>
+          <a:lstStyle/>
+          <a:p>
+            <a:pPr lvl="0" algn="ctr"/>
+            <a:r>
+              <a:rPr lang="ko-KR" altLang="en-US" sz="3900" b="1" dirty="0">
+                <a:solidFill>
+                  <a:srgbClr val="1E293B"/>
+                </a:solidFill>
+                <a:latin typeface="Comfortaa"/>
+                <a:ea typeface="Comfortaa"/>
+                <a:cs typeface="Comfortaa"/>
+                <a:sym typeface="Comfortaa"/>
+              </a:rPr>
+              <a:t>하드웨어는 어디에 소프트웨어는 어디에 있을까요</a:t>
+            </a:r>
+            <a:r>
+              <a:rPr lang="en-US" altLang="ko-KR" sz="3900" b="1" dirty="0">
+                <a:solidFill>
+                  <a:srgbClr val="1E293B"/>
+                </a:solidFill>
+                <a:latin typeface="Comfortaa"/>
+                <a:ea typeface="Comfortaa"/>
+                <a:cs typeface="Comfortaa"/>
+                <a:sym typeface="Comfortaa"/>
+              </a:rPr>
+              <a:t>?</a:t>
+            </a:r>
+            <a:endParaRPr dirty="0"/>
+          </a:p>
+        </p:txBody>
+      </p:sp>
+      <p:pic>
+        <p:nvPicPr>
+          <p:cNvPr id="12" name="그림 11">
+            <a:extLst>
+              <a:ext uri="{FF2B5EF4-FFF2-40B4-BE49-F238E27FC236}">
+                <a16:creationId xmlns:a16="http://schemas.microsoft.com/office/drawing/2014/main" id="{6318FCAB-AC5A-DC0C-2931-E731DB77AD48}"/>
+              </a:ext>
+            </a:extLst>
+          </p:cNvPr>
+          <p:cNvPicPr>
+            <a:picLocks noChangeAspect="1"/>
+          </p:cNvPicPr>
+          <p:nvPr/>
+        </p:nvPicPr>
+        <p:blipFill>
+          <a:blip r:embed="rId4"/>
+          <a:srcRect l="5687" t="5079" r="52669" b="65076"/>
+          <a:stretch>
+            <a:fillRect/>
+          </a:stretch>
+        </p:blipFill>
+        <p:spPr>
+          <a:xfrm>
+            <a:off x="1485903" y="1479395"/>
+            <a:ext cx="9220193" cy="4807105"/>
+          </a:xfrm>
+          <a:prstGeom prst="rect">
+            <a:avLst/>
+          </a:prstGeom>
+        </p:spPr>
+      </p:pic>
+    </p:spTree>
+    <p:extLst>
+      <p:ext uri="{BB962C8B-B14F-4D97-AF65-F5344CB8AC3E}">
+        <p14:creationId xmlns:p14="http://schemas.microsoft.com/office/powerpoint/2010/main" val="1872159328"/>
+      </p:ext>
+    </p:extLst>
+  </p:cSld>
+  <p:clrMapOvr>
+    <a:masterClrMapping/>
+  </p:clrMapOvr>
+</p:sld>
+</file>
+
+<file path=ppt/slides/slide19.xml><?xml version="1.0" encoding="utf-8"?>
+<p:sld xmlns:a="http://schemas.openxmlformats.org/drawingml/2006/main" xmlns:r="http://schemas.openxmlformats.org/officeDocument/2006/relationships" xmlns:p="http://schemas.openxmlformats.org/presentationml/2006/main">
+  <p:cSld>
+    <p:spTree>
+      <p:nvGrpSpPr>
+        <p:cNvPr id="1" name="Shape 90">
+          <a:extLst>
+            <a:ext uri="{FF2B5EF4-FFF2-40B4-BE49-F238E27FC236}">
+              <a16:creationId xmlns:a16="http://schemas.microsoft.com/office/drawing/2014/main" id="{CE0F9FCD-6AEB-17B6-E728-7906B25243B8}"/>
+            </a:ext>
+          </a:extLst>
+        </p:cNvPr>
+        <p:cNvGrpSpPr/>
+        <p:nvPr/>
+      </p:nvGrpSpPr>
+      <p:grpSpPr>
+        <a:xfrm>
+          <a:off x="0" y="0"/>
+          <a:ext cx="0" cy="0"/>
+          <a:chOff x="0" y="0"/>
+          <a:chExt cx="0" cy="0"/>
+        </a:xfrm>
+      </p:grpSpPr>
+      <p:pic>
+        <p:nvPicPr>
+          <p:cNvPr id="91" name="Google Shape;91;p14" descr="image.png">
+            <a:extLst>
+              <a:ext uri="{FF2B5EF4-FFF2-40B4-BE49-F238E27FC236}">
+                <a16:creationId xmlns:a16="http://schemas.microsoft.com/office/drawing/2014/main" id="{6899B509-8686-2019-A97E-096E1ADC2608}"/>
+              </a:ext>
+            </a:extLst>
+          </p:cNvPr>
+          <p:cNvPicPr preferRelativeResize="0"/>
+          <p:nvPr/>
+        </p:nvPicPr>
+        <p:blipFill rotWithShape="1">
+          <a:blip r:embed="rId3">
+            <a:alphaModFix/>
+          </a:blip>
+          <a:srcRect/>
+          <a:stretch/>
+        </p:blipFill>
+        <p:spPr>
+          <a:xfrm>
+            <a:off x="0" y="-4763"/>
+            <a:ext cx="12192000" cy="6858000"/>
+          </a:xfrm>
+          <a:prstGeom prst="rect">
+            <a:avLst/>
+          </a:prstGeom>
+          <a:noFill/>
+          <a:ln>
+            <a:noFill/>
+          </a:ln>
+        </p:spPr>
+      </p:pic>
+      <p:sp>
+        <p:nvSpPr>
+          <p:cNvPr id="95" name="Google Shape;95;p14">
+            <a:extLst>
+              <a:ext uri="{FF2B5EF4-FFF2-40B4-BE49-F238E27FC236}">
+                <a16:creationId xmlns:a16="http://schemas.microsoft.com/office/drawing/2014/main" id="{0D32C0DC-8B38-3FAD-F581-228E427D1D2F}"/>
+              </a:ext>
+            </a:extLst>
+          </p:cNvPr>
+          <p:cNvSpPr txBox="1"/>
+          <p:nvPr/>
+        </p:nvSpPr>
+        <p:spPr>
+          <a:xfrm>
+            <a:off x="0" y="571500"/>
+            <a:ext cx="12172950" cy="600164"/>
+          </a:xfrm>
+          <a:prstGeom prst="rect">
+            <a:avLst/>
+          </a:prstGeom>
+          <a:noFill/>
+          <a:ln>
+            <a:noFill/>
+          </a:ln>
+        </p:spPr>
+        <p:txBody>
+          <a:bodyPr spcFirstLastPara="1" wrap="square" lIns="0" tIns="0" rIns="0" bIns="0" anchor="t" anchorCtr="0">
+            <a:spAutoFit/>
+          </a:bodyPr>
+          <a:lstStyle/>
+          <a:p>
+            <a:pPr lvl="0" algn="ctr"/>
+            <a:r>
+              <a:rPr lang="ko-KR" altLang="en-US" sz="3900" b="1" dirty="0">
+                <a:solidFill>
+                  <a:srgbClr val="1E293B"/>
+                </a:solidFill>
+                <a:latin typeface="Comfortaa"/>
+                <a:ea typeface="Comfortaa"/>
+                <a:cs typeface="Comfortaa"/>
+                <a:sym typeface="Comfortaa"/>
+              </a:rPr>
+              <a:t>하드웨어는 어디에 소프트웨어는 어디에 있을까요</a:t>
+            </a:r>
+            <a:r>
+              <a:rPr lang="en-US" altLang="ko-KR" sz="3900" b="1" dirty="0">
+                <a:solidFill>
+                  <a:srgbClr val="1E293B"/>
+                </a:solidFill>
+                <a:latin typeface="Comfortaa"/>
+                <a:ea typeface="Comfortaa"/>
+                <a:cs typeface="Comfortaa"/>
+                <a:sym typeface="Comfortaa"/>
+              </a:rPr>
+              <a:t>?</a:t>
+            </a:r>
+            <a:endParaRPr dirty="0"/>
+          </a:p>
+        </p:txBody>
+      </p:sp>
+      <p:pic>
+        <p:nvPicPr>
+          <p:cNvPr id="12" name="그림 11">
+            <a:extLst>
+              <a:ext uri="{FF2B5EF4-FFF2-40B4-BE49-F238E27FC236}">
+                <a16:creationId xmlns:a16="http://schemas.microsoft.com/office/drawing/2014/main" id="{11A15F25-48B3-6CD4-2614-3DA3DDD015D3}"/>
+              </a:ext>
+            </a:extLst>
+          </p:cNvPr>
+          <p:cNvPicPr>
+            <a:picLocks noChangeAspect="1"/>
+          </p:cNvPicPr>
+          <p:nvPr/>
+        </p:nvPicPr>
+        <p:blipFill>
+          <a:blip r:embed="rId4"/>
+          <a:srcRect l="5687" t="5079" r="52669" b="65076"/>
+          <a:stretch>
+            <a:fillRect/>
+          </a:stretch>
+        </p:blipFill>
+        <p:spPr>
+          <a:xfrm>
+            <a:off x="1485903" y="1479395"/>
+            <a:ext cx="9220193" cy="4807105"/>
+          </a:xfrm>
+          <a:prstGeom prst="rect">
+            <a:avLst/>
+          </a:prstGeom>
+        </p:spPr>
+      </p:pic>
+      <p:sp>
+        <p:nvSpPr>
+          <p:cNvPr id="13" name="타원 12">
+            <a:extLst>
+              <a:ext uri="{FF2B5EF4-FFF2-40B4-BE49-F238E27FC236}">
+                <a16:creationId xmlns:a16="http://schemas.microsoft.com/office/drawing/2014/main" id="{6ADC4D49-A442-4142-4815-BC81DA907883}"/>
+              </a:ext>
+            </a:extLst>
+          </p:cNvPr>
+          <p:cNvSpPr/>
+          <p:nvPr/>
+        </p:nvSpPr>
+        <p:spPr>
+          <a:xfrm>
+            <a:off x="3992137" y="2059259"/>
+            <a:ext cx="2817541" cy="1977482"/>
+          </a:xfrm>
+          <a:prstGeom prst="ellipse">
+            <a:avLst/>
+          </a:prstGeom>
+          <a:noFill/>
+          <a:ln w="76200">
+            <a:solidFill>
+              <a:schemeClr val="bg2"/>
+            </a:solidFill>
+          </a:ln>
+        </p:spPr>
+        <p:style>
+          <a:lnRef idx="2">
+            <a:schemeClr val="accent1">
+              <a:shade val="15000"/>
+            </a:schemeClr>
+          </a:lnRef>
+          <a:fillRef idx="1">
+            <a:schemeClr val="accent1"/>
+          </a:fillRef>
+          <a:effectRef idx="0">
+            <a:schemeClr val="accent1"/>
+          </a:effectRef>
+          <a:fontRef idx="minor">
+            <a:schemeClr val="lt1"/>
+          </a:fontRef>
+        </p:style>
+        <p:txBody>
+          <a:bodyPr rtlCol="0" anchor="ctr"/>
+          <a:lstStyle/>
+          <a:p>
+            <a:pPr algn="ctr"/>
+            <a:endParaRPr lang="ko-KR" altLang="en-US"/>
+          </a:p>
+        </p:txBody>
+      </p:sp>
+      <p:sp>
+        <p:nvSpPr>
+          <p:cNvPr id="14" name="타원 13">
+            <a:extLst>
+              <a:ext uri="{FF2B5EF4-FFF2-40B4-BE49-F238E27FC236}">
+                <a16:creationId xmlns:a16="http://schemas.microsoft.com/office/drawing/2014/main" id="{48D9EE28-00A7-8DE7-8E95-BFF90D1BF93A}"/>
+              </a:ext>
+            </a:extLst>
+          </p:cNvPr>
+          <p:cNvSpPr/>
+          <p:nvPr/>
+        </p:nvSpPr>
+        <p:spPr>
+          <a:xfrm>
+            <a:off x="2984608" y="4440477"/>
+            <a:ext cx="2251272" cy="1139868"/>
+          </a:xfrm>
+          <a:prstGeom prst="ellipse">
+            <a:avLst/>
+          </a:prstGeom>
+          <a:noFill/>
+          <a:ln w="76200">
+            <a:solidFill>
+              <a:srgbClr val="FF0000"/>
+            </a:solidFill>
+          </a:ln>
+        </p:spPr>
+        <p:style>
+          <a:lnRef idx="2">
+            <a:schemeClr val="accent1">
+              <a:shade val="15000"/>
+            </a:schemeClr>
+          </a:lnRef>
+          <a:fillRef idx="1">
+            <a:schemeClr val="accent1"/>
+          </a:fillRef>
+          <a:effectRef idx="0">
+            <a:schemeClr val="accent1"/>
+          </a:effectRef>
+          <a:fontRef idx="minor">
+            <a:schemeClr val="lt1"/>
+          </a:fontRef>
+        </p:style>
+        <p:txBody>
+          <a:bodyPr rtlCol="0" anchor="ctr"/>
+          <a:lstStyle/>
+          <a:p>
+            <a:pPr algn="ctr"/>
+            <a:endParaRPr lang="ko-KR" altLang="en-US" dirty="0"/>
+          </a:p>
+        </p:txBody>
+      </p:sp>
+      <p:sp>
+        <p:nvSpPr>
+          <p:cNvPr id="15" name="타원 14">
+            <a:extLst>
+              <a:ext uri="{FF2B5EF4-FFF2-40B4-BE49-F238E27FC236}">
+                <a16:creationId xmlns:a16="http://schemas.microsoft.com/office/drawing/2014/main" id="{B9DD328A-8177-7EAD-3575-009D07D5636D}"/>
+              </a:ext>
+            </a:extLst>
+          </p:cNvPr>
+          <p:cNvSpPr/>
+          <p:nvPr/>
+        </p:nvSpPr>
+        <p:spPr>
+          <a:xfrm>
+            <a:off x="1727830" y="2743200"/>
+            <a:ext cx="1211612" cy="1445941"/>
+          </a:xfrm>
+          <a:prstGeom prst="ellipse">
+            <a:avLst/>
+          </a:prstGeom>
+          <a:noFill/>
+          <a:ln w="76200">
+            <a:solidFill>
+              <a:srgbClr val="FF0000"/>
+            </a:solidFill>
+          </a:ln>
+        </p:spPr>
+        <p:style>
+          <a:lnRef idx="2">
+            <a:schemeClr val="accent1">
+              <a:shade val="15000"/>
+            </a:schemeClr>
+          </a:lnRef>
+          <a:fillRef idx="1">
+            <a:schemeClr val="accent1"/>
+          </a:fillRef>
+          <a:effectRef idx="0">
+            <a:schemeClr val="accent1"/>
+          </a:effectRef>
+          <a:fontRef idx="minor">
+            <a:schemeClr val="lt1"/>
+          </a:fontRef>
+        </p:style>
+        <p:txBody>
+          <a:bodyPr rtlCol="0" anchor="ctr"/>
+          <a:lstStyle/>
+          <a:p>
+            <a:pPr algn="ctr"/>
+            <a:endParaRPr lang="ko-KR" altLang="en-US" dirty="0"/>
+          </a:p>
+        </p:txBody>
+      </p:sp>
+      <p:sp>
+        <p:nvSpPr>
+          <p:cNvPr id="16" name="타원 15">
+            <a:extLst>
+              <a:ext uri="{FF2B5EF4-FFF2-40B4-BE49-F238E27FC236}">
+                <a16:creationId xmlns:a16="http://schemas.microsoft.com/office/drawing/2014/main" id="{F53CACEA-E7A0-A359-F245-3BE809DE5F5A}"/>
+              </a:ext>
+            </a:extLst>
+          </p:cNvPr>
+          <p:cNvSpPr/>
+          <p:nvPr/>
+        </p:nvSpPr>
+        <p:spPr>
+          <a:xfrm>
+            <a:off x="3231335" y="1631718"/>
+            <a:ext cx="5067158" cy="3078068"/>
+          </a:xfrm>
+          <a:prstGeom prst="ellipse">
+            <a:avLst/>
+          </a:prstGeom>
+          <a:noFill/>
+          <a:ln w="76200">
+            <a:solidFill>
+              <a:srgbClr val="FF0000"/>
+            </a:solidFill>
+          </a:ln>
+        </p:spPr>
+        <p:style>
+          <a:lnRef idx="2">
+            <a:schemeClr val="accent1">
+              <a:shade val="15000"/>
+            </a:schemeClr>
+          </a:lnRef>
+          <a:fillRef idx="1">
+            <a:schemeClr val="accent1"/>
+          </a:fillRef>
+          <a:effectRef idx="0">
+            <a:schemeClr val="accent1"/>
+          </a:effectRef>
+          <a:fontRef idx="minor">
+            <a:schemeClr val="lt1"/>
+          </a:fontRef>
+        </p:style>
+        <p:txBody>
+          <a:bodyPr rtlCol="0" anchor="ctr"/>
+          <a:lstStyle/>
+          <a:p>
+            <a:pPr algn="ctr"/>
+            <a:endParaRPr lang="ko-KR" altLang="en-US" dirty="0"/>
+          </a:p>
+        </p:txBody>
+      </p:sp>
+      <p:sp>
+        <p:nvSpPr>
+          <p:cNvPr id="17" name="타원 16">
+            <a:extLst>
+              <a:ext uri="{FF2B5EF4-FFF2-40B4-BE49-F238E27FC236}">
+                <a16:creationId xmlns:a16="http://schemas.microsoft.com/office/drawing/2014/main" id="{FBBFC2BD-62A3-CA57-D08F-5C78055EE857}"/>
+              </a:ext>
+            </a:extLst>
+          </p:cNvPr>
+          <p:cNvSpPr/>
+          <p:nvPr/>
+        </p:nvSpPr>
+        <p:spPr>
+          <a:xfrm>
+            <a:off x="5100321" y="5002461"/>
+            <a:ext cx="2448370" cy="1139867"/>
+          </a:xfrm>
+          <a:prstGeom prst="ellipse">
+            <a:avLst/>
+          </a:prstGeom>
+          <a:noFill/>
+          <a:ln w="76200">
+            <a:solidFill>
+              <a:srgbClr val="FF0000"/>
+            </a:solidFill>
+          </a:ln>
+        </p:spPr>
+        <p:style>
+          <a:lnRef idx="2">
+            <a:schemeClr val="accent1">
+              <a:shade val="15000"/>
+            </a:schemeClr>
+          </a:lnRef>
+          <a:fillRef idx="1">
+            <a:schemeClr val="accent1"/>
+          </a:fillRef>
+          <a:effectRef idx="0">
+            <a:schemeClr val="accent1"/>
+          </a:effectRef>
+          <a:fontRef idx="minor">
+            <a:schemeClr val="lt1"/>
+          </a:fontRef>
+        </p:style>
+        <p:txBody>
+          <a:bodyPr rtlCol="0" anchor="ctr"/>
+          <a:lstStyle/>
+          <a:p>
+            <a:pPr algn="ctr"/>
+            <a:endParaRPr lang="ko-KR" altLang="en-US" dirty="0"/>
+          </a:p>
+        </p:txBody>
+      </p:sp>
+    </p:spTree>
+    <p:extLst>
+      <p:ext uri="{BB962C8B-B14F-4D97-AF65-F5344CB8AC3E}">
+        <p14:creationId xmlns:p14="http://schemas.microsoft.com/office/powerpoint/2010/main" val="782665013"/>
+      </p:ext>
+    </p:extLst>
+  </p:cSld>
+  <p:clrMapOvr>
+    <a:masterClrMapping/>
+  </p:clrMapOvr>
+</p:sld>
+</file>
+
+<file path=ppt/slides/slide2.xml><?xml version="1.0" encoding="utf-8"?>
+<p:sld xmlns:a="http://schemas.openxmlformats.org/drawingml/2006/main" xmlns:r="http://schemas.openxmlformats.org/officeDocument/2006/relationships" xmlns:p="http://schemas.openxmlformats.org/presentationml/2006/main">
+  <p:cSld>
+    <p:bg>
+      <p:bgPr>
+        <a:solidFill>
+          <a:srgbClr val="FFFFFF"/>
+        </a:solidFill>
+        <a:effectLst/>
+      </p:bgPr>
+    </p:bg>
+    <p:spTree>
+      <p:nvGrpSpPr>
+        <p:cNvPr id="1" name="Shape 90"/>
+        <p:cNvGrpSpPr/>
+        <p:nvPr/>
+      </p:nvGrpSpPr>
+      <p:grpSpPr>
+        <a:xfrm>
+          <a:off x="0" y="0"/>
+          <a:ext cx="0" cy="0"/>
+          <a:chOff x="0" y="0"/>
+          <a:chExt cx="0" cy="0"/>
+        </a:xfrm>
+      </p:grpSpPr>
+      <p:pic>
+        <p:nvPicPr>
+          <p:cNvPr id="91" name="Google Shape;91;p14" descr="image.png"/>
+          <p:cNvPicPr preferRelativeResize="0"/>
+          <p:nvPr/>
+        </p:nvPicPr>
+        <p:blipFill rotWithShape="1">
+          <a:blip r:embed="rId3">
+            <a:alphaModFix/>
+          </a:blip>
+          <a:srcRect/>
+          <a:stretch/>
+        </p:blipFill>
+        <p:spPr>
+          <a:xfrm>
+            <a:off x="0" y="-4763"/>
+            <a:ext cx="12192000" cy="6858000"/>
+          </a:xfrm>
+          <a:prstGeom prst="rect">
+            <a:avLst/>
+          </a:prstGeom>
+          <a:noFill/>
+          <a:ln>
+            <a:noFill/>
+          </a:ln>
+        </p:spPr>
+      </p:pic>
+      <p:sp>
+        <p:nvSpPr>
+          <p:cNvPr id="93" name="Google Shape;93;p14"/>
+          <p:cNvSpPr txBox="1"/>
+          <p:nvPr/>
+        </p:nvSpPr>
+        <p:spPr>
+          <a:xfrm>
+            <a:off x="6334125" y="2900362"/>
+            <a:ext cx="5550693" cy="461665"/>
+          </a:xfrm>
+          <a:prstGeom prst="rect">
+            <a:avLst/>
+          </a:prstGeom>
+          <a:noFill/>
+          <a:ln>
+            <a:noFill/>
+          </a:ln>
+        </p:spPr>
+        <p:txBody>
+          <a:bodyPr spcFirstLastPara="1" wrap="square" lIns="0" tIns="0" rIns="0" bIns="0" anchor="t" anchorCtr="0">
+            <a:spAutoFit/>
+          </a:bodyPr>
+          <a:lstStyle/>
+          <a:p>
+            <a:pPr marL="0" marR="0" lvl="0" indent="0" algn="l" rtl="0">
+              <a:spcBef>
+                <a:spcPts val="0"/>
+              </a:spcBef>
+              <a:spcAft>
+                <a:spcPts val="0"/>
+              </a:spcAft>
+              <a:buNone/>
+            </a:pPr>
+            <a:r>
+              <a:rPr lang="ko-KR" altLang="en-US" sz="3000" b="1" i="0" u="none" strike="noStrike" cap="none" dirty="0">
+                <a:solidFill>
+                  <a:srgbClr val="FF823A"/>
+                </a:solidFill>
+                <a:latin typeface="Afacad Flux"/>
+                <a:ea typeface="Afacad Flux"/>
+                <a:cs typeface="Afacad Flux"/>
+                <a:sym typeface="Afacad Flux"/>
+              </a:rPr>
+              <a:t>학습 목표</a:t>
+            </a:r>
+            <a:endParaRPr dirty="0"/>
+          </a:p>
+        </p:txBody>
+      </p:sp>
+      <p:sp>
+        <p:nvSpPr>
+          <p:cNvPr id="94" name="Google Shape;94;p14"/>
+          <p:cNvSpPr txBox="1"/>
+          <p:nvPr/>
+        </p:nvSpPr>
+        <p:spPr>
+          <a:xfrm>
+            <a:off x="6334125" y="3805237"/>
+            <a:ext cx="5857875" cy="600164"/>
+          </a:xfrm>
+          <a:prstGeom prst="rect">
+            <a:avLst/>
+          </a:prstGeom>
+          <a:noFill/>
+          <a:ln>
+            <a:noFill/>
+          </a:ln>
+        </p:spPr>
+        <p:txBody>
+          <a:bodyPr spcFirstLastPara="1" wrap="square" lIns="0" tIns="0" rIns="0" bIns="0" anchor="t" anchorCtr="0">
+            <a:spAutoFit/>
+          </a:bodyPr>
+          <a:lstStyle/>
+          <a:p>
+            <a:pPr marL="342900" lvl="0" indent="-342900">
+              <a:buFont typeface="Arial" panose="020B0604020202020204" pitchFamily="34" charset="0"/>
+              <a:buChar char="•"/>
+            </a:pPr>
+            <a:r>
+              <a:rPr lang="ko-KR" altLang="en-US" sz="1950" dirty="0">
+                <a:solidFill>
+                  <a:srgbClr val="334155"/>
+                </a:solidFill>
+                <a:latin typeface="Afacad Flux"/>
+                <a:ea typeface="Afacad Flux"/>
+                <a:cs typeface="Afacad Flux"/>
+                <a:sym typeface="Afacad Flux"/>
+              </a:rPr>
+              <a:t>하드웨어</a:t>
+            </a:r>
+            <a:r>
+              <a:rPr lang="en-US" altLang="ko-KR" sz="1950" dirty="0">
+                <a:solidFill>
+                  <a:srgbClr val="334155"/>
+                </a:solidFill>
+                <a:latin typeface="Afacad Flux"/>
+                <a:ea typeface="Afacad Flux"/>
+                <a:cs typeface="Afacad Flux"/>
+                <a:sym typeface="Afacad Flux"/>
+              </a:rPr>
+              <a:t>, </a:t>
+            </a:r>
+            <a:r>
+              <a:rPr lang="ko-KR" altLang="en-US" sz="1950" dirty="0">
+                <a:solidFill>
+                  <a:srgbClr val="334155"/>
+                </a:solidFill>
+                <a:latin typeface="Afacad Flux"/>
+                <a:ea typeface="Afacad Flux"/>
+                <a:cs typeface="Afacad Flux"/>
+                <a:sym typeface="Afacad Flux"/>
+              </a:rPr>
+              <a:t>소프트웨어</a:t>
+            </a:r>
+            <a:r>
+              <a:rPr lang="en-US" altLang="ko-KR" sz="1950" dirty="0">
+                <a:solidFill>
+                  <a:srgbClr val="334155"/>
+                </a:solidFill>
+                <a:latin typeface="Afacad Flux"/>
+                <a:ea typeface="Afacad Flux"/>
+                <a:cs typeface="Afacad Flux"/>
+                <a:sym typeface="Afacad Flux"/>
+              </a:rPr>
+              <a:t>,</a:t>
+            </a:r>
+            <a:r>
+              <a:rPr lang="ko-KR" altLang="en-US" sz="1950" dirty="0">
+                <a:solidFill>
+                  <a:srgbClr val="334155"/>
+                </a:solidFill>
+                <a:latin typeface="Afacad Flux"/>
+                <a:ea typeface="Afacad Flux"/>
+                <a:cs typeface="Afacad Flux"/>
+                <a:sym typeface="Afacad Flux"/>
+              </a:rPr>
+              <a:t> </a:t>
+            </a:r>
+            <a:r>
+              <a:rPr lang="en-US" altLang="ko-KR" sz="1950" dirty="0">
+                <a:solidFill>
+                  <a:srgbClr val="334155"/>
+                </a:solidFill>
+                <a:latin typeface="Afacad Flux"/>
+                <a:ea typeface="Afacad Flux"/>
+                <a:cs typeface="Afacad Flux"/>
+                <a:sym typeface="Afacad Flux"/>
+              </a:rPr>
+              <a:t>AR,VR</a:t>
+            </a:r>
+            <a:r>
+              <a:rPr lang="ko-KR" altLang="en-US" sz="1950" dirty="0">
+                <a:solidFill>
+                  <a:srgbClr val="334155"/>
+                </a:solidFill>
+                <a:latin typeface="Afacad Flux"/>
+                <a:ea typeface="Afacad Flux"/>
+                <a:cs typeface="Afacad Flux"/>
+                <a:sym typeface="Afacad Flux"/>
+              </a:rPr>
+              <a:t>의 개념을 배웁니다</a:t>
+            </a:r>
+            <a:r>
+              <a:rPr lang="en-US" altLang="ko-KR" sz="1950" dirty="0">
+                <a:solidFill>
+                  <a:srgbClr val="334155"/>
+                </a:solidFill>
+                <a:latin typeface="Afacad Flux"/>
+                <a:ea typeface="Afacad Flux"/>
+                <a:cs typeface="Afacad Flux"/>
+                <a:sym typeface="Afacad Flux"/>
+              </a:rPr>
+              <a:t>.</a:t>
+            </a:r>
+          </a:p>
+          <a:p>
+            <a:pPr marL="342900" lvl="0" indent="-342900">
+              <a:buFont typeface="Arial" panose="020B0604020202020204" pitchFamily="34" charset="0"/>
+              <a:buChar char="•"/>
+            </a:pPr>
+            <a:r>
+              <a:rPr lang="en-US" altLang="ko-KR" sz="1950" dirty="0">
+                <a:solidFill>
+                  <a:srgbClr val="334155"/>
+                </a:solidFill>
+                <a:latin typeface="Afacad Flux"/>
+                <a:ea typeface="Afacad Flux"/>
+                <a:cs typeface="Afacad Flux"/>
+                <a:sym typeface="Afacad Flux"/>
+              </a:rPr>
+              <a:t>AR </a:t>
+            </a:r>
+            <a:r>
+              <a:rPr lang="ko-KR" altLang="en-US" sz="1950" dirty="0">
+                <a:solidFill>
+                  <a:srgbClr val="334155"/>
+                </a:solidFill>
+                <a:latin typeface="Afacad Flux"/>
+                <a:ea typeface="Afacad Flux"/>
+                <a:cs typeface="Afacad Flux"/>
+                <a:sym typeface="Afacad Flux"/>
+              </a:rPr>
+              <a:t>소프트웨어에 대한 체험을 합니다</a:t>
+            </a:r>
+            <a:endParaRPr lang="en-US" altLang="ko-KR" sz="1950" dirty="0">
+              <a:solidFill>
+                <a:srgbClr val="334155"/>
+              </a:solidFill>
+              <a:latin typeface="Afacad Flux"/>
+              <a:ea typeface="Afacad Flux"/>
+              <a:cs typeface="Afacad Flux"/>
+              <a:sym typeface="Afacad Flux"/>
+            </a:endParaRPr>
+          </a:p>
+        </p:txBody>
+      </p:sp>
+      <p:sp>
+        <p:nvSpPr>
+          <p:cNvPr id="95" name="Google Shape;95;p14"/>
+          <p:cNvSpPr txBox="1"/>
+          <p:nvPr/>
+        </p:nvSpPr>
+        <p:spPr>
+          <a:xfrm>
+            <a:off x="571500" y="571500"/>
+            <a:ext cx="11601450" cy="600164"/>
+          </a:xfrm>
+          <a:prstGeom prst="rect">
+            <a:avLst/>
+          </a:prstGeom>
+          <a:noFill/>
+          <a:ln>
+            <a:noFill/>
+          </a:ln>
+        </p:spPr>
+        <p:txBody>
+          <a:bodyPr spcFirstLastPara="1" wrap="square" lIns="0" tIns="0" rIns="0" bIns="0" anchor="t" anchorCtr="0">
+            <a:spAutoFit/>
+          </a:bodyPr>
+          <a:lstStyle/>
+          <a:p>
+            <a:pPr lvl="0"/>
+            <a:r>
+              <a:rPr lang="ko-KR" altLang="en-US" sz="3900" b="1" dirty="0">
+                <a:solidFill>
+                  <a:srgbClr val="1E293B"/>
+                </a:solidFill>
+                <a:latin typeface="Comfortaa"/>
+                <a:ea typeface="Comfortaa"/>
+                <a:cs typeface="Comfortaa"/>
+                <a:sym typeface="Comfortaa"/>
+              </a:rPr>
+              <a:t>진도 나갈 페이지 </a:t>
+            </a:r>
+            <a:r>
+              <a:rPr lang="en-US" altLang="ko-KR" sz="3900" b="1" dirty="0">
+                <a:solidFill>
+                  <a:srgbClr val="1E293B"/>
+                </a:solidFill>
+                <a:latin typeface="Comfortaa"/>
+                <a:ea typeface="Comfortaa"/>
+                <a:cs typeface="Comfortaa"/>
+                <a:sym typeface="Comfortaa"/>
+              </a:rPr>
+              <a:t>: 6page~11page</a:t>
+            </a:r>
+            <a:endParaRPr dirty="0"/>
+          </a:p>
+        </p:txBody>
+      </p:sp>
+      <p:pic>
+        <p:nvPicPr>
+          <p:cNvPr id="1026" name="Picture 2" descr="AI수업이 아니라 위도우 기초 수업이야">
+            <a:extLst>
+              <a:ext uri="{FF2B5EF4-FFF2-40B4-BE49-F238E27FC236}">
+                <a16:creationId xmlns:a16="http://schemas.microsoft.com/office/drawing/2014/main" id="{937ADDF3-624B-EFEA-0313-4584C2781C94}"/>
+              </a:ext>
+            </a:extLst>
+          </p:cNvPr>
+          <p:cNvPicPr>
+            <a:picLocks noChangeAspect="1" noChangeArrowheads="1"/>
+          </p:cNvPicPr>
+          <p:nvPr/>
+        </p:nvPicPr>
+        <p:blipFill>
+          <a:blip r:embed="rId4">
+            <a:extLst>
+              <a:ext uri="{28A0092B-C50C-407E-A947-70E740481C1C}">
+                <a14:useLocalDpi xmlns:a14="http://schemas.microsoft.com/office/drawing/2010/main" val="0"/>
+              </a:ext>
+            </a:extLst>
+          </a:blip>
+          <a:srcRect/>
+          <a:stretch>
+            <a:fillRect/>
+          </a:stretch>
+        </p:blipFill>
+        <p:spPr bwMode="auto">
+          <a:xfrm>
+            <a:off x="700414" y="1653892"/>
+            <a:ext cx="4302690" cy="4302690"/>
+          </a:xfrm>
+          <a:prstGeom prst="rect">
+            <a:avLst/>
+          </a:prstGeom>
+          <a:noFill/>
+          <a:extLst>
+            <a:ext uri="{909E8E84-426E-40DD-AFC4-6F175D3DCCD1}">
+              <a14:hiddenFill xmlns:a14="http://schemas.microsoft.com/office/drawing/2010/main">
+                <a:solidFill>
+                  <a:srgbClr val="FFFFFF"/>
+                </a:solidFill>
+              </a14:hiddenFill>
+            </a:ext>
+          </a:extLst>
+        </p:spPr>
+      </p:pic>
+    </p:spTree>
+  </p:cSld>
+  <p:clrMapOvr>
+    <a:masterClrMapping/>
+  </p:clrMapOvr>
+</p:sld>
+</file>
+
+<file path=ppt/slides/slide20.xml><?xml version="1.0" encoding="utf-8"?>
+<p:sld xmlns:a="http://schemas.openxmlformats.org/drawingml/2006/main" xmlns:r="http://schemas.openxmlformats.org/officeDocument/2006/relationships" xmlns:p="http://schemas.openxmlformats.org/presentationml/2006/main">
+  <p:cSld>
+    <p:spTree>
+      <p:nvGrpSpPr>
+        <p:cNvPr id="1" name="Shape 113"/>
+        <p:cNvGrpSpPr/>
+        <p:nvPr/>
+      </p:nvGrpSpPr>
+      <p:grpSpPr>
+        <a:xfrm>
+          <a:off x="0" y="0"/>
+          <a:ext cx="0" cy="0"/>
+          <a:chOff x="0" y="0"/>
+          <a:chExt cx="0" cy="0"/>
+        </a:xfrm>
+      </p:grpSpPr>
+      <p:pic>
+        <p:nvPicPr>
+          <p:cNvPr id="114" name="Google Shape;114;p16" descr="image.png"/>
+          <p:cNvPicPr preferRelativeResize="0"/>
+          <p:nvPr/>
+        </p:nvPicPr>
+        <p:blipFill rotWithShape="1">
+          <a:blip r:embed="rId3">
+            <a:alphaModFix/>
+          </a:blip>
+          <a:srcRect/>
+          <a:stretch/>
+        </p:blipFill>
+        <p:spPr>
+          <a:xfrm>
+            <a:off x="0" y="0"/>
+            <a:ext cx="12192000" cy="6858000"/>
+          </a:xfrm>
+          <a:prstGeom prst="rect">
+            <a:avLst/>
+          </a:prstGeom>
+          <a:noFill/>
+          <a:ln>
+            <a:noFill/>
+          </a:ln>
+        </p:spPr>
+      </p:pic>
+      <p:sp>
+        <p:nvSpPr>
+          <p:cNvPr id="115" name="Google Shape;115;p16"/>
+          <p:cNvSpPr txBox="1"/>
+          <p:nvPr/>
+        </p:nvSpPr>
+        <p:spPr>
+          <a:xfrm>
+            <a:off x="3250644" y="1643062"/>
+            <a:ext cx="5690711" cy="923330"/>
+          </a:xfrm>
+          <a:prstGeom prst="rect">
+            <a:avLst/>
+          </a:prstGeom>
+          <a:noFill/>
+          <a:ln>
+            <a:noFill/>
+          </a:ln>
+        </p:spPr>
+        <p:txBody>
+          <a:bodyPr spcFirstLastPara="1" wrap="square" lIns="0" tIns="0" rIns="0" bIns="0" anchor="t" anchorCtr="0">
+            <a:spAutoFit/>
+          </a:bodyPr>
+          <a:lstStyle/>
+          <a:p>
+            <a:pPr marL="0" marR="0" lvl="0" indent="0" algn="ctr" rtl="0">
+              <a:spcBef>
+                <a:spcPts val="0"/>
+              </a:spcBef>
+              <a:spcAft>
+                <a:spcPts val="0"/>
+              </a:spcAft>
+              <a:buNone/>
+            </a:pPr>
+            <a:r>
+              <a:rPr lang="en-US" sz="6000" b="1" dirty="0">
+                <a:solidFill>
+                  <a:srgbClr val="FF823A"/>
+                </a:solidFill>
+                <a:latin typeface="Comfortaa"/>
+                <a:ea typeface="Comfortaa"/>
+                <a:cs typeface="Comfortaa"/>
+                <a:sym typeface="Comfortaa"/>
+              </a:rPr>
+              <a:t>2</a:t>
+            </a:r>
+            <a:r>
+              <a:rPr lang="ko-KR" altLang="en-US" sz="6000" b="1" i="0" u="none" strike="noStrike" cap="none" dirty="0">
+                <a:solidFill>
+                  <a:srgbClr val="FF823A"/>
+                </a:solidFill>
+                <a:latin typeface="Comfortaa"/>
+                <a:ea typeface="Comfortaa"/>
+                <a:cs typeface="Comfortaa"/>
+                <a:sym typeface="Comfortaa"/>
+              </a:rPr>
+              <a:t>번째 놀이</a:t>
+            </a:r>
+            <a:endParaRPr dirty="0"/>
+          </a:p>
+        </p:txBody>
+      </p:sp>
+      <p:sp>
+        <p:nvSpPr>
+          <p:cNvPr id="116" name="Google Shape;116;p16"/>
+          <p:cNvSpPr txBox="1"/>
+          <p:nvPr/>
+        </p:nvSpPr>
+        <p:spPr>
+          <a:xfrm>
+            <a:off x="155787" y="3230091"/>
+            <a:ext cx="11900746" cy="692497"/>
+          </a:xfrm>
+          <a:prstGeom prst="rect">
+            <a:avLst/>
+          </a:prstGeom>
+          <a:noFill/>
+          <a:ln>
+            <a:noFill/>
+          </a:ln>
+        </p:spPr>
+        <p:txBody>
+          <a:bodyPr spcFirstLastPara="1" wrap="square" lIns="0" tIns="0" rIns="0" bIns="0" anchor="t" anchorCtr="0">
+            <a:spAutoFit/>
+          </a:bodyPr>
+          <a:lstStyle/>
+          <a:p>
+            <a:pPr marL="0" marR="0" lvl="0" indent="0" algn="ctr" rtl="0">
+              <a:spcBef>
+                <a:spcPts val="0"/>
+              </a:spcBef>
+              <a:spcAft>
+                <a:spcPts val="0"/>
+              </a:spcAft>
+              <a:buNone/>
+            </a:pPr>
+            <a:r>
+              <a:rPr lang="en-US" sz="4500" b="1" i="0" u="none" strike="noStrike" cap="none" dirty="0">
+                <a:solidFill>
+                  <a:srgbClr val="334155"/>
+                </a:solidFill>
+                <a:latin typeface="Afacad Flux"/>
+                <a:ea typeface="Afacad Flux"/>
+                <a:cs typeface="Afacad Flux"/>
+                <a:sym typeface="Afacad Flux"/>
+              </a:rPr>
+              <a:t>AR</a:t>
+            </a:r>
+            <a:r>
+              <a:rPr lang="ko-KR" altLang="en-US" sz="4500" b="1" i="0" u="none" strike="noStrike" cap="none" dirty="0">
+                <a:solidFill>
+                  <a:srgbClr val="334155"/>
+                </a:solidFill>
+                <a:latin typeface="Afacad Flux"/>
+                <a:ea typeface="Afacad Flux"/>
+                <a:cs typeface="Afacad Flux"/>
+                <a:sym typeface="Afacad Flux"/>
+              </a:rPr>
+              <a:t>소프트웨어와 다양한 운영체제 체험하기</a:t>
+            </a:r>
+            <a:endParaRPr dirty="0"/>
+          </a:p>
+        </p:txBody>
+      </p:sp>
+      <p:sp>
+        <p:nvSpPr>
+          <p:cNvPr id="117" name="Google Shape;117;p16"/>
+          <p:cNvSpPr txBox="1"/>
+          <p:nvPr/>
+        </p:nvSpPr>
+        <p:spPr>
+          <a:xfrm>
+            <a:off x="3386137" y="4586287"/>
+            <a:ext cx="5419725" cy="323165"/>
+          </a:xfrm>
+          <a:prstGeom prst="rect">
+            <a:avLst/>
+          </a:prstGeom>
+          <a:noFill/>
+          <a:ln>
+            <a:noFill/>
+          </a:ln>
+        </p:spPr>
+        <p:txBody>
+          <a:bodyPr spcFirstLastPara="1" wrap="square" lIns="0" tIns="0" rIns="0" bIns="0" anchor="t" anchorCtr="0">
+            <a:spAutoFit/>
+          </a:bodyPr>
+          <a:lstStyle/>
+          <a:p>
+            <a:pPr marL="0" marR="0" lvl="0" indent="0" algn="ctr" rtl="0">
+              <a:spcBef>
+                <a:spcPts val="0"/>
+              </a:spcBef>
+              <a:spcAft>
+                <a:spcPts val="0"/>
+              </a:spcAft>
+              <a:buNone/>
+            </a:pPr>
+            <a:r>
+              <a:rPr lang="ko-KR" altLang="en-US" sz="2100" b="0" i="0" u="none" strike="noStrike" cap="none" dirty="0">
+                <a:solidFill>
+                  <a:srgbClr val="64748B"/>
+                </a:solidFill>
+                <a:latin typeface="Afacad Flux"/>
+                <a:ea typeface="Afacad Flux"/>
+                <a:cs typeface="Afacad Flux"/>
+                <a:sym typeface="Afacad Flux"/>
+              </a:rPr>
+              <a:t>재미있게 감상하기</a:t>
+            </a:r>
+            <a:endParaRPr dirty="0"/>
+          </a:p>
+        </p:txBody>
+      </p:sp>
+    </p:spTree>
+  </p:cSld>
+  <p:clrMapOvr>
+    <a:masterClrMapping/>
+  </p:clrMapOvr>
+</p:sld>
+</file>
+
+<file path=ppt/slides/slide21.xml><?xml version="1.0" encoding="utf-8"?>
+<p:sld xmlns:a="http://schemas.openxmlformats.org/drawingml/2006/main" xmlns:r="http://schemas.openxmlformats.org/officeDocument/2006/relationships" xmlns:p="http://schemas.openxmlformats.org/presentationml/2006/main">
+  <p:cSld>
+    <p:spTree>
+      <p:nvGrpSpPr>
+        <p:cNvPr id="1" name="Shape 172"/>
+        <p:cNvGrpSpPr/>
+        <p:nvPr/>
+      </p:nvGrpSpPr>
+      <p:grpSpPr>
+        <a:xfrm>
+          <a:off x="0" y="0"/>
+          <a:ext cx="0" cy="0"/>
+          <a:chOff x="0" y="0"/>
+          <a:chExt cx="0" cy="0"/>
+        </a:xfrm>
+      </p:grpSpPr>
+      <p:pic>
+        <p:nvPicPr>
+          <p:cNvPr id="173" name="Google Shape;173;p21" descr="image.png"/>
+          <p:cNvPicPr preferRelativeResize="0"/>
+          <p:nvPr/>
+        </p:nvPicPr>
+        <p:blipFill rotWithShape="1">
+          <a:blip r:embed="rId3">
+            <a:alphaModFix/>
+          </a:blip>
+          <a:srcRect/>
+          <a:stretch/>
+        </p:blipFill>
+        <p:spPr>
+          <a:xfrm>
+            <a:off x="0" y="0"/>
+            <a:ext cx="12192000" cy="6858000"/>
+          </a:xfrm>
+          <a:prstGeom prst="rect">
+            <a:avLst/>
+          </a:prstGeom>
+          <a:noFill/>
+          <a:ln>
+            <a:noFill/>
+          </a:ln>
+        </p:spPr>
+      </p:pic>
+      <p:sp>
+        <p:nvSpPr>
+          <p:cNvPr id="174" name="Google Shape;174;p21"/>
+          <p:cNvSpPr txBox="1"/>
+          <p:nvPr/>
+        </p:nvSpPr>
+        <p:spPr>
+          <a:xfrm>
+            <a:off x="3565683" y="1643062"/>
+            <a:ext cx="5060632" cy="923330"/>
+          </a:xfrm>
+          <a:prstGeom prst="rect">
+            <a:avLst/>
+          </a:prstGeom>
+          <a:noFill/>
+          <a:ln>
+            <a:noFill/>
+          </a:ln>
+        </p:spPr>
+        <p:txBody>
+          <a:bodyPr spcFirstLastPara="1" wrap="square" lIns="0" tIns="0" rIns="0" bIns="0" anchor="t" anchorCtr="0">
+            <a:spAutoFit/>
+          </a:bodyPr>
+          <a:lstStyle/>
+          <a:p>
+            <a:pPr lvl="0" algn="ctr"/>
+            <a:r>
+              <a:rPr lang="en-US" sz="6000" b="1" i="0" u="none" strike="noStrike" cap="none" dirty="0">
+                <a:solidFill>
+                  <a:srgbClr val="FFFFFF"/>
+                </a:solidFill>
+                <a:latin typeface="Comfortaa"/>
+                <a:ea typeface="Comfortaa"/>
+                <a:cs typeface="Comfortaa"/>
+                <a:sym typeface="Comfortaa"/>
+              </a:rPr>
+              <a:t>3</a:t>
+            </a:r>
+            <a:r>
+              <a:rPr lang="ko-KR" altLang="en-US" sz="6000" b="1" dirty="0">
+                <a:solidFill>
+                  <a:srgbClr val="FFFFFF"/>
+                </a:solidFill>
+                <a:latin typeface="Comfortaa"/>
+                <a:ea typeface="Comfortaa"/>
+                <a:cs typeface="Comfortaa"/>
+                <a:sym typeface="Comfortaa"/>
+              </a:rPr>
+              <a:t> 번째 놀이</a:t>
+            </a:r>
+            <a:endParaRPr dirty="0"/>
+          </a:p>
+        </p:txBody>
+      </p:sp>
+      <p:sp>
+        <p:nvSpPr>
+          <p:cNvPr id="175" name="Google Shape;175;p21"/>
+          <p:cNvSpPr txBox="1"/>
+          <p:nvPr/>
+        </p:nvSpPr>
+        <p:spPr>
+          <a:xfrm>
+            <a:off x="3565683" y="3243262"/>
+            <a:ext cx="5060632" cy="692497"/>
+          </a:xfrm>
+          <a:prstGeom prst="rect">
+            <a:avLst/>
+          </a:prstGeom>
+          <a:noFill/>
+          <a:ln>
+            <a:noFill/>
+          </a:ln>
+        </p:spPr>
+        <p:txBody>
+          <a:bodyPr spcFirstLastPara="1" wrap="square" lIns="0" tIns="0" rIns="0" bIns="0" anchor="t" anchorCtr="0">
+            <a:spAutoFit/>
+          </a:bodyPr>
+          <a:lstStyle/>
+          <a:p>
+            <a:pPr marL="0" marR="0" lvl="0" indent="0" algn="ctr" rtl="0">
+              <a:spcBef>
+                <a:spcPts val="0"/>
+              </a:spcBef>
+              <a:spcAft>
+                <a:spcPts val="0"/>
+              </a:spcAft>
+              <a:buNone/>
+            </a:pPr>
+            <a:r>
+              <a:rPr lang="ko-KR" altLang="en-US" sz="4500" b="1" i="0" u="none" strike="noStrike" cap="none" dirty="0">
+                <a:solidFill>
+                  <a:srgbClr val="FFFFFF"/>
+                </a:solidFill>
+                <a:latin typeface="Afacad Flux"/>
+                <a:ea typeface="Afacad Flux"/>
+                <a:cs typeface="Afacad Flux"/>
+                <a:sym typeface="Afacad Flux"/>
+              </a:rPr>
+              <a:t>리눅스 체험하기</a:t>
+            </a:r>
+            <a:endParaRPr dirty="0"/>
+          </a:p>
+        </p:txBody>
+      </p:sp>
+      <p:sp>
+        <p:nvSpPr>
+          <p:cNvPr id="176" name="Google Shape;176;p21"/>
+          <p:cNvSpPr txBox="1"/>
+          <p:nvPr/>
+        </p:nvSpPr>
+        <p:spPr>
+          <a:xfrm>
+            <a:off x="3686175" y="4586287"/>
+            <a:ext cx="4819650" cy="323165"/>
+          </a:xfrm>
+          <a:prstGeom prst="rect">
+            <a:avLst/>
+          </a:prstGeom>
+          <a:noFill/>
+          <a:ln>
+            <a:noFill/>
+          </a:ln>
+        </p:spPr>
+        <p:txBody>
+          <a:bodyPr spcFirstLastPara="1" wrap="square" lIns="0" tIns="0" rIns="0" bIns="0" anchor="t" anchorCtr="0">
+            <a:spAutoFit/>
+          </a:bodyPr>
+          <a:lstStyle/>
+          <a:p>
+            <a:pPr marL="0" marR="0" lvl="0" indent="0" algn="ctr" rtl="0">
+              <a:spcBef>
+                <a:spcPts val="0"/>
+              </a:spcBef>
+              <a:spcAft>
+                <a:spcPts val="0"/>
+              </a:spcAft>
+              <a:buNone/>
+            </a:pPr>
+            <a:r>
+              <a:rPr lang="ko-KR" altLang="en-US" sz="2100" b="0" i="0" u="none" strike="noStrike" cap="none" dirty="0">
+                <a:solidFill>
+                  <a:srgbClr val="E2E8F0"/>
+                </a:solidFill>
+                <a:latin typeface="Afacad Flux"/>
+                <a:ea typeface="Afacad Flux"/>
+                <a:cs typeface="Afacad Flux"/>
+                <a:sym typeface="Afacad Flux"/>
+              </a:rPr>
+              <a:t>그림이 없는 컴퓨터가 있어요</a:t>
+            </a:r>
+            <a:endParaRPr dirty="0"/>
+          </a:p>
+        </p:txBody>
+      </p:sp>
+    </p:spTree>
+  </p:cSld>
+  <p:clrMapOvr>
+    <a:masterClrMapping/>
+  </p:clrMapOvr>
+</p:sld>
+</file>
+
+<file path=ppt/slides/slide22.xml><?xml version="1.0" encoding="utf-8"?>
+<p:sld xmlns:a="http://schemas.openxmlformats.org/drawingml/2006/main" xmlns:r="http://schemas.openxmlformats.org/officeDocument/2006/relationships" xmlns:p="http://schemas.openxmlformats.org/presentationml/2006/main">
+  <p:cSld>
+    <p:spTree>
+      <p:nvGrpSpPr>
+        <p:cNvPr id="1" name="Shape 172">
+          <a:extLst>
+            <a:ext uri="{FF2B5EF4-FFF2-40B4-BE49-F238E27FC236}">
+              <a16:creationId xmlns:a16="http://schemas.microsoft.com/office/drawing/2014/main" id="{B04B0039-6531-76D7-47B4-31DF0BBA66E6}"/>
+            </a:ext>
+          </a:extLst>
+        </p:cNvPr>
+        <p:cNvGrpSpPr/>
+        <p:nvPr/>
+      </p:nvGrpSpPr>
+      <p:grpSpPr>
+        <a:xfrm>
+          <a:off x="0" y="0"/>
+          <a:ext cx="0" cy="0"/>
+          <a:chOff x="0" y="0"/>
+          <a:chExt cx="0" cy="0"/>
+        </a:xfrm>
+      </p:grpSpPr>
+      <p:pic>
+        <p:nvPicPr>
+          <p:cNvPr id="173" name="Google Shape;173;p21" descr="image.png">
+            <a:extLst>
+              <a:ext uri="{FF2B5EF4-FFF2-40B4-BE49-F238E27FC236}">
+                <a16:creationId xmlns:a16="http://schemas.microsoft.com/office/drawing/2014/main" id="{A325D414-37EC-A3B9-15EA-AFA4D31BDD2E}"/>
+              </a:ext>
+            </a:extLst>
+          </p:cNvPr>
+          <p:cNvPicPr preferRelativeResize="0"/>
+          <p:nvPr/>
+        </p:nvPicPr>
+        <p:blipFill rotWithShape="1">
+          <a:blip r:embed="rId3">
+            <a:alphaModFix/>
+          </a:blip>
+          <a:srcRect/>
+          <a:stretch/>
+        </p:blipFill>
+        <p:spPr>
+          <a:xfrm>
+            <a:off x="0" y="0"/>
+            <a:ext cx="12192000" cy="6858000"/>
+          </a:xfrm>
+          <a:prstGeom prst="rect">
+            <a:avLst/>
+          </a:prstGeom>
+          <a:noFill/>
+          <a:ln>
+            <a:noFill/>
+          </a:ln>
+        </p:spPr>
+      </p:pic>
+      <p:sp>
+        <p:nvSpPr>
+          <p:cNvPr id="174" name="Google Shape;174;p21">
+            <a:extLst>
+              <a:ext uri="{FF2B5EF4-FFF2-40B4-BE49-F238E27FC236}">
+                <a16:creationId xmlns:a16="http://schemas.microsoft.com/office/drawing/2014/main" id="{3D7EEC0B-EBC7-19FC-047E-DB28E4D0AEBD}"/>
+              </a:ext>
+            </a:extLst>
+          </p:cNvPr>
+          <p:cNvSpPr txBox="1"/>
+          <p:nvPr/>
+        </p:nvSpPr>
+        <p:spPr>
+          <a:xfrm>
+            <a:off x="3565683" y="1643062"/>
+            <a:ext cx="5060632" cy="923330"/>
+          </a:xfrm>
+          <a:prstGeom prst="rect">
+            <a:avLst/>
+          </a:prstGeom>
+          <a:noFill/>
+          <a:ln>
+            <a:noFill/>
+          </a:ln>
+        </p:spPr>
+        <p:txBody>
+          <a:bodyPr spcFirstLastPara="1" wrap="square" lIns="0" tIns="0" rIns="0" bIns="0" anchor="t" anchorCtr="0">
+            <a:spAutoFit/>
+          </a:bodyPr>
+          <a:lstStyle/>
+          <a:p>
+            <a:pPr lvl="0" algn="ctr"/>
+            <a:r>
+              <a:rPr lang="ko-KR" altLang="en-US" sz="6000" b="1" i="0" u="none" strike="noStrike" cap="none" dirty="0">
+                <a:solidFill>
+                  <a:srgbClr val="FFFFFF"/>
+                </a:solidFill>
+                <a:latin typeface="Comfortaa"/>
+                <a:ea typeface="Comfortaa"/>
+                <a:cs typeface="Comfortaa"/>
+                <a:sym typeface="Comfortaa"/>
+              </a:rPr>
+              <a:t>숙제</a:t>
+            </a:r>
+            <a:endParaRPr dirty="0"/>
+          </a:p>
+        </p:txBody>
+      </p:sp>
+      <p:sp>
+        <p:nvSpPr>
+          <p:cNvPr id="175" name="Google Shape;175;p21">
+            <a:extLst>
+              <a:ext uri="{FF2B5EF4-FFF2-40B4-BE49-F238E27FC236}">
+                <a16:creationId xmlns:a16="http://schemas.microsoft.com/office/drawing/2014/main" id="{A69C479C-6701-DECF-6FD4-429B46630D0B}"/>
+              </a:ext>
+            </a:extLst>
+          </p:cNvPr>
+          <p:cNvSpPr txBox="1"/>
+          <p:nvPr/>
+        </p:nvSpPr>
+        <p:spPr>
+          <a:xfrm>
+            <a:off x="2324708" y="3317769"/>
+            <a:ext cx="7542582" cy="692497"/>
+          </a:xfrm>
+          <a:prstGeom prst="rect">
+            <a:avLst/>
+          </a:prstGeom>
+          <a:noFill/>
+          <a:ln>
+            <a:noFill/>
+          </a:ln>
+        </p:spPr>
+        <p:txBody>
+          <a:bodyPr spcFirstLastPara="1" wrap="square" lIns="0" tIns="0" rIns="0" bIns="0" anchor="t" anchorCtr="0">
+            <a:spAutoFit/>
+          </a:bodyPr>
+          <a:lstStyle/>
+          <a:p>
+            <a:pPr marL="0" marR="0" lvl="0" indent="0" algn="ctr" rtl="0">
+              <a:spcBef>
+                <a:spcPts val="0"/>
+              </a:spcBef>
+              <a:spcAft>
+                <a:spcPts val="0"/>
+              </a:spcAft>
+              <a:buNone/>
+            </a:pPr>
+            <a:r>
+              <a:rPr lang="ko-KR" altLang="en-US" sz="4500" b="1" i="0" u="none" strike="noStrike" cap="none" dirty="0" err="1">
+                <a:solidFill>
+                  <a:srgbClr val="FFFFFF"/>
+                </a:solidFill>
+                <a:latin typeface="Afacad Flux"/>
+                <a:ea typeface="Afacad Flux"/>
+                <a:cs typeface="Afacad Flux"/>
+                <a:sym typeface="Afacad Flux"/>
+              </a:rPr>
+              <a:t>부모님이랑</a:t>
+            </a:r>
+            <a:r>
+              <a:rPr lang="ko-KR" altLang="en-US" sz="4500" b="1" i="0" u="none" strike="noStrike" cap="none" dirty="0">
+                <a:solidFill>
+                  <a:srgbClr val="FFFFFF"/>
+                </a:solidFill>
+                <a:latin typeface="Afacad Flux"/>
+                <a:ea typeface="Afacad Flux"/>
+                <a:cs typeface="Afacad Flux"/>
+                <a:sym typeface="Afacad Flux"/>
+              </a:rPr>
+              <a:t> 구글계정 만들기</a:t>
+            </a:r>
+            <a:endParaRPr lang="ko-KR" altLang="en-US" dirty="0"/>
+          </a:p>
+        </p:txBody>
+      </p:sp>
+    </p:spTree>
+    <p:extLst>
+      <p:ext uri="{BB962C8B-B14F-4D97-AF65-F5344CB8AC3E}">
+        <p14:creationId xmlns:p14="http://schemas.microsoft.com/office/powerpoint/2010/main" val="1351045123"/>
+      </p:ext>
+    </p:extLst>
+  </p:cSld>
+  <p:clrMapOvr>
+    <a:masterClrMapping/>
+  </p:clrMapOvr>
+</p:sld>
+</file>
+
+<file path=ppt/slides/slide3.xml><?xml version="1.0" encoding="utf-8"?>
 <p:sld xmlns:a="http://schemas.openxmlformats.org/drawingml/2006/main" xmlns:r="http://schemas.openxmlformats.org/officeDocument/2006/relationships" xmlns:p="http://schemas.openxmlformats.org/presentationml/2006/main">
   <p:cSld>
     <p:spTree>
@@ -13457,7 +19086,7 @@
 </p:sld>
 </file>
 
-<file path=ppt/slides/slide5.xml><?xml version="1.0" encoding="utf-8"?>
+<file path=ppt/slides/slide4.xml><?xml version="1.0" encoding="utf-8"?>
 <p:sld xmlns:a="http://schemas.openxmlformats.org/drawingml/2006/main" xmlns:r="http://schemas.openxmlformats.org/officeDocument/2006/relationships" xmlns:p="http://schemas.openxmlformats.org/presentationml/2006/main">
   <p:cSld>
     <p:spTree>
@@ -13636,7 +19265,7 @@
 </p:sld>
 </file>
 
-<file path=ppt/slides/slide6.xml><?xml version="1.0" encoding="utf-8"?>
+<file path=ppt/slides/slide5.xml><?xml version="1.0" encoding="utf-8"?>
 <p:sld xmlns:a="http://schemas.openxmlformats.org/drawingml/2006/main" xmlns:r="http://schemas.openxmlformats.org/officeDocument/2006/relationships" xmlns:p="http://schemas.openxmlformats.org/presentationml/2006/main">
   <p:cSld>
     <p:spTree>
@@ -13706,8 +19335,8 @@
         </p:nvSpPr>
         <p:spPr>
           <a:xfrm>
-            <a:off x="4352306" y="3651759"/>
-            <a:ext cx="7681872" cy="738664"/>
+            <a:off x="5260932" y="3054905"/>
+            <a:ext cx="6723142" cy="738664"/>
           </a:xfrm>
           <a:prstGeom prst="rect">
             <a:avLst/>
@@ -13723,7 +19352,7 @@
           </a:bodyPr>
           <a:lstStyle/>
           <a:p>
-            <a:pPr lvl="0" algn="ctr"/>
+            <a:pPr lvl="0"/>
             <a:r>
               <a:rPr lang="ko-KR" altLang="en-US" sz="2400" dirty="0">
                 <a:solidFill>
@@ -13734,31 +19363,7 @@
                 <a:cs typeface="Afacad Flux"/>
                 <a:sym typeface="Afacad Flux"/>
               </a:rPr>
-              <a:t>책상 위 정해진 위치에 놓고 사용하는 </a:t>
-            </a:r>
-            <a:endParaRPr lang="en-US" altLang="ko-KR" sz="2400" dirty="0">
-              <a:solidFill>
-                <a:srgbClr val="334155"/>
-              </a:solidFill>
-              <a:latin typeface="Afacad Flux"/>
-              <a:ea typeface="Afacad Flux"/>
-              <a:cs typeface="Afacad Flux"/>
-              <a:sym typeface="Afacad Flux"/>
-            </a:endParaRPr>
-          </a:p>
-          <a:p>
-            <a:pPr lvl="0" algn="ctr"/>
-            <a:r>
-              <a:rPr lang="ko-KR" altLang="en-US" sz="2400" dirty="0">
-                <a:solidFill>
-                  <a:srgbClr val="334155"/>
-                </a:solidFill>
-                <a:latin typeface="Afacad Flux"/>
-                <a:ea typeface="Afacad Flux"/>
-                <a:cs typeface="Afacad Flux"/>
-                <a:sym typeface="Afacad Flux"/>
-              </a:rPr>
-              <a:t>개인용 컴퓨터를 말합니다</a:t>
+              <a:t>책상 위 정해진 위치에 놓고 사용하는 개인용 컴퓨터를 말합니다</a:t>
             </a:r>
             <a:endParaRPr lang="en-US" altLang="ko-KR" sz="2400" dirty="0">
               <a:solidFill>
@@ -13876,7 +19481,7 @@
 </p:sld>
 </file>
 
-<file path=ppt/slides/slide7.xml><?xml version="1.0" encoding="utf-8"?>
+<file path=ppt/slides/slide6.xml><?xml version="1.0" encoding="utf-8"?>
 <p:sld xmlns:a="http://schemas.openxmlformats.org/drawingml/2006/main" xmlns:r="http://schemas.openxmlformats.org/officeDocument/2006/relationships" xmlns:p="http://schemas.openxmlformats.org/presentationml/2006/main">
   <p:cSld>
     <p:spTree>
@@ -13946,8 +19551,8 @@
         </p:nvSpPr>
         <p:spPr>
           <a:xfrm>
-            <a:off x="3630440" y="3651759"/>
-            <a:ext cx="8403738" cy="738664"/>
+            <a:off x="4571998" y="3282426"/>
+            <a:ext cx="7600951" cy="738664"/>
           </a:xfrm>
           <a:prstGeom prst="rect">
             <a:avLst/>
@@ -13963,7 +19568,7 @@
           </a:bodyPr>
           <a:lstStyle/>
           <a:p>
-            <a:pPr lvl="0" algn="ctr"/>
+            <a:pPr lvl="0"/>
             <a:r>
               <a:rPr lang="ko-KR" altLang="en-US" sz="2400" dirty="0">
                 <a:solidFill>
@@ -13974,20 +19579,23 @@
                 <a:cs typeface="Afacad Flux"/>
                 <a:sym typeface="Afacad Flux"/>
               </a:rPr>
-              <a:t>데스크톱보다 크기가 작고 가볍기 때문에 </a:t>
-            </a:r>
-            <a:endParaRPr lang="en-US" altLang="ko-KR" sz="2400" dirty="0">
-              <a:solidFill>
-                <a:srgbClr val="334155"/>
-              </a:solidFill>
-              <a:latin typeface="Afacad Flux"/>
-              <a:ea typeface="Afacad Flux"/>
-              <a:cs typeface="Afacad Flux"/>
-              <a:sym typeface="Afacad Flux"/>
-            </a:endParaRPr>
+              <a:t>데스크톱보다 크기가 작고 가볍기 때문에</a:t>
+            </a:r>
+            <a:r>
+              <a:rPr lang="en-US" altLang="ko-KR" sz="2400" dirty="0">
+                <a:solidFill>
+                  <a:srgbClr val="334155"/>
+                </a:solidFill>
+                <a:latin typeface="Afacad Flux"/>
+                <a:ea typeface="Afacad Flux"/>
+                <a:cs typeface="Afacad Flux"/>
+                <a:sym typeface="Afacad Flux"/>
+              </a:rPr>
+              <a:t> </a:t>
+            </a:r>
           </a:p>
           <a:p>
-            <a:pPr lvl="0" algn="ctr"/>
+            <a:pPr lvl="0"/>
             <a:r>
               <a:rPr lang="ko-KR" altLang="en-US" sz="2400" dirty="0">
                 <a:solidFill>
@@ -14116,7 +19724,7 @@
 </p:sld>
 </file>
 
-<file path=ppt/slides/slide8.xml><?xml version="1.0" encoding="utf-8"?>
+<file path=ppt/slides/slide7.xml><?xml version="1.0" encoding="utf-8"?>
 <p:sld xmlns:a="http://schemas.openxmlformats.org/drawingml/2006/main" xmlns:r="http://schemas.openxmlformats.org/officeDocument/2006/relationships" xmlns:p="http://schemas.openxmlformats.org/presentationml/2006/main">
   <p:cSld>
     <p:spTree>
@@ -14461,7 +20069,7 @@
 </p:sld>
 </file>
 
-<file path=ppt/slides/slide9.xml><?xml version="1.0" encoding="utf-8"?>
+<file path=ppt/slides/slide8.xml><?xml version="1.0" encoding="utf-8"?>
 <p:sld xmlns:a="http://schemas.openxmlformats.org/drawingml/2006/main" xmlns:r="http://schemas.openxmlformats.org/officeDocument/2006/relationships" xmlns:p="http://schemas.openxmlformats.org/presentationml/2006/main">
   <p:cSld>
     <p:spTree>
@@ -14615,10 +20223,10 @@
                 <a:cs typeface="Afacad Flux"/>
                 <a:sym typeface="Afacad Flux"/>
               </a:rPr>
-              <a:t>왜냐하면 노트북은 가볍고 들고 다니기 좋지만</a:t>
-            </a:r>
-            <a:r>
-              <a:rPr lang="en-US" altLang="ko-KR" sz="1950" dirty="0">
+              <a:t>왜냐하면 </a:t>
+            </a:r>
+            <a:r>
+              <a:rPr lang="ko-KR" altLang="en-US" sz="1950" b="1" dirty="0">
                 <a:solidFill>
                   <a:srgbClr val="334155"/>
                 </a:solidFill>
@@ -14627,9 +20235,33 @@
                 <a:cs typeface="Afacad Flux"/>
                 <a:sym typeface="Afacad Flux"/>
               </a:rPr>
+              <a:t>노트북은 가볍고 들고 다니기 좋지만</a:t>
+            </a:r>
+            <a:r>
+              <a:rPr lang="en-US" altLang="ko-KR" sz="1950" b="1" dirty="0">
+                <a:solidFill>
+                  <a:srgbClr val="334155"/>
+                </a:solidFill>
+                <a:latin typeface="Afacad Flux"/>
+                <a:ea typeface="Afacad Flux"/>
+                <a:cs typeface="Afacad Flux"/>
+                <a:sym typeface="Afacad Flux"/>
+              </a:rPr>
               <a:t>, </a:t>
             </a:r>
             <a:r>
+              <a:rPr lang="ko-KR" altLang="en-US" sz="1950" b="1" dirty="0">
+                <a:solidFill>
+                  <a:srgbClr val="334155"/>
+                </a:solidFill>
+                <a:latin typeface="Afacad Flux"/>
+                <a:ea typeface="Afacad Flux"/>
+                <a:cs typeface="Afacad Flux"/>
+                <a:sym typeface="Afacad Flux"/>
+              </a:rPr>
+              <a:t>같은 가격의 데스크톱에 비해 성능이 낮을 수 있고 고장 났을 때 부품을 바꾸기가 어렵다는 단점</a:t>
+            </a:r>
+            <a:r>
               <a:rPr lang="ko-KR" altLang="en-US" sz="1950" dirty="0">
                 <a:solidFill>
                   <a:srgbClr val="334155"/>
@@ -14639,7 +20271,7 @@
                 <a:cs typeface="Afacad Flux"/>
                 <a:sym typeface="Afacad Flux"/>
               </a:rPr>
-              <a:t>같은 가격의 데스크톱에 비해 성능이 낮을 수 있고 고장 났을 때 부품을 바꾸기가 어렵다는 단점도 있습니다</a:t>
+              <a:t>도 있습니다</a:t>
             </a:r>
             <a:r>
               <a:rPr lang="en-US" altLang="ko-KR" sz="1950" dirty="0">
@@ -14678,10 +20310,10 @@
                 <a:cs typeface="Afacad Flux"/>
                 <a:sym typeface="Afacad Flux"/>
               </a:rPr>
-              <a:t>만약 컴퓨터의 저장 공간을 늘리고 싶다면 데스크톱은 필요한 부품만 사서 직접 끼우기 쉽지만</a:t>
-            </a:r>
-            <a:r>
-              <a:rPr lang="en-US" altLang="ko-KR" sz="1950" dirty="0">
+              <a:t>만약 </a:t>
+            </a:r>
+            <a:r>
+              <a:rPr lang="ko-KR" altLang="en-US" sz="1950" b="1" dirty="0">
                 <a:solidFill>
                   <a:srgbClr val="334155"/>
                 </a:solidFill>
@@ -14690,9 +20322,33 @@
                 <a:cs typeface="Afacad Flux"/>
                 <a:sym typeface="Afacad Flux"/>
               </a:rPr>
+              <a:t>컴퓨터의 저장 공간을 늘리고 싶다면 데스크톱은 필요한 부품만 사서 직접 끼우기 쉽지만</a:t>
+            </a:r>
+            <a:r>
+              <a:rPr lang="en-US" altLang="ko-KR" sz="1950" b="1" dirty="0">
+                <a:solidFill>
+                  <a:srgbClr val="334155"/>
+                </a:solidFill>
+                <a:latin typeface="Afacad Flux"/>
+                <a:ea typeface="Afacad Flux"/>
+                <a:cs typeface="Afacad Flux"/>
+                <a:sym typeface="Afacad Flux"/>
+              </a:rPr>
               <a:t>, </a:t>
             </a:r>
             <a:r>
+              <a:rPr lang="ko-KR" altLang="en-US" sz="1950" b="1" dirty="0">
+                <a:solidFill>
+                  <a:srgbClr val="334155"/>
+                </a:solidFill>
+                <a:latin typeface="Afacad Flux"/>
+                <a:ea typeface="Afacad Flux"/>
+                <a:cs typeface="Afacad Flux"/>
+                <a:sym typeface="Afacad Flux"/>
+              </a:rPr>
+              <a:t>노트북은 부품을 바꾸기 까다로워 전문가의 도움을 받아야 하는 경우</a:t>
+            </a:r>
+            <a:r>
               <a:rPr lang="ko-KR" altLang="en-US" sz="1950" dirty="0">
                 <a:solidFill>
                   <a:srgbClr val="334155"/>
@@ -14702,7 +20358,7 @@
                 <a:cs typeface="Afacad Flux"/>
                 <a:sym typeface="Afacad Flux"/>
               </a:rPr>
-              <a:t>노트북은 부품을 바꾸기 까다로워 전문가의 도움을 받아야 하는 경우가 많기 때문입니다</a:t>
+              <a:t>가 많기 때문입니다</a:t>
             </a:r>
             <a:r>
               <a:rPr lang="en-US" altLang="ko-KR" sz="1950" dirty="0">
@@ -14813,6 +20469,297 @@
     <p:extLst>
       <p:ext uri="{BB962C8B-B14F-4D97-AF65-F5344CB8AC3E}">
         <p14:creationId xmlns:p14="http://schemas.microsoft.com/office/powerpoint/2010/main" val="3362518502"/>
+      </p:ext>
+    </p:extLst>
+  </p:cSld>
+  <p:clrMapOvr>
+    <a:masterClrMapping/>
+  </p:clrMapOvr>
+</p:sld>
+</file>
+
+<file path=ppt/slides/slide9.xml><?xml version="1.0" encoding="utf-8"?>
+<p:sld xmlns:a="http://schemas.openxmlformats.org/drawingml/2006/main" xmlns:r="http://schemas.openxmlformats.org/officeDocument/2006/relationships" xmlns:p="http://schemas.openxmlformats.org/presentationml/2006/main">
+  <p:cSld>
+    <p:spTree>
+      <p:nvGrpSpPr>
+        <p:cNvPr id="1" name="Shape 90">
+          <a:extLst>
+            <a:ext uri="{FF2B5EF4-FFF2-40B4-BE49-F238E27FC236}">
+              <a16:creationId xmlns:a16="http://schemas.microsoft.com/office/drawing/2014/main" id="{79B8B534-9E5C-65F8-F434-CEF5CE25F903}"/>
+            </a:ext>
+          </a:extLst>
+        </p:cNvPr>
+        <p:cNvGrpSpPr/>
+        <p:nvPr/>
+      </p:nvGrpSpPr>
+      <p:grpSpPr>
+        <a:xfrm>
+          <a:off x="0" y="0"/>
+          <a:ext cx="0" cy="0"/>
+          <a:chOff x="0" y="0"/>
+          <a:chExt cx="0" cy="0"/>
+        </a:xfrm>
+      </p:grpSpPr>
+      <p:pic>
+        <p:nvPicPr>
+          <p:cNvPr id="91" name="Google Shape;91;p14" descr="image.png">
+            <a:extLst>
+              <a:ext uri="{FF2B5EF4-FFF2-40B4-BE49-F238E27FC236}">
+                <a16:creationId xmlns:a16="http://schemas.microsoft.com/office/drawing/2014/main" id="{2C27041A-5A4F-6B29-106D-9930E2F39C4D}"/>
+              </a:ext>
+            </a:extLst>
+          </p:cNvPr>
+          <p:cNvPicPr preferRelativeResize="0"/>
+          <p:nvPr/>
+        </p:nvPicPr>
+        <p:blipFill rotWithShape="1">
+          <a:blip r:embed="rId3">
+            <a:alphaModFix/>
+          </a:blip>
+          <a:srcRect/>
+          <a:stretch/>
+        </p:blipFill>
+        <p:spPr>
+          <a:xfrm>
+            <a:off x="0" y="-4763"/>
+            <a:ext cx="12192000" cy="6858000"/>
+          </a:xfrm>
+          <a:prstGeom prst="rect">
+            <a:avLst/>
+          </a:prstGeom>
+          <a:noFill/>
+          <a:ln>
+            <a:noFill/>
+          </a:ln>
+        </p:spPr>
+      </p:pic>
+      <p:sp>
+        <p:nvSpPr>
+          <p:cNvPr id="94" name="Google Shape;94;p14">
+            <a:extLst>
+              <a:ext uri="{FF2B5EF4-FFF2-40B4-BE49-F238E27FC236}">
+                <a16:creationId xmlns:a16="http://schemas.microsoft.com/office/drawing/2014/main" id="{8273F822-BEBB-5ADA-D069-EF573D88B6C8}"/>
+              </a:ext>
+            </a:extLst>
+          </p:cNvPr>
+          <p:cNvSpPr txBox="1"/>
+          <p:nvPr/>
+        </p:nvSpPr>
+        <p:spPr>
+          <a:xfrm>
+            <a:off x="4168415" y="3025458"/>
+            <a:ext cx="7681872" cy="1107996"/>
+          </a:xfrm>
+          <a:prstGeom prst="rect">
+            <a:avLst/>
+          </a:prstGeom>
+          <a:noFill/>
+          <a:ln>
+            <a:noFill/>
+          </a:ln>
+        </p:spPr>
+        <p:txBody>
+          <a:bodyPr spcFirstLastPara="1" wrap="square" lIns="0" tIns="0" rIns="0" bIns="0" anchor="t" anchorCtr="0">
+            <a:spAutoFit/>
+          </a:bodyPr>
+          <a:lstStyle/>
+          <a:p>
+            <a:pPr lvl="0"/>
+            <a:r>
+              <a:rPr lang="ko-KR" altLang="en-US" sz="2400" dirty="0">
+                <a:solidFill>
+                  <a:srgbClr val="334155"/>
+                </a:solidFill>
+                <a:latin typeface="Afacad Flux"/>
+                <a:ea typeface="Afacad Flux"/>
+                <a:cs typeface="Afacad Flux"/>
+                <a:sym typeface="Afacad Flux"/>
+              </a:rPr>
+              <a:t>안드로이드 태블릿은 구글이 개발한 안드로이드 운영체제를 사용하는 </a:t>
+            </a:r>
+            <a:r>
+              <a:rPr lang="ko-KR" altLang="en-US" sz="2400" dirty="0" err="1">
+                <a:solidFill>
+                  <a:srgbClr val="334155"/>
+                </a:solidFill>
+                <a:latin typeface="Afacad Flux"/>
+                <a:ea typeface="Afacad Flux"/>
+                <a:cs typeface="Afacad Flux"/>
+                <a:sym typeface="Afacad Flux"/>
+              </a:rPr>
+              <a:t>태볼릿이고</a:t>
+            </a:r>
+            <a:r>
+              <a:rPr lang="en-US" altLang="ko-KR" sz="2400" dirty="0">
+                <a:solidFill>
+                  <a:srgbClr val="334155"/>
+                </a:solidFill>
+                <a:latin typeface="Afacad Flux"/>
+                <a:ea typeface="Afacad Flux"/>
+                <a:cs typeface="Afacad Flux"/>
+                <a:sym typeface="Afacad Flux"/>
+              </a:rPr>
+              <a:t>, IOS </a:t>
+            </a:r>
+            <a:r>
+              <a:rPr lang="ko-KR" altLang="en-US" sz="2400" dirty="0" err="1">
+                <a:solidFill>
+                  <a:srgbClr val="334155"/>
+                </a:solidFill>
+                <a:latin typeface="Afacad Flux"/>
+                <a:ea typeface="Afacad Flux"/>
+                <a:cs typeface="Afacad Flux"/>
+                <a:sym typeface="Afacad Flux"/>
+              </a:rPr>
+              <a:t>태블릿는</a:t>
+            </a:r>
+            <a:r>
+              <a:rPr lang="ko-KR" altLang="en-US" sz="2400" dirty="0">
+                <a:solidFill>
+                  <a:srgbClr val="334155"/>
+                </a:solidFill>
+                <a:latin typeface="Afacad Flux"/>
+                <a:ea typeface="Afacad Flux"/>
+                <a:cs typeface="Afacad Flux"/>
+                <a:sym typeface="Afacad Flux"/>
+              </a:rPr>
+              <a:t> 애플이 개발한 </a:t>
+            </a:r>
+            <a:r>
+              <a:rPr lang="en-US" altLang="ko-KR" sz="2400" dirty="0">
+                <a:solidFill>
+                  <a:srgbClr val="334155"/>
+                </a:solidFill>
+                <a:latin typeface="Afacad Flux"/>
+                <a:ea typeface="Afacad Flux"/>
+                <a:cs typeface="Afacad Flux"/>
+                <a:sym typeface="Afacad Flux"/>
+              </a:rPr>
+              <a:t>IOS </a:t>
+            </a:r>
+            <a:r>
+              <a:rPr lang="ko-KR" altLang="en-US" sz="2400" dirty="0">
+                <a:solidFill>
+                  <a:srgbClr val="334155"/>
+                </a:solidFill>
+                <a:latin typeface="Afacad Flux"/>
+                <a:ea typeface="Afacad Flux"/>
+                <a:cs typeface="Afacad Flux"/>
+                <a:sym typeface="Afacad Flux"/>
+              </a:rPr>
+              <a:t>운영체제를 사용하는 태블릿 입니다</a:t>
+            </a:r>
+            <a:r>
+              <a:rPr lang="en-US" altLang="ko-KR" sz="2400" dirty="0">
+                <a:solidFill>
+                  <a:srgbClr val="334155"/>
+                </a:solidFill>
+                <a:latin typeface="Afacad Flux"/>
+                <a:ea typeface="Afacad Flux"/>
+                <a:cs typeface="Afacad Flux"/>
+                <a:sym typeface="Afacad Flux"/>
+              </a:rPr>
+              <a:t>.</a:t>
+            </a:r>
+          </a:p>
+        </p:txBody>
+      </p:sp>
+      <p:sp>
+        <p:nvSpPr>
+          <p:cNvPr id="95" name="Google Shape;95;p14">
+            <a:extLst>
+              <a:ext uri="{FF2B5EF4-FFF2-40B4-BE49-F238E27FC236}">
+                <a16:creationId xmlns:a16="http://schemas.microsoft.com/office/drawing/2014/main" id="{1C7C5645-D2C8-6DA5-C06C-0675344ABB25}"/>
+              </a:ext>
+            </a:extLst>
+          </p:cNvPr>
+          <p:cNvSpPr txBox="1"/>
+          <p:nvPr/>
+        </p:nvSpPr>
+        <p:spPr>
+          <a:xfrm>
+            <a:off x="571500" y="571500"/>
+            <a:ext cx="11601450" cy="600164"/>
+          </a:xfrm>
+          <a:prstGeom prst="rect">
+            <a:avLst/>
+          </a:prstGeom>
+          <a:noFill/>
+          <a:ln>
+            <a:noFill/>
+          </a:ln>
+        </p:spPr>
+        <p:txBody>
+          <a:bodyPr spcFirstLastPara="1" wrap="square" lIns="0" tIns="0" rIns="0" bIns="0" anchor="t" anchorCtr="0">
+            <a:spAutoFit/>
+          </a:bodyPr>
+          <a:lstStyle/>
+          <a:p>
+            <a:pPr lvl="0"/>
+            <a:r>
+              <a:rPr lang="ko-KR" altLang="en-US" sz="3900" b="1" dirty="0" err="1">
+                <a:solidFill>
+                  <a:srgbClr val="1E293B"/>
+                </a:solidFill>
+                <a:latin typeface="Comfortaa"/>
+                <a:ea typeface="Comfortaa"/>
+                <a:cs typeface="Comfortaa"/>
+                <a:sym typeface="Comfortaa"/>
+              </a:rPr>
+              <a:t>태블릿이란</a:t>
+            </a:r>
+            <a:r>
+              <a:rPr lang="en-US" altLang="ko-KR" sz="3900" b="1" dirty="0">
+                <a:solidFill>
+                  <a:srgbClr val="1E293B"/>
+                </a:solidFill>
+                <a:latin typeface="Comfortaa"/>
+                <a:ea typeface="Comfortaa"/>
+                <a:cs typeface="Comfortaa"/>
+                <a:sym typeface="Comfortaa"/>
+              </a:rPr>
+              <a:t>?</a:t>
+            </a:r>
+            <a:endParaRPr dirty="0"/>
+          </a:p>
+        </p:txBody>
+      </p:sp>
+      <p:pic>
+        <p:nvPicPr>
+          <p:cNvPr id="2" name="그림 1">
+            <a:extLst>
+              <a:ext uri="{FF2B5EF4-FFF2-40B4-BE49-F238E27FC236}">
+                <a16:creationId xmlns:a16="http://schemas.microsoft.com/office/drawing/2014/main" id="{8F334942-E243-C66D-4F08-33BA8ECD3E63}"/>
+              </a:ext>
+            </a:extLst>
+          </p:cNvPr>
+          <p:cNvPicPr>
+            <a:picLocks noChangeAspect="1"/>
+          </p:cNvPicPr>
+          <p:nvPr/>
+        </p:nvPicPr>
+        <p:blipFill>
+          <a:blip r:embed="rId4"/>
+          <a:srcRect l="59109" t="64750" r="27041" b="-1726"/>
+          <a:stretch>
+            <a:fillRect/>
+          </a:stretch>
+        </p:blipFill>
+        <p:spPr>
+          <a:xfrm>
+            <a:off x="1348678" y="1869424"/>
+            <a:ext cx="2478024" cy="4303334"/>
+          </a:xfrm>
+          <a:prstGeom prst="rect">
+            <a:avLst/>
+          </a:prstGeom>
+        </p:spPr>
+      </p:pic>
+    </p:spTree>
+    <p:extLst>
+      <p:ext uri="{BB962C8B-B14F-4D97-AF65-F5344CB8AC3E}">
+        <p14:creationId xmlns:p14="http://schemas.microsoft.com/office/powerpoint/2010/main" val="2777824962"/>
       </p:ext>
     </p:extLst>
   </p:cSld>
